--- a/docs/week-16/cen429-week-16-sunum.tr.pptx
+++ b/docs/week-16/cen429-week-16-sunum.tr.pptx
@@ -32,6 +32,10 @@
     <p:sldId id="280" r:id="rId32"/>
     <p:sldId id="281" r:id="rId33"/>
     <p:sldId id="282" r:id="rId34"/>
+    <p:sldId id="283" r:id="rId35"/>
+    <p:sldId id="284" r:id="rId36"/>
+    <p:sldId id="285" r:id="rId37"/>
+    <p:sldId id="286" r:id="rId38"/>
   </p:sldIdLst>
   <p:sldSz cx="12191695" cy="6858000" type="screen4x3"/>
   <p:notesSz cx="6858000" cy="9144000"/>
@@ -4106,7 +4110,7 @@
                   <a:srgbClr val="006D77"/>
                 </a:solidFill>
               </a:rPr>
-              <a:t>10. hafta · anahtar noktalar</a:t>
+              <a:t>İyi şanslar</a:t>
             </a:r>
           </a:p>
         </p:txBody>
@@ -4120,7 +4124,7 @@
         <p:spPr>
           <a:xfrm>
             <a:off x="640080" y="1325880"/>
-            <a:ext cx="10911535" cy="1595120"/>
+            <a:ext cx="10911535" cy="843280"/>
           </a:xfrm>
           <a:prstGeom prst="rect">
             <a:avLst/>
@@ -4152,7 +4156,7 @@
                   <a:srgbClr val="1F2D3A"/>
                 </a:solidFill>
               </a:rPr>
-              <a:t>Güvenlik düzeyi; en zayıf halka.</a:t>
+              <a:t>Cevapları 16. hafta sayfasında</a:t>
             </a:r>
           </a:p>
           <a:p>
@@ -4175,22 +4179,15 @@
                   <a:srgbClr val="1F2D3A"/>
                 </a:solidFill>
               </a:rPr>
-              <a:t>Kip ve dolgu; dolgu kâhini → AEAD.</a:t>
-            </a:r>
-          </a:p>
-          <a:p>
-            <a:pPr>
-              <a:spcAft>
-                <a:spcPts val="300"/>
-              </a:spcAft>
-            </a:pPr>
+              <a:t>Kılavuzunuz bir </a:t>
+            </a:r>
             <a:r>
               <a:rPr sz="2000" b="1">
                 <a:solidFill>
-                  <a:srgbClr val="006D77"/>
-                </a:solidFill>
-              </a:rPr>
-              <a:t>• </a:t>
+                  <a:srgbClr val="1F2D3A"/>
+                </a:solidFill>
+              </a:rPr>
+              <a:t>portfolyo</a:t>
             </a:r>
             <a:r>
               <a:rPr sz="2000" b="0">
@@ -4198,30 +4195,7 @@
                   <a:srgbClr val="1F2D3A"/>
                 </a:solidFill>
               </a:rPr>
-              <a:t>HMAC, encrypt-then-MAC, replay.</a:t>
-            </a:r>
-          </a:p>
-          <a:p>
-            <a:pPr>
-              <a:spcAft>
-                <a:spcPts val="300"/>
-              </a:spcAft>
-            </a:pPr>
-            <a:r>
-              <a:rPr sz="2000" b="1">
-                <a:solidFill>
-                  <a:srgbClr val="006D77"/>
-                </a:solidFill>
-              </a:rPr>
-              <a:t>• </a:t>
-            </a:r>
-            <a:r>
-              <a:rPr sz="2000" b="0">
-                <a:solidFill>
-                  <a:srgbClr val="1F2D3A"/>
-                </a:solidFill>
-              </a:rPr>
-              <a:t>OAEP/PSS, Ed25519/X25519; PKI, X.509, CRL/OCSP.</a:t>
+              <a:t> öğesidir (gizli bilgi içermediğinden emin olun)</a:t>
             </a:r>
           </a:p>
         </p:txBody>
@@ -4396,126 +4370,35 @@
                   <a:srgbClr val="006D77"/>
                 </a:solidFill>
               </a:rPr>
-              <a:t>11. hafta · anahtar noktalar</a:t>
-            </a:r>
-          </a:p>
-        </p:txBody>
-      </p:sp>
-      <p:sp>
-        <p:nvSpPr>
-          <p:cNvPr id="7" name="TextBox 6"/>
-          <p:cNvSpPr txBox="1"/>
-          <p:nvPr/>
-        </p:nvSpPr>
-        <p:spPr>
-          <a:xfrm>
-            <a:off x="640080" y="1325880"/>
-            <a:ext cx="10911535" cy="1595120"/>
-          </a:xfrm>
-          <a:prstGeom prst="rect">
-            <a:avLst/>
-          </a:prstGeom>
-          <a:noFill/>
-        </p:spPr>
-        <p:txBody>
-          <a:bodyPr wrap="square" lIns="45720" rIns="45720">
-            <a:spAutoFit/>
-          </a:bodyPr>
-          <a:lstStyle/>
-          <a:p>
-            <a:pPr>
-              <a:spcAft>
-                <a:spcPts val="300"/>
-              </a:spcAft>
-            </a:pPr>
-            <a:r>
-              <a:rPr sz="2000" b="1">
-                <a:solidFill>
-                  <a:srgbClr val="006D77"/>
-                </a:solidFill>
-              </a:rPr>
-              <a:t>• </a:t>
-            </a:r>
-            <a:r>
-              <a:rPr sz="2000" b="0">
-                <a:solidFill>
-                  <a:srgbClr val="1F2D3A"/>
-                </a:solidFill>
-              </a:rPr>
-              <a:t>Kara/gri/beyaz kutu.</a:t>
-            </a:r>
-          </a:p>
-          <a:p>
-            <a:pPr>
-              <a:spcAft>
-                <a:spcPts val="300"/>
-              </a:spcAft>
-            </a:pPr>
-            <a:r>
-              <a:rPr sz="2000" b="1">
-                <a:solidFill>
-                  <a:srgbClr val="006D77"/>
-                </a:solidFill>
-              </a:rPr>
-              <a:t>• </a:t>
-            </a:r>
-            <a:r>
-              <a:rPr sz="2000" b="0">
-                <a:solidFill>
-                  <a:srgbClr val="1F2D3A"/>
-                </a:solidFill>
-              </a:rPr>
-              <a:t>Tablo tabanlı WBC; iç/dış kodlama.</a:t>
-            </a:r>
-          </a:p>
-          <a:p>
-            <a:pPr>
-              <a:spcAft>
-                <a:spcPts val="300"/>
-              </a:spcAft>
-            </a:pPr>
-            <a:r>
-              <a:rPr sz="2000" b="1">
-                <a:solidFill>
-                  <a:srgbClr val="006D77"/>
-                </a:solidFill>
-              </a:rPr>
-              <a:t>• </a:t>
-            </a:r>
-            <a:r>
-              <a:rPr sz="2000" b="0">
-                <a:solidFill>
-                  <a:srgbClr val="1F2D3A"/>
-                </a:solidFill>
-              </a:rPr>
-              <a:t>"Hepsi kırıldı" → WBC bir katman.</a:t>
-            </a:r>
-          </a:p>
-          <a:p>
-            <a:pPr>
-              <a:spcAft>
-                <a:spcPts val="300"/>
-              </a:spcAft>
-            </a:pPr>
-            <a:r>
-              <a:rPr sz="2000" b="1">
-                <a:solidFill>
-                  <a:srgbClr val="006D77"/>
-                </a:solidFill>
-              </a:rPr>
-              <a:t>• </a:t>
-            </a:r>
-            <a:r>
-              <a:rPr sz="2000" b="0">
-                <a:solidFill>
-                  <a:srgbClr val="1F2D3A"/>
-                </a:solidFill>
-              </a:rPr>
-              <a:t>Anahtar yenileme + cihaz bağlama + sunucu.</a:t>
-            </a:r>
-          </a:p>
-        </p:txBody>
-      </p:sp>
+              <a:t>Dönemin tek cümlesi — şema</a:t>
+            </a:r>
+          </a:p>
+        </p:txBody>
+      </p:sp>
+      <p:pic>
+        <p:nvPicPr>
+          <p:cNvPr id="7" name="Picture 6" descr="h16-04-donem-ozeti.png"/>
+          <p:cNvPicPr>
+            <a:picLocks noChangeAspect="1"/>
+          </p:cNvPicPr>
+          <p:nvPr/>
+        </p:nvPicPr>
+        <p:blipFill>
+          <a:blip r:embed="rId3"/>
+          <a:stretch>
+            <a:fillRect/>
+          </a:stretch>
+        </p:blipFill>
+        <p:spPr>
+          <a:xfrm>
+            <a:off x="2187499" y="1325880"/>
+            <a:ext cx="7816696" cy="4937760"/>
+          </a:xfrm>
+          <a:prstGeom prst="rect">
+            <a:avLst/>
+          </a:prstGeom>
+        </p:spPr>
+      </p:pic>
     </p:spTree>
   </p:cSld>
   <p:clrMapOvr>
@@ -4527,6 +4410,14 @@
 <file path=ppt/slides/slide12.xml><?xml version="1.0" encoding="utf-8"?>
 <p:sld xmlns:a="http://schemas.openxmlformats.org/drawingml/2006/main" xmlns:p="http://schemas.openxmlformats.org/presentationml/2006/main" xmlns:r="http://schemas.openxmlformats.org/officeDocument/2006/relationships">
   <p:cSld>
+    <p:bg>
+      <p:bgPr>
+        <a:solidFill>
+          <a:srgbClr val="006D77"/>
+        </a:solidFill>
+        <a:effectLst/>
+      </p:bgPr>
+    </p:bg>
     <p:spTree>
       <p:nvGrpSpPr>
         <p:cNvPr id="1" name=""/>
@@ -4534,33 +4425,9 @@
         <p:nvPr/>
       </p:nvGrpSpPr>
       <p:grpSpPr/>
-      <p:pic>
-        <p:nvPicPr>
-          <p:cNvPr id="2" name="Picture 1" descr="rteu_logo_kucuk.jpg"/>
-          <p:cNvPicPr>
-            <a:picLocks noChangeAspect="1"/>
-          </p:cNvPicPr>
-          <p:nvPr/>
-        </p:nvPicPr>
-        <p:blipFill>
-          <a:blip r:embed="rId2"/>
-          <a:stretch>
-            <a:fillRect/>
-          </a:stretch>
-        </p:blipFill>
-        <p:spPr>
-          <a:xfrm>
-            <a:off x="640080" y="164592"/>
-            <a:ext cx="242773" cy="329184"/>
-          </a:xfrm>
-          <a:prstGeom prst="rect">
-            <a:avLst/>
-          </a:prstGeom>
-        </p:spPr>
-      </p:pic>
-      <p:sp>
-        <p:nvSpPr>
-          <p:cNvPr id="3" name="TextBox 2"/>
+      <p:sp>
+        <p:nvSpPr>
+          <p:cNvPr id="2" name="TextBox 1"/>
           <p:cNvSpPr txBox="1"/>
           <p:nvPr/>
         </p:nvSpPr>
@@ -4583,7 +4450,7 @@
             <a:r>
               <a:rPr sz="1100" b="0">
                 <a:solidFill>
-                  <a:srgbClr val="5B6770"/>
+                  <a:srgbClr val="D8F0F2"/>
                 </a:solidFill>
               </a:rPr>
               <a:t>CEN429 Güvenli Programlama · Hafta 16</a:t>
@@ -4593,7 +4460,7 @@
       </p:sp>
       <p:sp>
         <p:nvSpPr>
-          <p:cNvPr id="4" name="TextBox 3"/>
+          <p:cNvPr id="3" name="TextBox 2"/>
           <p:cNvSpPr txBox="1"/>
           <p:nvPr/>
         </p:nvSpPr>
@@ -4616,7 +4483,7 @@
             <a:r>
               <a:rPr sz="1000" b="0">
                 <a:solidFill>
-                  <a:srgbClr val="5B6770"/>
+                  <a:srgbClr val="D8F0F2"/>
                 </a:solidFill>
               </a:rPr>
               <a:t>RTEÜ Bilgisayar Mühendisliği · 2026-2027 Güz</a:t>
@@ -4626,7 +4493,7 @@
       </p:sp>
       <p:sp>
         <p:nvSpPr>
-          <p:cNvPr id="5" name="TextBox 4"/>
+          <p:cNvPr id="4" name="TextBox 3"/>
           <p:cNvSpPr txBox="1"/>
           <p:nvPr/>
         </p:nvSpPr>
@@ -4650,7 +4517,7 @@
             <a:r>
               <a:rPr sz="1000" b="0">
                 <a:solidFill>
-                  <a:srgbClr val="5B6770"/>
+                  <a:srgbClr val="D8F0F2"/>
                 </a:solidFill>
               </a:rPr>
               <a:t>12</a:t>
@@ -4660,47 +4527,14 @@
       </p:sp>
       <p:sp>
         <p:nvSpPr>
-          <p:cNvPr id="6" name="TextBox 5"/>
-          <p:cNvSpPr txBox="1"/>
-          <p:nvPr/>
-        </p:nvSpPr>
-        <p:spPr>
-          <a:xfrm>
-            <a:off x="640080" y="548640"/>
-            <a:ext cx="10911535" cy="731520"/>
-          </a:xfrm>
-          <a:prstGeom prst="rect">
-            <a:avLst/>
-          </a:prstGeom>
-          <a:noFill/>
-        </p:spPr>
-        <p:txBody>
-          <a:bodyPr wrap="square" lIns="45720" rIns="45720" anchor="ctr">
-            <a:spAutoFit/>
-          </a:bodyPr>
-          <a:lstStyle/>
-          <a:p>
-            <a:r>
-              <a:rPr sz="3000" b="1">
-                <a:solidFill>
-                  <a:srgbClr val="006D77"/>
-                </a:solidFill>
-              </a:rPr>
-              <a:t>12. hafta · anahtar noktalar</a:t>
-            </a:r>
-          </a:p>
-        </p:txBody>
-      </p:sp>
-      <p:sp>
-        <p:nvSpPr>
-          <p:cNvPr id="7" name="TextBox 6"/>
-          <p:cNvSpPr txBox="1"/>
-          <p:nvPr/>
-        </p:nvSpPr>
-        <p:spPr>
-          <a:xfrm>
-            <a:off x="640080" y="1325880"/>
-            <a:ext cx="10911535" cy="1595120"/>
+          <p:cNvPr id="5" name="TextBox 4"/>
+          <p:cNvSpPr txBox="1"/>
+          <p:nvPr/>
+        </p:nvSpPr>
+        <p:spPr>
+          <a:xfrm>
+            <a:off x="640080" y="2743200"/>
+            <a:ext cx="10911535" cy="1280160"/>
           </a:xfrm>
           <a:prstGeom prst="rect">
             <a:avLst/>
@@ -4713,95 +4547,14 @@
           </a:bodyPr>
           <a:lstStyle/>
           <a:p>
-            <a:pPr>
-              <a:spcAft>
-                <a:spcPts val="300"/>
-              </a:spcAft>
-            </a:pPr>
-            <a:r>
-              <a:rPr sz="2000" b="1">
-                <a:solidFill>
-                  <a:srgbClr val="006D77"/>
-                </a:solidFill>
-              </a:rPr>
-              <a:t>• </a:t>
-            </a:r>
-            <a:r>
-              <a:rPr sz="2000" b="0">
-                <a:solidFill>
-                  <a:srgbClr val="1F2D3A"/>
-                </a:solidFill>
-              </a:rPr>
-              <a:t>13 adım değerlendirme.</a:t>
-            </a:r>
-          </a:p>
-          <a:p>
-            <a:pPr>
-              <a:spcAft>
-                <a:spcPts val="300"/>
-              </a:spcAft>
-            </a:pPr>
-            <a:r>
-              <a:rPr sz="2000" b="1">
-                <a:solidFill>
-                  <a:srgbClr val="006D77"/>
-                </a:solidFill>
-              </a:rPr>
-              <a:t>• </a:t>
-            </a:r>
-            <a:r>
-              <a:rPr sz="2000" b="0">
-                <a:solidFill>
-                  <a:srgbClr val="1F2D3A"/>
-                </a:solidFill>
-              </a:rPr>
-              <a:t>Saldırı potansiyeli + CVSS.</a:t>
-            </a:r>
-          </a:p>
-          <a:p>
-            <a:pPr>
-              <a:spcAft>
-                <a:spcPts val="300"/>
-              </a:spcAft>
-            </a:pPr>
-            <a:r>
-              <a:rPr sz="2000" b="1">
-                <a:solidFill>
-                  <a:srgbClr val="006D77"/>
-                </a:solidFill>
-              </a:rPr>
-              <a:t>• </a:t>
-            </a:r>
-            <a:r>
-              <a:rPr sz="2000" b="0">
-                <a:solidFill>
-                  <a:srgbClr val="1F2D3A"/>
-                </a:solidFill>
-              </a:rPr>
-              <a:t>Sızma testi planı; test kartı.</a:t>
-            </a:r>
-          </a:p>
-          <a:p>
-            <a:pPr>
-              <a:spcAft>
-                <a:spcPts val="300"/>
-              </a:spcAft>
-            </a:pPr>
-            <a:r>
-              <a:rPr sz="2000" b="1">
-                <a:solidFill>
-                  <a:srgbClr val="006D77"/>
-                </a:solidFill>
-              </a:rPr>
-              <a:t>• </a:t>
-            </a:r>
-            <a:r>
-              <a:rPr sz="2000" b="0">
-                <a:solidFill>
-                  <a:srgbClr val="1F2D3A"/>
-                </a:solidFill>
-              </a:rPr>
-              <a:t>Etki analizi vs delta.</a:t>
+            <a:pPr algn="l"/>
+            <a:r>
+              <a:rPr sz="4000" b="1">
+                <a:solidFill>
+                  <a:srgbClr val="FFFFFF"/>
+                </a:solidFill>
+              </a:rPr>
+              <a:t>Ek · Hafta hafta konu haritası (9–14)</a:t>
             </a:r>
           </a:p>
         </p:txBody>
@@ -4976,7 +4729,7 @@
                   <a:srgbClr val="006D77"/>
                 </a:solidFill>
               </a:rPr>
-              <a:t>13. hafta · anahtar noktalar</a:t>
+              <a:t>9. hafta · anahtar noktalar</a:t>
             </a:r>
           </a:p>
         </p:txBody>
@@ -5022,7 +4775,23 @@
                   <a:srgbClr val="1F2D3A"/>
                 </a:solidFill>
               </a:rPr>
-              <a:t>İyi gereksinim; izlenebilirlik.</a:t>
+              <a:t>Gizleme: kırılamazlık değil </a:t>
+            </a:r>
+            <a:r>
+              <a:rPr sz="2000" b="1">
+                <a:solidFill>
+                  <a:srgbClr val="1F2D3A"/>
+                </a:solidFill>
+              </a:rPr>
+              <a:t>maliyet</a:t>
+            </a:r>
+            <a:r>
+              <a:rPr sz="2000" b="0">
+                <a:solidFill>
+                  <a:srgbClr val="1F2D3A"/>
+                </a:solidFill>
+              </a:rPr>
+              <a:t>.</a:t>
             </a:r>
           </a:p>
           <a:p>
@@ -5045,7 +4814,7 @@
                   <a:srgbClr val="1F2D3A"/>
                 </a:solidFill>
               </a:rPr>
-              <a:t>Uyum matrisi; devredilenler.</a:t>
+              <a:t>Kurallar: opak yüklem, düzleştirme, sahte/ölü, veri kodlama.</a:t>
             </a:r>
           </a:p>
           <a:p>
@@ -5068,7 +4837,7 @@
                   <a:srgbClr val="1F2D3A"/>
                 </a:solidFill>
               </a:rPr>
-              <a:t>CC (TOE/ST/PP/SFR/SAR/EAL); FIPS 140-3.</a:t>
+              <a:t>Ölçme: güç, dayanıklılık, gizlilik, maliyet.</a:t>
             </a:r>
           </a:p>
           <a:p>
@@ -5091,7 +4860,7 @@
                   <a:srgbClr val="1F2D3A"/>
                 </a:solidFill>
               </a:rPr>
-              <a:t>ETSI/EMVCo/PCI/MASVS.</a:t>
+              <a:t>Çeşitlendirme.</a:t>
             </a:r>
           </a:p>
         </p:txBody>
@@ -5266,7 +5035,7 @@
                   <a:srgbClr val="006D77"/>
                 </a:solidFill>
               </a:rPr>
-              <a:t>14. hafta · anahtar noktalar</a:t>
+              <a:t>10. hafta · anahtar noktalar</a:t>
             </a:r>
           </a:p>
         </p:txBody>
@@ -5312,7 +5081,7 @@
                   <a:srgbClr val="1F2D3A"/>
                 </a:solidFill>
               </a:rPr>
-              <a:t>Kaynaktan kaynağa (Tigress).</a:t>
+              <a:t>Güvenlik düzeyi; en zayıf halka.</a:t>
             </a:r>
           </a:p>
           <a:p>
@@ -5335,7 +5104,7 @@
                   <a:srgbClr val="1F2D3A"/>
                 </a:solidFill>
               </a:rPr>
-              <a:t>Dönüşüm hattı; tohumla çeşitlendirme.</a:t>
+              <a:t>Kip ve dolgu; dolgu kâhini → AEAD.</a:t>
             </a:r>
           </a:p>
           <a:p>
@@ -5358,7 +5127,7 @@
                   <a:srgbClr val="1F2D3A"/>
                 </a:solidFill>
               </a:rPr>
-              <a:t>Maliyet + dayanıklılık ölçümü.</a:t>
+              <a:t>HMAC, encrypt-then-MAC, replay.</a:t>
             </a:r>
           </a:p>
           <a:p>
@@ -5381,7 +5150,7 @@
                   <a:srgbClr val="1F2D3A"/>
                 </a:solidFill>
               </a:rPr>
-              <a:t>Derleme hattı (S15).</a:t>
+              <a:t>OAEP/PSS, Ed25519/X25519; PKI, X.509, CRL/OCSP.</a:t>
             </a:r>
           </a:p>
         </p:txBody>
@@ -5524,6 +5293,1166 @@
                 </a:solidFill>
               </a:rPr>
               <a:t>15</a:t>
+            </a:r>
+          </a:p>
+        </p:txBody>
+      </p:sp>
+      <p:sp>
+        <p:nvSpPr>
+          <p:cNvPr id="6" name="TextBox 5"/>
+          <p:cNvSpPr txBox="1"/>
+          <p:nvPr/>
+        </p:nvSpPr>
+        <p:spPr>
+          <a:xfrm>
+            <a:off x="640080" y="548640"/>
+            <a:ext cx="10911535" cy="731520"/>
+          </a:xfrm>
+          <a:prstGeom prst="rect">
+            <a:avLst/>
+          </a:prstGeom>
+          <a:noFill/>
+        </p:spPr>
+        <p:txBody>
+          <a:bodyPr wrap="square" lIns="45720" rIns="45720" anchor="ctr">
+            <a:spAutoFit/>
+          </a:bodyPr>
+          <a:lstStyle/>
+          <a:p>
+            <a:r>
+              <a:rPr sz="3000" b="1">
+                <a:solidFill>
+                  <a:srgbClr val="006D77"/>
+                </a:solidFill>
+              </a:rPr>
+              <a:t>11. hafta · anahtar noktalar</a:t>
+            </a:r>
+          </a:p>
+        </p:txBody>
+      </p:sp>
+      <p:sp>
+        <p:nvSpPr>
+          <p:cNvPr id="7" name="TextBox 6"/>
+          <p:cNvSpPr txBox="1"/>
+          <p:nvPr/>
+        </p:nvSpPr>
+        <p:spPr>
+          <a:xfrm>
+            <a:off x="640080" y="1325880"/>
+            <a:ext cx="10911535" cy="1595120"/>
+          </a:xfrm>
+          <a:prstGeom prst="rect">
+            <a:avLst/>
+          </a:prstGeom>
+          <a:noFill/>
+        </p:spPr>
+        <p:txBody>
+          <a:bodyPr wrap="square" lIns="45720" rIns="45720">
+            <a:spAutoFit/>
+          </a:bodyPr>
+          <a:lstStyle/>
+          <a:p>
+            <a:pPr>
+              <a:spcAft>
+                <a:spcPts val="300"/>
+              </a:spcAft>
+            </a:pPr>
+            <a:r>
+              <a:rPr sz="2000" b="1">
+                <a:solidFill>
+                  <a:srgbClr val="006D77"/>
+                </a:solidFill>
+              </a:rPr>
+              <a:t>• </a:t>
+            </a:r>
+            <a:r>
+              <a:rPr sz="2000" b="0">
+                <a:solidFill>
+                  <a:srgbClr val="1F2D3A"/>
+                </a:solidFill>
+              </a:rPr>
+              <a:t>Kara/gri/beyaz kutu.</a:t>
+            </a:r>
+          </a:p>
+          <a:p>
+            <a:pPr>
+              <a:spcAft>
+                <a:spcPts val="300"/>
+              </a:spcAft>
+            </a:pPr>
+            <a:r>
+              <a:rPr sz="2000" b="1">
+                <a:solidFill>
+                  <a:srgbClr val="006D77"/>
+                </a:solidFill>
+              </a:rPr>
+              <a:t>• </a:t>
+            </a:r>
+            <a:r>
+              <a:rPr sz="2000" b="0">
+                <a:solidFill>
+                  <a:srgbClr val="1F2D3A"/>
+                </a:solidFill>
+              </a:rPr>
+              <a:t>Tablo tabanlı WBC; iç/dış kodlama.</a:t>
+            </a:r>
+          </a:p>
+          <a:p>
+            <a:pPr>
+              <a:spcAft>
+                <a:spcPts val="300"/>
+              </a:spcAft>
+            </a:pPr>
+            <a:r>
+              <a:rPr sz="2000" b="1">
+                <a:solidFill>
+                  <a:srgbClr val="006D77"/>
+                </a:solidFill>
+              </a:rPr>
+              <a:t>• </a:t>
+            </a:r>
+            <a:r>
+              <a:rPr sz="2000" b="0">
+                <a:solidFill>
+                  <a:srgbClr val="1F2D3A"/>
+                </a:solidFill>
+              </a:rPr>
+              <a:t>"Hepsi kırıldı" → WBC bir katman.</a:t>
+            </a:r>
+          </a:p>
+          <a:p>
+            <a:pPr>
+              <a:spcAft>
+                <a:spcPts val="300"/>
+              </a:spcAft>
+            </a:pPr>
+            <a:r>
+              <a:rPr sz="2000" b="1">
+                <a:solidFill>
+                  <a:srgbClr val="006D77"/>
+                </a:solidFill>
+              </a:rPr>
+              <a:t>• </a:t>
+            </a:r>
+            <a:r>
+              <a:rPr sz="2000" b="0">
+                <a:solidFill>
+                  <a:srgbClr val="1F2D3A"/>
+                </a:solidFill>
+              </a:rPr>
+              <a:t>Anahtar yenileme + cihaz bağlama + sunucu.</a:t>
+            </a:r>
+          </a:p>
+        </p:txBody>
+      </p:sp>
+    </p:spTree>
+  </p:cSld>
+  <p:clrMapOvr>
+    <a:masterClrMapping/>
+  </p:clrMapOvr>
+</p:sld>
+</file>
+
+<file path=ppt/slides/slide16.xml><?xml version="1.0" encoding="utf-8"?>
+<p:sld xmlns:a="http://schemas.openxmlformats.org/drawingml/2006/main" xmlns:p="http://schemas.openxmlformats.org/presentationml/2006/main" xmlns:r="http://schemas.openxmlformats.org/officeDocument/2006/relationships">
+  <p:cSld>
+    <p:spTree>
+      <p:nvGrpSpPr>
+        <p:cNvPr id="1" name=""/>
+        <p:cNvGrpSpPr/>
+        <p:nvPr/>
+      </p:nvGrpSpPr>
+      <p:grpSpPr/>
+      <p:pic>
+        <p:nvPicPr>
+          <p:cNvPr id="2" name="Picture 1" descr="rteu_logo_kucuk.jpg"/>
+          <p:cNvPicPr>
+            <a:picLocks noChangeAspect="1"/>
+          </p:cNvPicPr>
+          <p:nvPr/>
+        </p:nvPicPr>
+        <p:blipFill>
+          <a:blip r:embed="rId2"/>
+          <a:stretch>
+            <a:fillRect/>
+          </a:stretch>
+        </p:blipFill>
+        <p:spPr>
+          <a:xfrm>
+            <a:off x="640080" y="164592"/>
+            <a:ext cx="242773" cy="329184"/>
+          </a:xfrm>
+          <a:prstGeom prst="rect">
+            <a:avLst/>
+          </a:prstGeom>
+        </p:spPr>
+      </p:pic>
+      <p:sp>
+        <p:nvSpPr>
+          <p:cNvPr id="3" name="TextBox 2"/>
+          <p:cNvSpPr txBox="1"/>
+          <p:nvPr/>
+        </p:nvSpPr>
+        <p:spPr>
+          <a:xfrm>
+            <a:off x="1051560" y="182880"/>
+            <a:ext cx="7315200" cy="320040"/>
+          </a:xfrm>
+          <a:prstGeom prst="rect">
+            <a:avLst/>
+          </a:prstGeom>
+          <a:noFill/>
+        </p:spPr>
+        <p:txBody>
+          <a:bodyPr wrap="square" lIns="45720" rIns="45720">
+            <a:spAutoFit/>
+          </a:bodyPr>
+          <a:lstStyle/>
+          <a:p>
+            <a:r>
+              <a:rPr sz="1100" b="0">
+                <a:solidFill>
+                  <a:srgbClr val="5B6770"/>
+                </a:solidFill>
+              </a:rPr>
+              <a:t>CEN429 Güvenli Programlama · Hafta 16</a:t>
+            </a:r>
+          </a:p>
+        </p:txBody>
+      </p:sp>
+      <p:sp>
+        <p:nvSpPr>
+          <p:cNvPr id="4" name="TextBox 3"/>
+          <p:cNvSpPr txBox="1"/>
+          <p:nvPr/>
+        </p:nvSpPr>
+        <p:spPr>
+          <a:xfrm>
+            <a:off x="640080" y="6446520"/>
+            <a:ext cx="7315200" cy="274320"/>
+          </a:xfrm>
+          <a:prstGeom prst="rect">
+            <a:avLst/>
+          </a:prstGeom>
+          <a:noFill/>
+        </p:spPr>
+        <p:txBody>
+          <a:bodyPr wrap="square" lIns="45720" rIns="45720">
+            <a:spAutoFit/>
+          </a:bodyPr>
+          <a:lstStyle/>
+          <a:p>
+            <a:r>
+              <a:rPr sz="1000" b="0">
+                <a:solidFill>
+                  <a:srgbClr val="5B6770"/>
+                </a:solidFill>
+              </a:rPr>
+              <a:t>RTEÜ Bilgisayar Mühendisliği · 2026-2027 Güz</a:t>
+            </a:r>
+          </a:p>
+        </p:txBody>
+      </p:sp>
+      <p:sp>
+        <p:nvSpPr>
+          <p:cNvPr id="5" name="TextBox 4"/>
+          <p:cNvSpPr txBox="1"/>
+          <p:nvPr/>
+        </p:nvSpPr>
+        <p:spPr>
+          <a:xfrm>
+            <a:off x="10637215" y="6446520"/>
+            <a:ext cx="914400" cy="274320"/>
+          </a:xfrm>
+          <a:prstGeom prst="rect">
+            <a:avLst/>
+          </a:prstGeom>
+          <a:noFill/>
+        </p:spPr>
+        <p:txBody>
+          <a:bodyPr wrap="square" lIns="45720" rIns="45720">
+            <a:spAutoFit/>
+          </a:bodyPr>
+          <a:lstStyle/>
+          <a:p>
+            <a:pPr algn="r"/>
+            <a:r>
+              <a:rPr sz="1000" b="0">
+                <a:solidFill>
+                  <a:srgbClr val="5B6770"/>
+                </a:solidFill>
+              </a:rPr>
+              <a:t>16</a:t>
+            </a:r>
+          </a:p>
+        </p:txBody>
+      </p:sp>
+      <p:sp>
+        <p:nvSpPr>
+          <p:cNvPr id="6" name="TextBox 5"/>
+          <p:cNvSpPr txBox="1"/>
+          <p:nvPr/>
+        </p:nvSpPr>
+        <p:spPr>
+          <a:xfrm>
+            <a:off x="640080" y="548640"/>
+            <a:ext cx="10911535" cy="731520"/>
+          </a:xfrm>
+          <a:prstGeom prst="rect">
+            <a:avLst/>
+          </a:prstGeom>
+          <a:noFill/>
+        </p:spPr>
+        <p:txBody>
+          <a:bodyPr wrap="square" lIns="45720" rIns="45720" anchor="ctr">
+            <a:spAutoFit/>
+          </a:bodyPr>
+          <a:lstStyle/>
+          <a:p>
+            <a:r>
+              <a:rPr sz="3000" b="1">
+                <a:solidFill>
+                  <a:srgbClr val="006D77"/>
+                </a:solidFill>
+              </a:rPr>
+              <a:t>12. hafta · anahtar noktalar</a:t>
+            </a:r>
+          </a:p>
+        </p:txBody>
+      </p:sp>
+      <p:sp>
+        <p:nvSpPr>
+          <p:cNvPr id="7" name="TextBox 6"/>
+          <p:cNvSpPr txBox="1"/>
+          <p:nvPr/>
+        </p:nvSpPr>
+        <p:spPr>
+          <a:xfrm>
+            <a:off x="640080" y="1325880"/>
+            <a:ext cx="10911535" cy="1595120"/>
+          </a:xfrm>
+          <a:prstGeom prst="rect">
+            <a:avLst/>
+          </a:prstGeom>
+          <a:noFill/>
+        </p:spPr>
+        <p:txBody>
+          <a:bodyPr wrap="square" lIns="45720" rIns="45720">
+            <a:spAutoFit/>
+          </a:bodyPr>
+          <a:lstStyle/>
+          <a:p>
+            <a:pPr>
+              <a:spcAft>
+                <a:spcPts val="300"/>
+              </a:spcAft>
+            </a:pPr>
+            <a:r>
+              <a:rPr sz="2000" b="1">
+                <a:solidFill>
+                  <a:srgbClr val="006D77"/>
+                </a:solidFill>
+              </a:rPr>
+              <a:t>• </a:t>
+            </a:r>
+            <a:r>
+              <a:rPr sz="2000" b="0">
+                <a:solidFill>
+                  <a:srgbClr val="1F2D3A"/>
+                </a:solidFill>
+              </a:rPr>
+              <a:t>13 adım değerlendirme.</a:t>
+            </a:r>
+          </a:p>
+          <a:p>
+            <a:pPr>
+              <a:spcAft>
+                <a:spcPts val="300"/>
+              </a:spcAft>
+            </a:pPr>
+            <a:r>
+              <a:rPr sz="2000" b="1">
+                <a:solidFill>
+                  <a:srgbClr val="006D77"/>
+                </a:solidFill>
+              </a:rPr>
+              <a:t>• </a:t>
+            </a:r>
+            <a:r>
+              <a:rPr sz="2000" b="0">
+                <a:solidFill>
+                  <a:srgbClr val="1F2D3A"/>
+                </a:solidFill>
+              </a:rPr>
+              <a:t>Saldırı potansiyeli + CVSS.</a:t>
+            </a:r>
+          </a:p>
+          <a:p>
+            <a:pPr>
+              <a:spcAft>
+                <a:spcPts val="300"/>
+              </a:spcAft>
+            </a:pPr>
+            <a:r>
+              <a:rPr sz="2000" b="1">
+                <a:solidFill>
+                  <a:srgbClr val="006D77"/>
+                </a:solidFill>
+              </a:rPr>
+              <a:t>• </a:t>
+            </a:r>
+            <a:r>
+              <a:rPr sz="2000" b="0">
+                <a:solidFill>
+                  <a:srgbClr val="1F2D3A"/>
+                </a:solidFill>
+              </a:rPr>
+              <a:t>Sızma testi planı; test kartı.</a:t>
+            </a:r>
+          </a:p>
+          <a:p>
+            <a:pPr>
+              <a:spcAft>
+                <a:spcPts val="300"/>
+              </a:spcAft>
+            </a:pPr>
+            <a:r>
+              <a:rPr sz="2000" b="1">
+                <a:solidFill>
+                  <a:srgbClr val="006D77"/>
+                </a:solidFill>
+              </a:rPr>
+              <a:t>• </a:t>
+            </a:r>
+            <a:r>
+              <a:rPr sz="2000" b="0">
+                <a:solidFill>
+                  <a:srgbClr val="1F2D3A"/>
+                </a:solidFill>
+              </a:rPr>
+              <a:t>Etki analizi vs delta.</a:t>
+            </a:r>
+          </a:p>
+        </p:txBody>
+      </p:sp>
+    </p:spTree>
+  </p:cSld>
+  <p:clrMapOvr>
+    <a:masterClrMapping/>
+  </p:clrMapOvr>
+</p:sld>
+</file>
+
+<file path=ppt/slides/slide17.xml><?xml version="1.0" encoding="utf-8"?>
+<p:sld xmlns:a="http://schemas.openxmlformats.org/drawingml/2006/main" xmlns:p="http://schemas.openxmlformats.org/presentationml/2006/main" xmlns:r="http://schemas.openxmlformats.org/officeDocument/2006/relationships">
+  <p:cSld>
+    <p:spTree>
+      <p:nvGrpSpPr>
+        <p:cNvPr id="1" name=""/>
+        <p:cNvGrpSpPr/>
+        <p:nvPr/>
+      </p:nvGrpSpPr>
+      <p:grpSpPr/>
+      <p:pic>
+        <p:nvPicPr>
+          <p:cNvPr id="2" name="Picture 1" descr="rteu_logo_kucuk.jpg"/>
+          <p:cNvPicPr>
+            <a:picLocks noChangeAspect="1"/>
+          </p:cNvPicPr>
+          <p:nvPr/>
+        </p:nvPicPr>
+        <p:blipFill>
+          <a:blip r:embed="rId2"/>
+          <a:stretch>
+            <a:fillRect/>
+          </a:stretch>
+        </p:blipFill>
+        <p:spPr>
+          <a:xfrm>
+            <a:off x="640080" y="164592"/>
+            <a:ext cx="242773" cy="329184"/>
+          </a:xfrm>
+          <a:prstGeom prst="rect">
+            <a:avLst/>
+          </a:prstGeom>
+        </p:spPr>
+      </p:pic>
+      <p:sp>
+        <p:nvSpPr>
+          <p:cNvPr id="3" name="TextBox 2"/>
+          <p:cNvSpPr txBox="1"/>
+          <p:nvPr/>
+        </p:nvSpPr>
+        <p:spPr>
+          <a:xfrm>
+            <a:off x="1051560" y="182880"/>
+            <a:ext cx="7315200" cy="320040"/>
+          </a:xfrm>
+          <a:prstGeom prst="rect">
+            <a:avLst/>
+          </a:prstGeom>
+          <a:noFill/>
+        </p:spPr>
+        <p:txBody>
+          <a:bodyPr wrap="square" lIns="45720" rIns="45720">
+            <a:spAutoFit/>
+          </a:bodyPr>
+          <a:lstStyle/>
+          <a:p>
+            <a:r>
+              <a:rPr sz="1100" b="0">
+                <a:solidFill>
+                  <a:srgbClr val="5B6770"/>
+                </a:solidFill>
+              </a:rPr>
+              <a:t>CEN429 Güvenli Programlama · Hafta 16</a:t>
+            </a:r>
+          </a:p>
+        </p:txBody>
+      </p:sp>
+      <p:sp>
+        <p:nvSpPr>
+          <p:cNvPr id="4" name="TextBox 3"/>
+          <p:cNvSpPr txBox="1"/>
+          <p:nvPr/>
+        </p:nvSpPr>
+        <p:spPr>
+          <a:xfrm>
+            <a:off x="640080" y="6446520"/>
+            <a:ext cx="7315200" cy="274320"/>
+          </a:xfrm>
+          <a:prstGeom prst="rect">
+            <a:avLst/>
+          </a:prstGeom>
+          <a:noFill/>
+        </p:spPr>
+        <p:txBody>
+          <a:bodyPr wrap="square" lIns="45720" rIns="45720">
+            <a:spAutoFit/>
+          </a:bodyPr>
+          <a:lstStyle/>
+          <a:p>
+            <a:r>
+              <a:rPr sz="1000" b="0">
+                <a:solidFill>
+                  <a:srgbClr val="5B6770"/>
+                </a:solidFill>
+              </a:rPr>
+              <a:t>RTEÜ Bilgisayar Mühendisliği · 2026-2027 Güz</a:t>
+            </a:r>
+          </a:p>
+        </p:txBody>
+      </p:sp>
+      <p:sp>
+        <p:nvSpPr>
+          <p:cNvPr id="5" name="TextBox 4"/>
+          <p:cNvSpPr txBox="1"/>
+          <p:nvPr/>
+        </p:nvSpPr>
+        <p:spPr>
+          <a:xfrm>
+            <a:off x="10637215" y="6446520"/>
+            <a:ext cx="914400" cy="274320"/>
+          </a:xfrm>
+          <a:prstGeom prst="rect">
+            <a:avLst/>
+          </a:prstGeom>
+          <a:noFill/>
+        </p:spPr>
+        <p:txBody>
+          <a:bodyPr wrap="square" lIns="45720" rIns="45720">
+            <a:spAutoFit/>
+          </a:bodyPr>
+          <a:lstStyle/>
+          <a:p>
+            <a:pPr algn="r"/>
+            <a:r>
+              <a:rPr sz="1000" b="0">
+                <a:solidFill>
+                  <a:srgbClr val="5B6770"/>
+                </a:solidFill>
+              </a:rPr>
+              <a:t>17</a:t>
+            </a:r>
+          </a:p>
+        </p:txBody>
+      </p:sp>
+      <p:sp>
+        <p:nvSpPr>
+          <p:cNvPr id="6" name="TextBox 5"/>
+          <p:cNvSpPr txBox="1"/>
+          <p:nvPr/>
+        </p:nvSpPr>
+        <p:spPr>
+          <a:xfrm>
+            <a:off x="640080" y="548640"/>
+            <a:ext cx="10911535" cy="731520"/>
+          </a:xfrm>
+          <a:prstGeom prst="rect">
+            <a:avLst/>
+          </a:prstGeom>
+          <a:noFill/>
+        </p:spPr>
+        <p:txBody>
+          <a:bodyPr wrap="square" lIns="45720" rIns="45720" anchor="ctr">
+            <a:spAutoFit/>
+          </a:bodyPr>
+          <a:lstStyle/>
+          <a:p>
+            <a:r>
+              <a:rPr sz="3000" b="1">
+                <a:solidFill>
+                  <a:srgbClr val="006D77"/>
+                </a:solidFill>
+              </a:rPr>
+              <a:t>13. hafta · anahtar noktalar</a:t>
+            </a:r>
+          </a:p>
+        </p:txBody>
+      </p:sp>
+      <p:sp>
+        <p:nvSpPr>
+          <p:cNvPr id="7" name="TextBox 6"/>
+          <p:cNvSpPr txBox="1"/>
+          <p:nvPr/>
+        </p:nvSpPr>
+        <p:spPr>
+          <a:xfrm>
+            <a:off x="640080" y="1325880"/>
+            <a:ext cx="10911535" cy="1595120"/>
+          </a:xfrm>
+          <a:prstGeom prst="rect">
+            <a:avLst/>
+          </a:prstGeom>
+          <a:noFill/>
+        </p:spPr>
+        <p:txBody>
+          <a:bodyPr wrap="square" lIns="45720" rIns="45720">
+            <a:spAutoFit/>
+          </a:bodyPr>
+          <a:lstStyle/>
+          <a:p>
+            <a:pPr>
+              <a:spcAft>
+                <a:spcPts val="300"/>
+              </a:spcAft>
+            </a:pPr>
+            <a:r>
+              <a:rPr sz="2000" b="1">
+                <a:solidFill>
+                  <a:srgbClr val="006D77"/>
+                </a:solidFill>
+              </a:rPr>
+              <a:t>• </a:t>
+            </a:r>
+            <a:r>
+              <a:rPr sz="2000" b="0">
+                <a:solidFill>
+                  <a:srgbClr val="1F2D3A"/>
+                </a:solidFill>
+              </a:rPr>
+              <a:t>İyi gereksinim; izlenebilirlik.</a:t>
+            </a:r>
+          </a:p>
+          <a:p>
+            <a:pPr>
+              <a:spcAft>
+                <a:spcPts val="300"/>
+              </a:spcAft>
+            </a:pPr>
+            <a:r>
+              <a:rPr sz="2000" b="1">
+                <a:solidFill>
+                  <a:srgbClr val="006D77"/>
+                </a:solidFill>
+              </a:rPr>
+              <a:t>• </a:t>
+            </a:r>
+            <a:r>
+              <a:rPr sz="2000" b="0">
+                <a:solidFill>
+                  <a:srgbClr val="1F2D3A"/>
+                </a:solidFill>
+              </a:rPr>
+              <a:t>Uyum matrisi; devredilenler.</a:t>
+            </a:r>
+          </a:p>
+          <a:p>
+            <a:pPr>
+              <a:spcAft>
+                <a:spcPts val="300"/>
+              </a:spcAft>
+            </a:pPr>
+            <a:r>
+              <a:rPr sz="2000" b="1">
+                <a:solidFill>
+                  <a:srgbClr val="006D77"/>
+                </a:solidFill>
+              </a:rPr>
+              <a:t>• </a:t>
+            </a:r>
+            <a:r>
+              <a:rPr sz="2000" b="0">
+                <a:solidFill>
+                  <a:srgbClr val="1F2D3A"/>
+                </a:solidFill>
+              </a:rPr>
+              <a:t>CC (TOE/ST/PP/SFR/SAR/EAL); FIPS 140-3.</a:t>
+            </a:r>
+          </a:p>
+          <a:p>
+            <a:pPr>
+              <a:spcAft>
+                <a:spcPts val="300"/>
+              </a:spcAft>
+            </a:pPr>
+            <a:r>
+              <a:rPr sz="2000" b="1">
+                <a:solidFill>
+                  <a:srgbClr val="006D77"/>
+                </a:solidFill>
+              </a:rPr>
+              <a:t>• </a:t>
+            </a:r>
+            <a:r>
+              <a:rPr sz="2000" b="0">
+                <a:solidFill>
+                  <a:srgbClr val="1F2D3A"/>
+                </a:solidFill>
+              </a:rPr>
+              <a:t>ETSI/EMVCo/PCI/MASVS.</a:t>
+            </a:r>
+          </a:p>
+        </p:txBody>
+      </p:sp>
+    </p:spTree>
+  </p:cSld>
+  <p:clrMapOvr>
+    <a:masterClrMapping/>
+  </p:clrMapOvr>
+</p:sld>
+</file>
+
+<file path=ppt/slides/slide18.xml><?xml version="1.0" encoding="utf-8"?>
+<p:sld xmlns:a="http://schemas.openxmlformats.org/drawingml/2006/main" xmlns:p="http://schemas.openxmlformats.org/presentationml/2006/main" xmlns:r="http://schemas.openxmlformats.org/officeDocument/2006/relationships">
+  <p:cSld>
+    <p:spTree>
+      <p:nvGrpSpPr>
+        <p:cNvPr id="1" name=""/>
+        <p:cNvGrpSpPr/>
+        <p:nvPr/>
+      </p:nvGrpSpPr>
+      <p:grpSpPr/>
+      <p:pic>
+        <p:nvPicPr>
+          <p:cNvPr id="2" name="Picture 1" descr="rteu_logo_kucuk.jpg"/>
+          <p:cNvPicPr>
+            <a:picLocks noChangeAspect="1"/>
+          </p:cNvPicPr>
+          <p:nvPr/>
+        </p:nvPicPr>
+        <p:blipFill>
+          <a:blip r:embed="rId2"/>
+          <a:stretch>
+            <a:fillRect/>
+          </a:stretch>
+        </p:blipFill>
+        <p:spPr>
+          <a:xfrm>
+            <a:off x="640080" y="164592"/>
+            <a:ext cx="242773" cy="329184"/>
+          </a:xfrm>
+          <a:prstGeom prst="rect">
+            <a:avLst/>
+          </a:prstGeom>
+        </p:spPr>
+      </p:pic>
+      <p:sp>
+        <p:nvSpPr>
+          <p:cNvPr id="3" name="TextBox 2"/>
+          <p:cNvSpPr txBox="1"/>
+          <p:nvPr/>
+        </p:nvSpPr>
+        <p:spPr>
+          <a:xfrm>
+            <a:off x="1051560" y="182880"/>
+            <a:ext cx="7315200" cy="320040"/>
+          </a:xfrm>
+          <a:prstGeom prst="rect">
+            <a:avLst/>
+          </a:prstGeom>
+          <a:noFill/>
+        </p:spPr>
+        <p:txBody>
+          <a:bodyPr wrap="square" lIns="45720" rIns="45720">
+            <a:spAutoFit/>
+          </a:bodyPr>
+          <a:lstStyle/>
+          <a:p>
+            <a:r>
+              <a:rPr sz="1100" b="0">
+                <a:solidFill>
+                  <a:srgbClr val="5B6770"/>
+                </a:solidFill>
+              </a:rPr>
+              <a:t>CEN429 Güvenli Programlama · Hafta 16</a:t>
+            </a:r>
+          </a:p>
+        </p:txBody>
+      </p:sp>
+      <p:sp>
+        <p:nvSpPr>
+          <p:cNvPr id="4" name="TextBox 3"/>
+          <p:cNvSpPr txBox="1"/>
+          <p:nvPr/>
+        </p:nvSpPr>
+        <p:spPr>
+          <a:xfrm>
+            <a:off x="640080" y="6446520"/>
+            <a:ext cx="7315200" cy="274320"/>
+          </a:xfrm>
+          <a:prstGeom prst="rect">
+            <a:avLst/>
+          </a:prstGeom>
+          <a:noFill/>
+        </p:spPr>
+        <p:txBody>
+          <a:bodyPr wrap="square" lIns="45720" rIns="45720">
+            <a:spAutoFit/>
+          </a:bodyPr>
+          <a:lstStyle/>
+          <a:p>
+            <a:r>
+              <a:rPr sz="1000" b="0">
+                <a:solidFill>
+                  <a:srgbClr val="5B6770"/>
+                </a:solidFill>
+              </a:rPr>
+              <a:t>RTEÜ Bilgisayar Mühendisliği · 2026-2027 Güz</a:t>
+            </a:r>
+          </a:p>
+        </p:txBody>
+      </p:sp>
+      <p:sp>
+        <p:nvSpPr>
+          <p:cNvPr id="5" name="TextBox 4"/>
+          <p:cNvSpPr txBox="1"/>
+          <p:nvPr/>
+        </p:nvSpPr>
+        <p:spPr>
+          <a:xfrm>
+            <a:off x="10637215" y="6446520"/>
+            <a:ext cx="914400" cy="274320"/>
+          </a:xfrm>
+          <a:prstGeom prst="rect">
+            <a:avLst/>
+          </a:prstGeom>
+          <a:noFill/>
+        </p:spPr>
+        <p:txBody>
+          <a:bodyPr wrap="square" lIns="45720" rIns="45720">
+            <a:spAutoFit/>
+          </a:bodyPr>
+          <a:lstStyle/>
+          <a:p>
+            <a:pPr algn="r"/>
+            <a:r>
+              <a:rPr sz="1000" b="0">
+                <a:solidFill>
+                  <a:srgbClr val="5B6770"/>
+                </a:solidFill>
+              </a:rPr>
+              <a:t>18</a:t>
+            </a:r>
+          </a:p>
+        </p:txBody>
+      </p:sp>
+      <p:sp>
+        <p:nvSpPr>
+          <p:cNvPr id="6" name="TextBox 5"/>
+          <p:cNvSpPr txBox="1"/>
+          <p:nvPr/>
+        </p:nvSpPr>
+        <p:spPr>
+          <a:xfrm>
+            <a:off x="640080" y="548640"/>
+            <a:ext cx="10911535" cy="731520"/>
+          </a:xfrm>
+          <a:prstGeom prst="rect">
+            <a:avLst/>
+          </a:prstGeom>
+          <a:noFill/>
+        </p:spPr>
+        <p:txBody>
+          <a:bodyPr wrap="square" lIns="45720" rIns="45720" anchor="ctr">
+            <a:spAutoFit/>
+          </a:bodyPr>
+          <a:lstStyle/>
+          <a:p>
+            <a:r>
+              <a:rPr sz="3000" b="1">
+                <a:solidFill>
+                  <a:srgbClr val="006D77"/>
+                </a:solidFill>
+              </a:rPr>
+              <a:t>14. hafta · anahtar noktalar</a:t>
+            </a:r>
+          </a:p>
+        </p:txBody>
+      </p:sp>
+      <p:sp>
+        <p:nvSpPr>
+          <p:cNvPr id="7" name="TextBox 6"/>
+          <p:cNvSpPr txBox="1"/>
+          <p:nvPr/>
+        </p:nvSpPr>
+        <p:spPr>
+          <a:xfrm>
+            <a:off x="640080" y="1325880"/>
+            <a:ext cx="10911535" cy="1595120"/>
+          </a:xfrm>
+          <a:prstGeom prst="rect">
+            <a:avLst/>
+          </a:prstGeom>
+          <a:noFill/>
+        </p:spPr>
+        <p:txBody>
+          <a:bodyPr wrap="square" lIns="45720" rIns="45720">
+            <a:spAutoFit/>
+          </a:bodyPr>
+          <a:lstStyle/>
+          <a:p>
+            <a:pPr>
+              <a:spcAft>
+                <a:spcPts val="300"/>
+              </a:spcAft>
+            </a:pPr>
+            <a:r>
+              <a:rPr sz="2000" b="1">
+                <a:solidFill>
+                  <a:srgbClr val="006D77"/>
+                </a:solidFill>
+              </a:rPr>
+              <a:t>• </a:t>
+            </a:r>
+            <a:r>
+              <a:rPr sz="2000" b="0">
+                <a:solidFill>
+                  <a:srgbClr val="1F2D3A"/>
+                </a:solidFill>
+              </a:rPr>
+              <a:t>Kaynaktan kaynağa (Tigress).</a:t>
+            </a:r>
+          </a:p>
+          <a:p>
+            <a:pPr>
+              <a:spcAft>
+                <a:spcPts val="300"/>
+              </a:spcAft>
+            </a:pPr>
+            <a:r>
+              <a:rPr sz="2000" b="1">
+                <a:solidFill>
+                  <a:srgbClr val="006D77"/>
+                </a:solidFill>
+              </a:rPr>
+              <a:t>• </a:t>
+            </a:r>
+            <a:r>
+              <a:rPr sz="2000" b="0">
+                <a:solidFill>
+                  <a:srgbClr val="1F2D3A"/>
+                </a:solidFill>
+              </a:rPr>
+              <a:t>Dönüşüm hattı; tohumla çeşitlendirme.</a:t>
+            </a:r>
+          </a:p>
+          <a:p>
+            <a:pPr>
+              <a:spcAft>
+                <a:spcPts val="300"/>
+              </a:spcAft>
+            </a:pPr>
+            <a:r>
+              <a:rPr sz="2000" b="1">
+                <a:solidFill>
+                  <a:srgbClr val="006D77"/>
+                </a:solidFill>
+              </a:rPr>
+              <a:t>• </a:t>
+            </a:r>
+            <a:r>
+              <a:rPr sz="2000" b="0">
+                <a:solidFill>
+                  <a:srgbClr val="1F2D3A"/>
+                </a:solidFill>
+              </a:rPr>
+              <a:t>Maliyet + dayanıklılık ölçümü.</a:t>
+            </a:r>
+          </a:p>
+          <a:p>
+            <a:pPr>
+              <a:spcAft>
+                <a:spcPts val="300"/>
+              </a:spcAft>
+            </a:pPr>
+            <a:r>
+              <a:rPr sz="2000" b="1">
+                <a:solidFill>
+                  <a:srgbClr val="006D77"/>
+                </a:solidFill>
+              </a:rPr>
+              <a:t>• </a:t>
+            </a:r>
+            <a:r>
+              <a:rPr sz="2000" b="0">
+                <a:solidFill>
+                  <a:srgbClr val="1F2D3A"/>
+                </a:solidFill>
+              </a:rPr>
+              <a:t>Derleme hattı (S15).</a:t>
+            </a:r>
+          </a:p>
+        </p:txBody>
+      </p:sp>
+    </p:spTree>
+  </p:cSld>
+  <p:clrMapOvr>
+    <a:masterClrMapping/>
+  </p:clrMapOvr>
+</p:sld>
+</file>
+
+<file path=ppt/slides/slide19.xml><?xml version="1.0" encoding="utf-8"?>
+<p:sld xmlns:a="http://schemas.openxmlformats.org/drawingml/2006/main" xmlns:p="http://schemas.openxmlformats.org/presentationml/2006/main" xmlns:r="http://schemas.openxmlformats.org/officeDocument/2006/relationships">
+  <p:cSld>
+    <p:spTree>
+      <p:nvGrpSpPr>
+        <p:cNvPr id="1" name=""/>
+        <p:cNvGrpSpPr/>
+        <p:nvPr/>
+      </p:nvGrpSpPr>
+      <p:grpSpPr/>
+      <p:pic>
+        <p:nvPicPr>
+          <p:cNvPr id="2" name="Picture 1" descr="rteu_logo_kucuk.jpg"/>
+          <p:cNvPicPr>
+            <a:picLocks noChangeAspect="1"/>
+          </p:cNvPicPr>
+          <p:nvPr/>
+        </p:nvPicPr>
+        <p:blipFill>
+          <a:blip r:embed="rId2"/>
+          <a:stretch>
+            <a:fillRect/>
+          </a:stretch>
+        </p:blipFill>
+        <p:spPr>
+          <a:xfrm>
+            <a:off x="640080" y="164592"/>
+            <a:ext cx="242773" cy="329184"/>
+          </a:xfrm>
+          <a:prstGeom prst="rect">
+            <a:avLst/>
+          </a:prstGeom>
+        </p:spPr>
+      </p:pic>
+      <p:sp>
+        <p:nvSpPr>
+          <p:cNvPr id="3" name="TextBox 2"/>
+          <p:cNvSpPr txBox="1"/>
+          <p:nvPr/>
+        </p:nvSpPr>
+        <p:spPr>
+          <a:xfrm>
+            <a:off x="1051560" y="182880"/>
+            <a:ext cx="7315200" cy="320040"/>
+          </a:xfrm>
+          <a:prstGeom prst="rect">
+            <a:avLst/>
+          </a:prstGeom>
+          <a:noFill/>
+        </p:spPr>
+        <p:txBody>
+          <a:bodyPr wrap="square" lIns="45720" rIns="45720">
+            <a:spAutoFit/>
+          </a:bodyPr>
+          <a:lstStyle/>
+          <a:p>
+            <a:r>
+              <a:rPr sz="1100" b="0">
+                <a:solidFill>
+                  <a:srgbClr val="5B6770"/>
+                </a:solidFill>
+              </a:rPr>
+              <a:t>CEN429 Güvenli Programlama · Hafta 16</a:t>
+            </a:r>
+          </a:p>
+        </p:txBody>
+      </p:sp>
+      <p:sp>
+        <p:nvSpPr>
+          <p:cNvPr id="4" name="TextBox 3"/>
+          <p:cNvSpPr txBox="1"/>
+          <p:nvPr/>
+        </p:nvSpPr>
+        <p:spPr>
+          <a:xfrm>
+            <a:off x="640080" y="6446520"/>
+            <a:ext cx="7315200" cy="274320"/>
+          </a:xfrm>
+          <a:prstGeom prst="rect">
+            <a:avLst/>
+          </a:prstGeom>
+          <a:noFill/>
+        </p:spPr>
+        <p:txBody>
+          <a:bodyPr wrap="square" lIns="45720" rIns="45720">
+            <a:spAutoFit/>
+          </a:bodyPr>
+          <a:lstStyle/>
+          <a:p>
+            <a:r>
+              <a:rPr sz="1000" b="0">
+                <a:solidFill>
+                  <a:srgbClr val="5B6770"/>
+                </a:solidFill>
+              </a:rPr>
+              <a:t>RTEÜ Bilgisayar Mühendisliği · 2026-2027 Güz</a:t>
+            </a:r>
+          </a:p>
+        </p:txBody>
+      </p:sp>
+      <p:sp>
+        <p:nvSpPr>
+          <p:cNvPr id="5" name="TextBox 4"/>
+          <p:cNvSpPr txBox="1"/>
+          <p:nvPr/>
+        </p:nvSpPr>
+        <p:spPr>
+          <a:xfrm>
+            <a:off x="10637215" y="6446520"/>
+            <a:ext cx="914400" cy="274320"/>
+          </a:xfrm>
+          <a:prstGeom prst="rect">
+            <a:avLst/>
+          </a:prstGeom>
+          <a:noFill/>
+        </p:spPr>
+        <p:txBody>
+          <a:bodyPr wrap="square" lIns="45720" rIns="45720">
+            <a:spAutoFit/>
+          </a:bodyPr>
+          <a:lstStyle/>
+          <a:p>
+            <a:pPr algn="r"/>
+            <a:r>
+              <a:rPr sz="1000" b="0">
+                <a:solidFill>
+                  <a:srgbClr val="5B6770"/>
+                </a:solidFill>
+              </a:rPr>
+              <a:t>19</a:t>
             </a:r>
           </a:p>
         </p:txBody>
@@ -6051,7 +6980,206 @@
 </p:sld>
 </file>
 
-<file path=ppt/slides/slide16.xml><?xml version="1.0" encoding="utf-8"?>
+<file path=ppt/slides/slide2.xml><?xml version="1.0" encoding="utf-8"?>
+<p:sld xmlns:a="http://schemas.openxmlformats.org/drawingml/2006/main" xmlns:p="http://schemas.openxmlformats.org/presentationml/2006/main" xmlns:r="http://schemas.openxmlformats.org/officeDocument/2006/relationships">
+  <p:cSld>
+    <p:spTree>
+      <p:nvGrpSpPr>
+        <p:cNvPr id="1" name=""/>
+        <p:cNvGrpSpPr/>
+        <p:nvPr/>
+      </p:nvGrpSpPr>
+      <p:grpSpPr/>
+      <p:pic>
+        <p:nvPicPr>
+          <p:cNvPr id="2" name="Picture 1" descr="rteu_logo_kucuk.jpg"/>
+          <p:cNvPicPr>
+            <a:picLocks noChangeAspect="1"/>
+          </p:cNvPicPr>
+          <p:nvPr/>
+        </p:nvPicPr>
+        <p:blipFill>
+          <a:blip r:embed="rId2"/>
+          <a:stretch>
+            <a:fillRect/>
+          </a:stretch>
+        </p:blipFill>
+        <p:spPr>
+          <a:xfrm>
+            <a:off x="640080" y="164592"/>
+            <a:ext cx="242773" cy="329184"/>
+          </a:xfrm>
+          <a:prstGeom prst="rect">
+            <a:avLst/>
+          </a:prstGeom>
+        </p:spPr>
+      </p:pic>
+      <p:sp>
+        <p:nvSpPr>
+          <p:cNvPr id="3" name="TextBox 2"/>
+          <p:cNvSpPr txBox="1"/>
+          <p:nvPr/>
+        </p:nvSpPr>
+        <p:spPr>
+          <a:xfrm>
+            <a:off x="1051560" y="182880"/>
+            <a:ext cx="7315200" cy="320040"/>
+          </a:xfrm>
+          <a:prstGeom prst="rect">
+            <a:avLst/>
+          </a:prstGeom>
+          <a:noFill/>
+        </p:spPr>
+        <p:txBody>
+          <a:bodyPr wrap="square" lIns="45720" rIns="45720">
+            <a:spAutoFit/>
+          </a:bodyPr>
+          <a:lstStyle/>
+          <a:p>
+            <a:r>
+              <a:rPr sz="1100" b="0">
+                <a:solidFill>
+                  <a:srgbClr val="5B6770"/>
+                </a:solidFill>
+              </a:rPr>
+              <a:t>CEN429 Güvenli Programlama · Hafta 16</a:t>
+            </a:r>
+          </a:p>
+        </p:txBody>
+      </p:sp>
+      <p:sp>
+        <p:nvSpPr>
+          <p:cNvPr id="4" name="TextBox 3"/>
+          <p:cNvSpPr txBox="1"/>
+          <p:nvPr/>
+        </p:nvSpPr>
+        <p:spPr>
+          <a:xfrm>
+            <a:off x="640080" y="6446520"/>
+            <a:ext cx="7315200" cy="274320"/>
+          </a:xfrm>
+          <a:prstGeom prst="rect">
+            <a:avLst/>
+          </a:prstGeom>
+          <a:noFill/>
+        </p:spPr>
+        <p:txBody>
+          <a:bodyPr wrap="square" lIns="45720" rIns="45720">
+            <a:spAutoFit/>
+          </a:bodyPr>
+          <a:lstStyle/>
+          <a:p>
+            <a:r>
+              <a:rPr sz="1000" b="0">
+                <a:solidFill>
+                  <a:srgbClr val="5B6770"/>
+                </a:solidFill>
+              </a:rPr>
+              <a:t>RTEÜ Bilgisayar Mühendisliği · 2026-2027 Güz</a:t>
+            </a:r>
+          </a:p>
+        </p:txBody>
+      </p:sp>
+      <p:sp>
+        <p:nvSpPr>
+          <p:cNvPr id="5" name="TextBox 4"/>
+          <p:cNvSpPr txBox="1"/>
+          <p:nvPr/>
+        </p:nvSpPr>
+        <p:spPr>
+          <a:xfrm>
+            <a:off x="10637215" y="6446520"/>
+            <a:ext cx="914400" cy="274320"/>
+          </a:xfrm>
+          <a:prstGeom prst="rect">
+            <a:avLst/>
+          </a:prstGeom>
+          <a:noFill/>
+        </p:spPr>
+        <p:txBody>
+          <a:bodyPr wrap="square" lIns="45720" rIns="45720">
+            <a:spAutoFit/>
+          </a:bodyPr>
+          <a:lstStyle/>
+          <a:p>
+            <a:pPr algn="r"/>
+            <a:r>
+              <a:rPr sz="1000" b="0">
+                <a:solidFill>
+                  <a:srgbClr val="5B6770"/>
+                </a:solidFill>
+              </a:rPr>
+              <a:t>2</a:t>
+            </a:r>
+          </a:p>
+        </p:txBody>
+      </p:sp>
+      <p:sp>
+        <p:nvSpPr>
+          <p:cNvPr id="6" name="TextBox 5"/>
+          <p:cNvSpPr txBox="1"/>
+          <p:nvPr/>
+        </p:nvSpPr>
+        <p:spPr>
+          <a:xfrm>
+            <a:off x="640080" y="548640"/>
+            <a:ext cx="10911535" cy="731520"/>
+          </a:xfrm>
+          <a:prstGeom prst="rect">
+            <a:avLst/>
+          </a:prstGeom>
+          <a:noFill/>
+        </p:spPr>
+        <p:txBody>
+          <a:bodyPr wrap="square" lIns="45720" rIns="45720" anchor="ctr">
+            <a:spAutoFit/>
+          </a:bodyPr>
+          <a:lstStyle/>
+          <a:p>
+            <a:r>
+              <a:rPr sz="3000" b="1">
+                <a:solidFill>
+                  <a:srgbClr val="006D77"/>
+                </a:solidFill>
+              </a:rPr>
+              <a:t>Final ve başarı notu — şema</a:t>
+            </a:r>
+          </a:p>
+        </p:txBody>
+      </p:sp>
+      <p:pic>
+        <p:nvPicPr>
+          <p:cNvPr id="7" name="Picture 6" descr="h16-02-final-hesabi.png"/>
+          <p:cNvPicPr>
+            <a:picLocks noChangeAspect="1"/>
+          </p:cNvPicPr>
+          <p:nvPr/>
+        </p:nvPicPr>
+        <p:blipFill>
+          <a:blip r:embed="rId3"/>
+          <a:stretch>
+            <a:fillRect/>
+          </a:stretch>
+        </p:blipFill>
+        <p:spPr>
+          <a:xfrm>
+            <a:off x="2046645" y="1325880"/>
+            <a:ext cx="8098404" cy="3206099"/>
+          </a:xfrm>
+          <a:prstGeom prst="rect">
+            <a:avLst/>
+          </a:prstGeom>
+        </p:spPr>
+      </p:pic>
+    </p:spTree>
+  </p:cSld>
+  <p:clrMapOvr>
+    <a:masterClrMapping/>
+  </p:clrMapOvr>
+</p:sld>
+</file>
+
+<file path=ppt/slides/slide20.xml><?xml version="1.0" encoding="utf-8"?>
 <p:sld xmlns:a="http://schemas.openxmlformats.org/drawingml/2006/main" xmlns:p="http://schemas.openxmlformats.org/presentationml/2006/main" xmlns:r="http://schemas.openxmlformats.org/officeDocument/2006/relationships">
   <p:cSld>
     <p:bg>
@@ -6164,7 +7292,7 @@
                   <a:srgbClr val="D8F0F2"/>
                 </a:solidFill>
               </a:rPr>
-              <a:t>16</a:t>
+              <a:t>20</a:t>
             </a:r>
           </a:p>
         </p:txBody>
@@ -6199,1317 +7327,6 @@
                 </a:solidFill>
               </a:rPr>
               <a:t>Ek · Çözümlü pratik (9, 11, 14)</a:t>
-            </a:r>
-          </a:p>
-        </p:txBody>
-      </p:sp>
-    </p:spTree>
-  </p:cSld>
-  <p:clrMapOvr>
-    <a:masterClrMapping/>
-  </p:clrMapOvr>
-</p:sld>
-</file>
-
-<file path=ppt/slides/slide17.xml><?xml version="1.0" encoding="utf-8"?>
-<p:sld xmlns:a="http://schemas.openxmlformats.org/drawingml/2006/main" xmlns:p="http://schemas.openxmlformats.org/presentationml/2006/main" xmlns:r="http://schemas.openxmlformats.org/officeDocument/2006/relationships">
-  <p:cSld>
-    <p:spTree>
-      <p:nvGrpSpPr>
-        <p:cNvPr id="1" name=""/>
-        <p:cNvGrpSpPr/>
-        <p:nvPr/>
-      </p:nvGrpSpPr>
-      <p:grpSpPr/>
-      <p:pic>
-        <p:nvPicPr>
-          <p:cNvPr id="2" name="Picture 1" descr="rteu_logo_kucuk.jpg"/>
-          <p:cNvPicPr>
-            <a:picLocks noChangeAspect="1"/>
-          </p:cNvPicPr>
-          <p:nvPr/>
-        </p:nvPicPr>
-        <p:blipFill>
-          <a:blip r:embed="rId2"/>
-          <a:stretch>
-            <a:fillRect/>
-          </a:stretch>
-        </p:blipFill>
-        <p:spPr>
-          <a:xfrm>
-            <a:off x="640080" y="164592"/>
-            <a:ext cx="242773" cy="329184"/>
-          </a:xfrm>
-          <a:prstGeom prst="rect">
-            <a:avLst/>
-          </a:prstGeom>
-        </p:spPr>
-      </p:pic>
-      <p:sp>
-        <p:nvSpPr>
-          <p:cNvPr id="3" name="TextBox 2"/>
-          <p:cNvSpPr txBox="1"/>
-          <p:nvPr/>
-        </p:nvSpPr>
-        <p:spPr>
-          <a:xfrm>
-            <a:off x="1051560" y="182880"/>
-            <a:ext cx="7315200" cy="320040"/>
-          </a:xfrm>
-          <a:prstGeom prst="rect">
-            <a:avLst/>
-          </a:prstGeom>
-          <a:noFill/>
-        </p:spPr>
-        <p:txBody>
-          <a:bodyPr wrap="square" lIns="45720" rIns="45720">
-            <a:spAutoFit/>
-          </a:bodyPr>
-          <a:lstStyle/>
-          <a:p>
-            <a:r>
-              <a:rPr sz="1100" b="0">
-                <a:solidFill>
-                  <a:srgbClr val="5B6770"/>
-                </a:solidFill>
-              </a:rPr>
-              <a:t>CEN429 Güvenli Programlama · Hafta 16</a:t>
-            </a:r>
-          </a:p>
-        </p:txBody>
-      </p:sp>
-      <p:sp>
-        <p:nvSpPr>
-          <p:cNvPr id="4" name="TextBox 3"/>
-          <p:cNvSpPr txBox="1"/>
-          <p:nvPr/>
-        </p:nvSpPr>
-        <p:spPr>
-          <a:xfrm>
-            <a:off x="640080" y="6446520"/>
-            <a:ext cx="7315200" cy="274320"/>
-          </a:xfrm>
-          <a:prstGeom prst="rect">
-            <a:avLst/>
-          </a:prstGeom>
-          <a:noFill/>
-        </p:spPr>
-        <p:txBody>
-          <a:bodyPr wrap="square" lIns="45720" rIns="45720">
-            <a:spAutoFit/>
-          </a:bodyPr>
-          <a:lstStyle/>
-          <a:p>
-            <a:r>
-              <a:rPr sz="1000" b="0">
-                <a:solidFill>
-                  <a:srgbClr val="5B6770"/>
-                </a:solidFill>
-              </a:rPr>
-              <a:t>RTEÜ Bilgisayar Mühendisliği · 2026-2027 Güz</a:t>
-            </a:r>
-          </a:p>
-        </p:txBody>
-      </p:sp>
-      <p:sp>
-        <p:nvSpPr>
-          <p:cNvPr id="5" name="TextBox 4"/>
-          <p:cNvSpPr txBox="1"/>
-          <p:nvPr/>
-        </p:nvSpPr>
-        <p:spPr>
-          <a:xfrm>
-            <a:off x="10637215" y="6446520"/>
-            <a:ext cx="914400" cy="274320"/>
-          </a:xfrm>
-          <a:prstGeom prst="rect">
-            <a:avLst/>
-          </a:prstGeom>
-          <a:noFill/>
-        </p:spPr>
-        <p:txBody>
-          <a:bodyPr wrap="square" lIns="45720" rIns="45720">
-            <a:spAutoFit/>
-          </a:bodyPr>
-          <a:lstStyle/>
-          <a:p>
-            <a:pPr algn="r"/>
-            <a:r>
-              <a:rPr sz="1000" b="0">
-                <a:solidFill>
-                  <a:srgbClr val="5B6770"/>
-                </a:solidFill>
-              </a:rPr>
-              <a:t>17</a:t>
-            </a:r>
-          </a:p>
-        </p:txBody>
-      </p:sp>
-      <p:sp>
-        <p:nvSpPr>
-          <p:cNvPr id="6" name="TextBox 5"/>
-          <p:cNvSpPr txBox="1"/>
-          <p:nvPr/>
-        </p:nvSpPr>
-        <p:spPr>
-          <a:xfrm>
-            <a:off x="640080" y="548640"/>
-            <a:ext cx="10911535" cy="731520"/>
-          </a:xfrm>
-          <a:prstGeom prst="rect">
-            <a:avLst/>
-          </a:prstGeom>
-          <a:noFill/>
-        </p:spPr>
-        <p:txBody>
-          <a:bodyPr wrap="square" lIns="45720" rIns="45720" anchor="ctr">
-            <a:spAutoFit/>
-          </a:bodyPr>
-          <a:lstStyle/>
-          <a:p>
-            <a:r>
-              <a:rPr sz="3000" b="1">
-                <a:solidFill>
-                  <a:srgbClr val="006D77"/>
-                </a:solidFill>
-              </a:rPr>
-              <a:t>Soru · 9. hafta</a:t>
-            </a:r>
-          </a:p>
-        </p:txBody>
-      </p:sp>
-      <p:sp>
-        <p:nvSpPr>
-          <p:cNvPr id="7" name="TextBox 6"/>
-          <p:cNvSpPr txBox="1"/>
-          <p:nvPr/>
-        </p:nvSpPr>
-        <p:spPr>
-          <a:xfrm>
-            <a:off x="640080" y="1325880"/>
-            <a:ext cx="10911535" cy="439928"/>
-          </a:xfrm>
-          <a:prstGeom prst="rect">
-            <a:avLst/>
-          </a:prstGeom>
-          <a:noFill/>
-        </p:spPr>
-        <p:txBody>
-          <a:bodyPr wrap="square" lIns="45720" rIns="45720">
-            <a:spAutoFit/>
-          </a:bodyPr>
-          <a:lstStyle/>
-          <a:p>
-            <a:pPr algn="l"/>
-            <a:r>
-              <a:rPr sz="2000" b="1">
-                <a:solidFill>
-                  <a:srgbClr val="1F2D3A"/>
-                </a:solidFill>
-              </a:rPr>
-              <a:t>Sahte işlem ile ölü dal farkı?</a:t>
-            </a:r>
-          </a:p>
-        </p:txBody>
-      </p:sp>
-      <p:sp>
-        <p:nvSpPr>
-          <p:cNvPr id="8" name="TextBox 7"/>
-          <p:cNvSpPr txBox="1"/>
-          <p:nvPr/>
-        </p:nvSpPr>
-        <p:spPr>
-          <a:xfrm>
-            <a:off x="640080" y="1875536"/>
-            <a:ext cx="10911535" cy="770128"/>
-          </a:xfrm>
-          <a:prstGeom prst="rect">
-            <a:avLst/>
-          </a:prstGeom>
-          <a:noFill/>
-        </p:spPr>
-        <p:txBody>
-          <a:bodyPr wrap="square" lIns="45720" rIns="45720">
-            <a:spAutoFit/>
-          </a:bodyPr>
-          <a:lstStyle/>
-          <a:p>
-            <a:pPr algn="l"/>
-            <a:r>
-              <a:rPr sz="2000" b="1">
-                <a:solidFill>
-                  <a:srgbClr val="1F2D3A"/>
-                </a:solidFill>
-              </a:rPr>
-              <a:t>Cevap:</a:t>
-            </a:r>
-            <a:r>
-              <a:rPr sz="2000" b="0">
-                <a:solidFill>
-                  <a:srgbClr val="1F2D3A"/>
-                </a:solidFill>
-              </a:rPr>
-              <a:t> Sahte işlem çalışır ama sonucu değiştirmez; ölü dal opak yüklemle hiç çalışmaz. İkisi de gerçek mantığı gizler.</a:t>
-            </a:r>
-          </a:p>
-        </p:txBody>
-      </p:sp>
-    </p:spTree>
-  </p:cSld>
-  <p:clrMapOvr>
-    <a:masterClrMapping/>
-  </p:clrMapOvr>
-</p:sld>
-</file>
-
-<file path=ppt/slides/slide18.xml><?xml version="1.0" encoding="utf-8"?>
-<p:sld xmlns:a="http://schemas.openxmlformats.org/drawingml/2006/main" xmlns:p="http://schemas.openxmlformats.org/presentationml/2006/main" xmlns:r="http://schemas.openxmlformats.org/officeDocument/2006/relationships">
-  <p:cSld>
-    <p:spTree>
-      <p:nvGrpSpPr>
-        <p:cNvPr id="1" name=""/>
-        <p:cNvGrpSpPr/>
-        <p:nvPr/>
-      </p:nvGrpSpPr>
-      <p:grpSpPr/>
-      <p:pic>
-        <p:nvPicPr>
-          <p:cNvPr id="2" name="Picture 1" descr="rteu_logo_kucuk.jpg"/>
-          <p:cNvPicPr>
-            <a:picLocks noChangeAspect="1"/>
-          </p:cNvPicPr>
-          <p:nvPr/>
-        </p:nvPicPr>
-        <p:blipFill>
-          <a:blip r:embed="rId2"/>
-          <a:stretch>
-            <a:fillRect/>
-          </a:stretch>
-        </p:blipFill>
-        <p:spPr>
-          <a:xfrm>
-            <a:off x="640080" y="164592"/>
-            <a:ext cx="242773" cy="329184"/>
-          </a:xfrm>
-          <a:prstGeom prst="rect">
-            <a:avLst/>
-          </a:prstGeom>
-        </p:spPr>
-      </p:pic>
-      <p:sp>
-        <p:nvSpPr>
-          <p:cNvPr id="3" name="TextBox 2"/>
-          <p:cNvSpPr txBox="1"/>
-          <p:nvPr/>
-        </p:nvSpPr>
-        <p:spPr>
-          <a:xfrm>
-            <a:off x="1051560" y="182880"/>
-            <a:ext cx="7315200" cy="320040"/>
-          </a:xfrm>
-          <a:prstGeom prst="rect">
-            <a:avLst/>
-          </a:prstGeom>
-          <a:noFill/>
-        </p:spPr>
-        <p:txBody>
-          <a:bodyPr wrap="square" lIns="45720" rIns="45720">
-            <a:spAutoFit/>
-          </a:bodyPr>
-          <a:lstStyle/>
-          <a:p>
-            <a:r>
-              <a:rPr sz="1100" b="0">
-                <a:solidFill>
-                  <a:srgbClr val="5B6770"/>
-                </a:solidFill>
-              </a:rPr>
-              <a:t>CEN429 Güvenli Programlama · Hafta 16</a:t>
-            </a:r>
-          </a:p>
-        </p:txBody>
-      </p:sp>
-      <p:sp>
-        <p:nvSpPr>
-          <p:cNvPr id="4" name="TextBox 3"/>
-          <p:cNvSpPr txBox="1"/>
-          <p:nvPr/>
-        </p:nvSpPr>
-        <p:spPr>
-          <a:xfrm>
-            <a:off x="640080" y="6446520"/>
-            <a:ext cx="7315200" cy="274320"/>
-          </a:xfrm>
-          <a:prstGeom prst="rect">
-            <a:avLst/>
-          </a:prstGeom>
-          <a:noFill/>
-        </p:spPr>
-        <p:txBody>
-          <a:bodyPr wrap="square" lIns="45720" rIns="45720">
-            <a:spAutoFit/>
-          </a:bodyPr>
-          <a:lstStyle/>
-          <a:p>
-            <a:r>
-              <a:rPr sz="1000" b="0">
-                <a:solidFill>
-                  <a:srgbClr val="5B6770"/>
-                </a:solidFill>
-              </a:rPr>
-              <a:t>RTEÜ Bilgisayar Mühendisliği · 2026-2027 Güz</a:t>
-            </a:r>
-          </a:p>
-        </p:txBody>
-      </p:sp>
-      <p:sp>
-        <p:nvSpPr>
-          <p:cNvPr id="5" name="TextBox 4"/>
-          <p:cNvSpPr txBox="1"/>
-          <p:nvPr/>
-        </p:nvSpPr>
-        <p:spPr>
-          <a:xfrm>
-            <a:off x="10637215" y="6446520"/>
-            <a:ext cx="914400" cy="274320"/>
-          </a:xfrm>
-          <a:prstGeom prst="rect">
-            <a:avLst/>
-          </a:prstGeom>
-          <a:noFill/>
-        </p:spPr>
-        <p:txBody>
-          <a:bodyPr wrap="square" lIns="45720" rIns="45720">
-            <a:spAutoFit/>
-          </a:bodyPr>
-          <a:lstStyle/>
-          <a:p>
-            <a:pPr algn="r"/>
-            <a:r>
-              <a:rPr sz="1000" b="0">
-                <a:solidFill>
-                  <a:srgbClr val="5B6770"/>
-                </a:solidFill>
-              </a:rPr>
-              <a:t>18</a:t>
-            </a:r>
-          </a:p>
-        </p:txBody>
-      </p:sp>
-      <p:sp>
-        <p:nvSpPr>
-          <p:cNvPr id="6" name="TextBox 5"/>
-          <p:cNvSpPr txBox="1"/>
-          <p:nvPr/>
-        </p:nvSpPr>
-        <p:spPr>
-          <a:xfrm>
-            <a:off x="640080" y="548640"/>
-            <a:ext cx="10911535" cy="731520"/>
-          </a:xfrm>
-          <a:prstGeom prst="rect">
-            <a:avLst/>
-          </a:prstGeom>
-          <a:noFill/>
-        </p:spPr>
-        <p:txBody>
-          <a:bodyPr wrap="square" lIns="45720" rIns="45720" anchor="ctr">
-            <a:spAutoFit/>
-          </a:bodyPr>
-          <a:lstStyle/>
-          <a:p>
-            <a:r>
-              <a:rPr sz="3000" b="1">
-                <a:solidFill>
-                  <a:srgbClr val="006D77"/>
-                </a:solidFill>
-              </a:rPr>
-              <a:t>Soru · 9. hafta</a:t>
-            </a:r>
-          </a:p>
-        </p:txBody>
-      </p:sp>
-      <p:sp>
-        <p:nvSpPr>
-          <p:cNvPr id="7" name="TextBox 6"/>
-          <p:cNvSpPr txBox="1"/>
-          <p:nvPr/>
-        </p:nvSpPr>
-        <p:spPr>
-          <a:xfrm>
-            <a:off x="640080" y="1325880"/>
-            <a:ext cx="10911535" cy="439928"/>
-          </a:xfrm>
-          <a:prstGeom prst="rect">
-            <a:avLst/>
-          </a:prstGeom>
-          <a:noFill/>
-        </p:spPr>
-        <p:txBody>
-          <a:bodyPr wrap="square" lIns="45720" rIns="45720">
-            <a:spAutoFit/>
-          </a:bodyPr>
-          <a:lstStyle/>
-          <a:p>
-            <a:pPr algn="l"/>
-            <a:r>
-              <a:rPr sz="2000" b="1">
-                <a:solidFill>
-                  <a:srgbClr val="1F2D3A"/>
-                </a:solidFill>
-              </a:rPr>
-              <a:t>Gizlemeyi ölçen dört boyut? Hangileri ödünleşir?</a:t>
-            </a:r>
-          </a:p>
-        </p:txBody>
-      </p:sp>
-      <p:sp>
-        <p:nvSpPr>
-          <p:cNvPr id="8" name="TextBox 7"/>
-          <p:cNvSpPr txBox="1"/>
-          <p:nvPr/>
-        </p:nvSpPr>
-        <p:spPr>
-          <a:xfrm>
-            <a:off x="640080" y="1875536"/>
-            <a:ext cx="10911535" cy="770128"/>
-          </a:xfrm>
-          <a:prstGeom prst="rect">
-            <a:avLst/>
-          </a:prstGeom>
-          <a:noFill/>
-        </p:spPr>
-        <p:txBody>
-          <a:bodyPr wrap="square" lIns="45720" rIns="45720">
-            <a:spAutoFit/>
-          </a:bodyPr>
-          <a:lstStyle/>
-          <a:p>
-            <a:pPr algn="l"/>
-            <a:r>
-              <a:rPr sz="2000" b="1">
-                <a:solidFill>
-                  <a:srgbClr val="1F2D3A"/>
-                </a:solidFill>
-              </a:rPr>
-              <a:t>Cevap:</a:t>
-            </a:r>
-            <a:r>
-              <a:rPr sz="2000" b="0">
-                <a:solidFill>
-                  <a:srgbClr val="1F2D3A"/>
-                </a:solidFill>
-              </a:rPr>
-              <a:t> Güç, dayanıklılık, gizlilik, maliyet. Güç/dayanıklılık artarken maliyet artar, gizlilik azalır.</a:t>
-            </a:r>
-          </a:p>
-        </p:txBody>
-      </p:sp>
-    </p:spTree>
-  </p:cSld>
-  <p:clrMapOvr>
-    <a:masterClrMapping/>
-  </p:clrMapOvr>
-</p:sld>
-</file>
-
-<file path=ppt/slides/slide19.xml><?xml version="1.0" encoding="utf-8"?>
-<p:sld xmlns:a="http://schemas.openxmlformats.org/drawingml/2006/main" xmlns:p="http://schemas.openxmlformats.org/presentationml/2006/main" xmlns:r="http://schemas.openxmlformats.org/officeDocument/2006/relationships">
-  <p:cSld>
-    <p:spTree>
-      <p:nvGrpSpPr>
-        <p:cNvPr id="1" name=""/>
-        <p:cNvGrpSpPr/>
-        <p:nvPr/>
-      </p:nvGrpSpPr>
-      <p:grpSpPr/>
-      <p:pic>
-        <p:nvPicPr>
-          <p:cNvPr id="2" name="Picture 1" descr="rteu_logo_kucuk.jpg"/>
-          <p:cNvPicPr>
-            <a:picLocks noChangeAspect="1"/>
-          </p:cNvPicPr>
-          <p:nvPr/>
-        </p:nvPicPr>
-        <p:blipFill>
-          <a:blip r:embed="rId2"/>
-          <a:stretch>
-            <a:fillRect/>
-          </a:stretch>
-        </p:blipFill>
-        <p:spPr>
-          <a:xfrm>
-            <a:off x="640080" y="164592"/>
-            <a:ext cx="242773" cy="329184"/>
-          </a:xfrm>
-          <a:prstGeom prst="rect">
-            <a:avLst/>
-          </a:prstGeom>
-        </p:spPr>
-      </p:pic>
-      <p:sp>
-        <p:nvSpPr>
-          <p:cNvPr id="3" name="TextBox 2"/>
-          <p:cNvSpPr txBox="1"/>
-          <p:nvPr/>
-        </p:nvSpPr>
-        <p:spPr>
-          <a:xfrm>
-            <a:off x="1051560" y="182880"/>
-            <a:ext cx="7315200" cy="320040"/>
-          </a:xfrm>
-          <a:prstGeom prst="rect">
-            <a:avLst/>
-          </a:prstGeom>
-          <a:noFill/>
-        </p:spPr>
-        <p:txBody>
-          <a:bodyPr wrap="square" lIns="45720" rIns="45720">
-            <a:spAutoFit/>
-          </a:bodyPr>
-          <a:lstStyle/>
-          <a:p>
-            <a:r>
-              <a:rPr sz="1100" b="0">
-                <a:solidFill>
-                  <a:srgbClr val="5B6770"/>
-                </a:solidFill>
-              </a:rPr>
-              <a:t>CEN429 Güvenli Programlama · Hafta 16</a:t>
-            </a:r>
-          </a:p>
-        </p:txBody>
-      </p:sp>
-      <p:sp>
-        <p:nvSpPr>
-          <p:cNvPr id="4" name="TextBox 3"/>
-          <p:cNvSpPr txBox="1"/>
-          <p:nvPr/>
-        </p:nvSpPr>
-        <p:spPr>
-          <a:xfrm>
-            <a:off x="640080" y="6446520"/>
-            <a:ext cx="7315200" cy="274320"/>
-          </a:xfrm>
-          <a:prstGeom prst="rect">
-            <a:avLst/>
-          </a:prstGeom>
-          <a:noFill/>
-        </p:spPr>
-        <p:txBody>
-          <a:bodyPr wrap="square" lIns="45720" rIns="45720">
-            <a:spAutoFit/>
-          </a:bodyPr>
-          <a:lstStyle/>
-          <a:p>
-            <a:r>
-              <a:rPr sz="1000" b="0">
-                <a:solidFill>
-                  <a:srgbClr val="5B6770"/>
-                </a:solidFill>
-              </a:rPr>
-              <a:t>RTEÜ Bilgisayar Mühendisliği · 2026-2027 Güz</a:t>
-            </a:r>
-          </a:p>
-        </p:txBody>
-      </p:sp>
-      <p:sp>
-        <p:nvSpPr>
-          <p:cNvPr id="5" name="TextBox 4"/>
-          <p:cNvSpPr txBox="1"/>
-          <p:nvPr/>
-        </p:nvSpPr>
-        <p:spPr>
-          <a:xfrm>
-            <a:off x="10637215" y="6446520"/>
-            <a:ext cx="914400" cy="274320"/>
-          </a:xfrm>
-          <a:prstGeom prst="rect">
-            <a:avLst/>
-          </a:prstGeom>
-          <a:noFill/>
-        </p:spPr>
-        <p:txBody>
-          <a:bodyPr wrap="square" lIns="45720" rIns="45720">
-            <a:spAutoFit/>
-          </a:bodyPr>
-          <a:lstStyle/>
-          <a:p>
-            <a:pPr algn="r"/>
-            <a:r>
-              <a:rPr sz="1000" b="0">
-                <a:solidFill>
-                  <a:srgbClr val="5B6770"/>
-                </a:solidFill>
-              </a:rPr>
-              <a:t>19</a:t>
-            </a:r>
-          </a:p>
-        </p:txBody>
-      </p:sp>
-      <p:sp>
-        <p:nvSpPr>
-          <p:cNvPr id="6" name="TextBox 5"/>
-          <p:cNvSpPr txBox="1"/>
-          <p:nvPr/>
-        </p:nvSpPr>
-        <p:spPr>
-          <a:xfrm>
-            <a:off x="640080" y="548640"/>
-            <a:ext cx="10911535" cy="731520"/>
-          </a:xfrm>
-          <a:prstGeom prst="rect">
-            <a:avLst/>
-          </a:prstGeom>
-          <a:noFill/>
-        </p:spPr>
-        <p:txBody>
-          <a:bodyPr wrap="square" lIns="45720" rIns="45720" anchor="ctr">
-            <a:spAutoFit/>
-          </a:bodyPr>
-          <a:lstStyle/>
-          <a:p>
-            <a:r>
-              <a:rPr sz="3000" b="1">
-                <a:solidFill>
-                  <a:srgbClr val="006D77"/>
-                </a:solidFill>
-              </a:rPr>
-              <a:t>Soru · 11. hafta</a:t>
-            </a:r>
-          </a:p>
-        </p:txBody>
-      </p:sp>
-      <p:sp>
-        <p:nvSpPr>
-          <p:cNvPr id="7" name="TextBox 6"/>
-          <p:cNvSpPr txBox="1"/>
-          <p:nvPr/>
-        </p:nvSpPr>
-        <p:spPr>
-          <a:xfrm>
-            <a:off x="640080" y="1325880"/>
-            <a:ext cx="10911535" cy="439928"/>
-          </a:xfrm>
-          <a:prstGeom prst="rect">
-            <a:avLst/>
-          </a:prstGeom>
-          <a:noFill/>
-        </p:spPr>
-        <p:txBody>
-          <a:bodyPr wrap="square" lIns="45720" rIns="45720">
-            <a:spAutoFit/>
-          </a:bodyPr>
-          <a:lstStyle/>
-          <a:p>
-            <a:pPr algn="l"/>
-            <a:r>
-              <a:rPr sz="2000" b="1">
-                <a:solidFill>
-                  <a:srgbClr val="1F2D3A"/>
-                </a:solidFill>
-              </a:rPr>
-              <a:t>"Yayımlanmış saf-yazılım WBC'lerin hepsi kırıldı" kararınızı nasıl etkiler?</a:t>
-            </a:r>
-          </a:p>
-        </p:txBody>
-      </p:sp>
-      <p:sp>
-        <p:nvSpPr>
-          <p:cNvPr id="8" name="TextBox 7"/>
-          <p:cNvSpPr txBox="1"/>
-          <p:nvPr/>
-        </p:nvSpPr>
-        <p:spPr>
-          <a:xfrm>
-            <a:off x="640080" y="1875536"/>
-            <a:ext cx="10911535" cy="770128"/>
-          </a:xfrm>
-          <a:prstGeom prst="rect">
-            <a:avLst/>
-          </a:prstGeom>
-          <a:noFill/>
-        </p:spPr>
-        <p:txBody>
-          <a:bodyPr wrap="square" lIns="45720" rIns="45720">
-            <a:spAutoFit/>
-          </a:bodyPr>
-          <a:lstStyle/>
-          <a:p>
-            <a:pPr algn="l"/>
-            <a:r>
-              <a:rPr sz="2000" b="1">
-                <a:solidFill>
-                  <a:srgbClr val="1F2D3A"/>
-                </a:solidFill>
-              </a:rPr>
-              <a:t>Cevap:</a:t>
-            </a:r>
-            <a:r>
-              <a:rPr sz="2000" b="0">
-                <a:solidFill>
-                  <a:srgbClr val="1F2D3A"/>
-                </a:solidFill>
-              </a:rPr>
-              <a:t> WBC tek başına anahtar güvencesi sayılamaz; yenileme + cihaz bağlama + sunucu denetimi + gizleme ile; mümkünse donanıma taşı.</a:t>
-            </a:r>
-          </a:p>
-        </p:txBody>
-      </p:sp>
-    </p:spTree>
-  </p:cSld>
-  <p:clrMapOvr>
-    <a:masterClrMapping/>
-  </p:clrMapOvr>
-</p:sld>
-</file>
-
-<file path=ppt/slides/slide2.xml><?xml version="1.0" encoding="utf-8"?>
-<p:sld xmlns:a="http://schemas.openxmlformats.org/drawingml/2006/main" xmlns:p="http://schemas.openxmlformats.org/presentationml/2006/main" xmlns:r="http://schemas.openxmlformats.org/officeDocument/2006/relationships">
-  <p:cSld>
-    <p:spTree>
-      <p:nvGrpSpPr>
-        <p:cNvPr id="1" name=""/>
-        <p:cNvGrpSpPr/>
-        <p:nvPr/>
-      </p:nvGrpSpPr>
-      <p:grpSpPr/>
-      <p:pic>
-        <p:nvPicPr>
-          <p:cNvPr id="2" name="Picture 1" descr="rteu_logo_kucuk.jpg"/>
-          <p:cNvPicPr>
-            <a:picLocks noChangeAspect="1"/>
-          </p:cNvPicPr>
-          <p:nvPr/>
-        </p:nvPicPr>
-        <p:blipFill>
-          <a:blip r:embed="rId2"/>
-          <a:stretch>
-            <a:fillRect/>
-          </a:stretch>
-        </p:blipFill>
-        <p:spPr>
-          <a:xfrm>
-            <a:off x="640080" y="164592"/>
-            <a:ext cx="242773" cy="329184"/>
-          </a:xfrm>
-          <a:prstGeom prst="rect">
-            <a:avLst/>
-          </a:prstGeom>
-        </p:spPr>
-      </p:pic>
-      <p:sp>
-        <p:nvSpPr>
-          <p:cNvPr id="3" name="TextBox 2"/>
-          <p:cNvSpPr txBox="1"/>
-          <p:nvPr/>
-        </p:nvSpPr>
-        <p:spPr>
-          <a:xfrm>
-            <a:off x="1051560" y="182880"/>
-            <a:ext cx="7315200" cy="320040"/>
-          </a:xfrm>
-          <a:prstGeom prst="rect">
-            <a:avLst/>
-          </a:prstGeom>
-          <a:noFill/>
-        </p:spPr>
-        <p:txBody>
-          <a:bodyPr wrap="square" lIns="45720" rIns="45720">
-            <a:spAutoFit/>
-          </a:bodyPr>
-          <a:lstStyle/>
-          <a:p>
-            <a:r>
-              <a:rPr sz="1100" b="0">
-                <a:solidFill>
-                  <a:srgbClr val="5B6770"/>
-                </a:solidFill>
-              </a:rPr>
-              <a:t>CEN429 Güvenli Programlama · Hafta 16</a:t>
-            </a:r>
-          </a:p>
-        </p:txBody>
-      </p:sp>
-      <p:sp>
-        <p:nvSpPr>
-          <p:cNvPr id="4" name="TextBox 3"/>
-          <p:cNvSpPr txBox="1"/>
-          <p:nvPr/>
-        </p:nvSpPr>
-        <p:spPr>
-          <a:xfrm>
-            <a:off x="640080" y="6446520"/>
-            <a:ext cx="7315200" cy="274320"/>
-          </a:xfrm>
-          <a:prstGeom prst="rect">
-            <a:avLst/>
-          </a:prstGeom>
-          <a:noFill/>
-        </p:spPr>
-        <p:txBody>
-          <a:bodyPr wrap="square" lIns="45720" rIns="45720">
-            <a:spAutoFit/>
-          </a:bodyPr>
-          <a:lstStyle/>
-          <a:p>
-            <a:r>
-              <a:rPr sz="1000" b="0">
-                <a:solidFill>
-                  <a:srgbClr val="5B6770"/>
-                </a:solidFill>
-              </a:rPr>
-              <a:t>RTEÜ Bilgisayar Mühendisliği · 2026-2027 Güz</a:t>
-            </a:r>
-          </a:p>
-        </p:txBody>
-      </p:sp>
-      <p:sp>
-        <p:nvSpPr>
-          <p:cNvPr id="5" name="TextBox 4"/>
-          <p:cNvSpPr txBox="1"/>
-          <p:nvPr/>
-        </p:nvSpPr>
-        <p:spPr>
-          <a:xfrm>
-            <a:off x="10637215" y="6446520"/>
-            <a:ext cx="914400" cy="274320"/>
-          </a:xfrm>
-          <a:prstGeom prst="rect">
-            <a:avLst/>
-          </a:prstGeom>
-          <a:noFill/>
-        </p:spPr>
-        <p:txBody>
-          <a:bodyPr wrap="square" lIns="45720" rIns="45720">
-            <a:spAutoFit/>
-          </a:bodyPr>
-          <a:lstStyle/>
-          <a:p>
-            <a:pPr algn="r"/>
-            <a:r>
-              <a:rPr sz="1000" b="0">
-                <a:solidFill>
-                  <a:srgbClr val="5B6770"/>
-                </a:solidFill>
-              </a:rPr>
-              <a:t>2</a:t>
-            </a:r>
-          </a:p>
-        </p:txBody>
-      </p:sp>
-      <p:sp>
-        <p:nvSpPr>
-          <p:cNvPr id="6" name="TextBox 5"/>
-          <p:cNvSpPr txBox="1"/>
-          <p:nvPr/>
-        </p:nvSpPr>
-        <p:spPr>
-          <a:xfrm>
-            <a:off x="640080" y="548640"/>
-            <a:ext cx="10911535" cy="731520"/>
-          </a:xfrm>
-          <a:prstGeom prst="rect">
-            <a:avLst/>
-          </a:prstGeom>
-          <a:noFill/>
-        </p:spPr>
-        <p:txBody>
-          <a:bodyPr wrap="square" lIns="45720" rIns="45720" anchor="ctr">
-            <a:spAutoFit/>
-          </a:bodyPr>
-          <a:lstStyle/>
-          <a:p>
-            <a:r>
-              <a:rPr sz="3000" b="1">
-                <a:solidFill>
-                  <a:srgbClr val="006D77"/>
-                </a:solidFill>
-              </a:rPr>
-              <a:t>Quiz-2: ne, ne zaman?</a:t>
-            </a:r>
-          </a:p>
-        </p:txBody>
-      </p:sp>
-      <p:sp>
-        <p:nvSpPr>
-          <p:cNvPr id="7" name="TextBox 6"/>
-          <p:cNvSpPr txBox="1"/>
-          <p:nvPr/>
-        </p:nvSpPr>
-        <p:spPr>
-          <a:xfrm>
-            <a:off x="640080" y="1325880"/>
-            <a:ext cx="10911535" cy="1549400"/>
-          </a:xfrm>
-          <a:prstGeom prst="rect">
-            <a:avLst/>
-          </a:prstGeom>
-          <a:noFill/>
-        </p:spPr>
-        <p:txBody>
-          <a:bodyPr wrap="square" lIns="45720" rIns="45720">
-            <a:spAutoFit/>
-          </a:bodyPr>
-          <a:lstStyle/>
-          <a:p>
-            <a:pPr>
-              <a:spcAft>
-                <a:spcPts val="300"/>
-              </a:spcAft>
-            </a:pPr>
-            <a:r>
-              <a:rPr sz="2000" b="1">
-                <a:solidFill>
-                  <a:srgbClr val="006D77"/>
-                </a:solidFill>
-              </a:rPr>
-              <a:t>• </a:t>
-            </a:r>
-            <a:r>
-              <a:rPr sz="2000" b="0">
-                <a:solidFill>
-                  <a:srgbClr val="1F2D3A"/>
-                </a:solidFill>
-              </a:rPr>
-              <a:t>Kapsam: </a:t>
-            </a:r>
-            <a:r>
-              <a:rPr sz="2000" b="1">
-                <a:solidFill>
-                  <a:srgbClr val="1F2D3A"/>
-                </a:solidFill>
-              </a:rPr>
-              <a:t>9–14. haftalar</a:t>
-            </a:r>
-            <a:r>
-              <a:rPr sz="2000" b="0">
-                <a:solidFill>
-                  <a:srgbClr val="1F2D3A"/>
-                </a:solidFill>
-              </a:rPr>
-              <a:t> · finalin </a:t>
-            </a:r>
-            <a:r>
-              <a:rPr sz="2000" b="1">
-                <a:solidFill>
-                  <a:srgbClr val="1F2D3A"/>
-                </a:solidFill>
-              </a:rPr>
-              <a:t>%30</a:t>
-            </a:r>
-            <a:r>
-              <a:rPr sz="2000" b="0">
-                <a:solidFill>
-                  <a:srgbClr val="1F2D3A"/>
-                </a:solidFill>
-              </a:rPr>
-              <a:t>'u</a:t>
-            </a:r>
-          </a:p>
-          <a:p>
-            <a:pPr>
-              <a:spcAft>
-                <a:spcPts val="300"/>
-              </a:spcAft>
-            </a:pPr>
-            <a:r>
-              <a:rPr sz="2000" b="1">
-                <a:solidFill>
-                  <a:srgbClr val="006D77"/>
-                </a:solidFill>
-              </a:rPr>
-              <a:t>• </a:t>
-            </a:r>
-            <a:r>
-              <a:rPr sz="2000" b="0">
-                <a:solidFill>
-                  <a:srgbClr val="1F2D3A"/>
-                </a:solidFill>
-              </a:rPr>
-              <a:t>Tarih, saat, yer, süre, biçim: </a:t>
-            </a:r>
-            <a:r>
-              <a:rPr sz="2000" b="1">
-                <a:solidFill>
-                  <a:srgbClr val="1F2D3A"/>
-                </a:solidFill>
-              </a:rPr>
-              <a:t>ders sınıfında</a:t>
-            </a:r>
-          </a:p>
-          <a:p>
-            <a:pPr>
-              <a:spcAft>
-                <a:spcPts val="300"/>
-              </a:spcAft>
-            </a:pPr>
-            <a:r>
-              <a:rPr sz="2000" b="1">
-                <a:solidFill>
-                  <a:srgbClr val="006D77"/>
-                </a:solidFill>
-              </a:rPr>
-              <a:t>• </a:t>
-            </a:r>
-            <a:r>
-              <a:rPr sz="2000" b="0">
-                <a:solidFill>
-                  <a:srgbClr val="1F2D3A"/>
-                </a:solidFill>
-              </a:rPr>
-              <a:t>En iyi hazırlık: Kendini sınama soruları · 10. hafta OpenSSL adımları · 13. hafta uyum matrisi</a:t>
-            </a:r>
-          </a:p>
-        </p:txBody>
-      </p:sp>
-    </p:spTree>
-  </p:cSld>
-  <p:clrMapOvr>
-    <a:masterClrMapping/>
-  </p:clrMapOvr>
-</p:sld>
-</file>
-
-<file path=ppt/slides/slide20.xml><?xml version="1.0" encoding="utf-8"?>
-<p:sld xmlns:a="http://schemas.openxmlformats.org/drawingml/2006/main" xmlns:p="http://schemas.openxmlformats.org/presentationml/2006/main" xmlns:r="http://schemas.openxmlformats.org/officeDocument/2006/relationships">
-  <p:cSld>
-    <p:spTree>
-      <p:nvGrpSpPr>
-        <p:cNvPr id="1" name=""/>
-        <p:cNvGrpSpPr/>
-        <p:nvPr/>
-      </p:nvGrpSpPr>
-      <p:grpSpPr/>
-      <p:pic>
-        <p:nvPicPr>
-          <p:cNvPr id="2" name="Picture 1" descr="rteu_logo_kucuk.jpg"/>
-          <p:cNvPicPr>
-            <a:picLocks noChangeAspect="1"/>
-          </p:cNvPicPr>
-          <p:nvPr/>
-        </p:nvPicPr>
-        <p:blipFill>
-          <a:blip r:embed="rId2"/>
-          <a:stretch>
-            <a:fillRect/>
-          </a:stretch>
-        </p:blipFill>
-        <p:spPr>
-          <a:xfrm>
-            <a:off x="640080" y="164592"/>
-            <a:ext cx="242773" cy="329184"/>
-          </a:xfrm>
-          <a:prstGeom prst="rect">
-            <a:avLst/>
-          </a:prstGeom>
-        </p:spPr>
-      </p:pic>
-      <p:sp>
-        <p:nvSpPr>
-          <p:cNvPr id="3" name="TextBox 2"/>
-          <p:cNvSpPr txBox="1"/>
-          <p:nvPr/>
-        </p:nvSpPr>
-        <p:spPr>
-          <a:xfrm>
-            <a:off x="1051560" y="182880"/>
-            <a:ext cx="7315200" cy="320040"/>
-          </a:xfrm>
-          <a:prstGeom prst="rect">
-            <a:avLst/>
-          </a:prstGeom>
-          <a:noFill/>
-        </p:spPr>
-        <p:txBody>
-          <a:bodyPr wrap="square" lIns="45720" rIns="45720">
-            <a:spAutoFit/>
-          </a:bodyPr>
-          <a:lstStyle/>
-          <a:p>
-            <a:r>
-              <a:rPr sz="1100" b="0">
-                <a:solidFill>
-                  <a:srgbClr val="5B6770"/>
-                </a:solidFill>
-              </a:rPr>
-              <a:t>CEN429 Güvenli Programlama · Hafta 16</a:t>
-            </a:r>
-          </a:p>
-        </p:txBody>
-      </p:sp>
-      <p:sp>
-        <p:nvSpPr>
-          <p:cNvPr id="4" name="TextBox 3"/>
-          <p:cNvSpPr txBox="1"/>
-          <p:nvPr/>
-        </p:nvSpPr>
-        <p:spPr>
-          <a:xfrm>
-            <a:off x="640080" y="6446520"/>
-            <a:ext cx="7315200" cy="274320"/>
-          </a:xfrm>
-          <a:prstGeom prst="rect">
-            <a:avLst/>
-          </a:prstGeom>
-          <a:noFill/>
-        </p:spPr>
-        <p:txBody>
-          <a:bodyPr wrap="square" lIns="45720" rIns="45720">
-            <a:spAutoFit/>
-          </a:bodyPr>
-          <a:lstStyle/>
-          <a:p>
-            <a:r>
-              <a:rPr sz="1000" b="0">
-                <a:solidFill>
-                  <a:srgbClr val="5B6770"/>
-                </a:solidFill>
-              </a:rPr>
-              <a:t>RTEÜ Bilgisayar Mühendisliği · 2026-2027 Güz</a:t>
-            </a:r>
-          </a:p>
-        </p:txBody>
-      </p:sp>
-      <p:sp>
-        <p:nvSpPr>
-          <p:cNvPr id="5" name="TextBox 4"/>
-          <p:cNvSpPr txBox="1"/>
-          <p:nvPr/>
-        </p:nvSpPr>
-        <p:spPr>
-          <a:xfrm>
-            <a:off x="10637215" y="6446520"/>
-            <a:ext cx="914400" cy="274320"/>
-          </a:xfrm>
-          <a:prstGeom prst="rect">
-            <a:avLst/>
-          </a:prstGeom>
-          <a:noFill/>
-        </p:spPr>
-        <p:txBody>
-          <a:bodyPr wrap="square" lIns="45720" rIns="45720">
-            <a:spAutoFit/>
-          </a:bodyPr>
-          <a:lstStyle/>
-          <a:p>
-            <a:pPr algn="r"/>
-            <a:r>
-              <a:rPr sz="1000" b="0">
-                <a:solidFill>
-                  <a:srgbClr val="5B6770"/>
-                </a:solidFill>
-              </a:rPr>
-              <a:t>20</a:t>
-            </a:r>
-          </a:p>
-        </p:txBody>
-      </p:sp>
-      <p:sp>
-        <p:nvSpPr>
-          <p:cNvPr id="6" name="TextBox 5"/>
-          <p:cNvSpPr txBox="1"/>
-          <p:nvPr/>
-        </p:nvSpPr>
-        <p:spPr>
-          <a:xfrm>
-            <a:off x="640080" y="548640"/>
-            <a:ext cx="10911535" cy="731520"/>
-          </a:xfrm>
-          <a:prstGeom prst="rect">
-            <a:avLst/>
-          </a:prstGeom>
-          <a:noFill/>
-        </p:spPr>
-        <p:txBody>
-          <a:bodyPr wrap="square" lIns="45720" rIns="45720" anchor="ctr">
-            <a:spAutoFit/>
-          </a:bodyPr>
-          <a:lstStyle/>
-          <a:p>
-            <a:r>
-              <a:rPr sz="3000" b="1">
-                <a:solidFill>
-                  <a:srgbClr val="006D77"/>
-                </a:solidFill>
-              </a:rPr>
-              <a:t>Soru · 11. hafta</a:t>
-            </a:r>
-          </a:p>
-        </p:txBody>
-      </p:sp>
-      <p:sp>
-        <p:nvSpPr>
-          <p:cNvPr id="7" name="TextBox 6"/>
-          <p:cNvSpPr txBox="1"/>
-          <p:nvPr/>
-        </p:nvSpPr>
-        <p:spPr>
-          <a:xfrm>
-            <a:off x="640080" y="1325880"/>
-            <a:ext cx="10911535" cy="439928"/>
-          </a:xfrm>
-          <a:prstGeom prst="rect">
-            <a:avLst/>
-          </a:prstGeom>
-          <a:noFill/>
-        </p:spPr>
-        <p:txBody>
-          <a:bodyPr wrap="square" lIns="45720" rIns="45720">
-            <a:spAutoFit/>
-          </a:bodyPr>
-          <a:lstStyle/>
-          <a:p>
-            <a:pPr algn="l"/>
-            <a:r>
-              <a:rPr sz="2000" b="1">
-                <a:solidFill>
-                  <a:srgbClr val="1F2D3A"/>
-                </a:solidFill>
-              </a:rPr>
-              <a:t>DCA hangi donanım saldırısına benzer?</a:t>
-            </a:r>
-          </a:p>
-        </p:txBody>
-      </p:sp>
-      <p:sp>
-        <p:nvSpPr>
-          <p:cNvPr id="8" name="TextBox 7"/>
-          <p:cNvSpPr txBox="1"/>
-          <p:nvPr/>
-        </p:nvSpPr>
-        <p:spPr>
-          <a:xfrm>
-            <a:off x="640080" y="1875536"/>
-            <a:ext cx="10911535" cy="770128"/>
-          </a:xfrm>
-          <a:prstGeom prst="rect">
-            <a:avLst/>
-          </a:prstGeom>
-          <a:noFill/>
-        </p:spPr>
-        <p:txBody>
-          <a:bodyPr wrap="square" lIns="45720" rIns="45720">
-            <a:spAutoFit/>
-          </a:bodyPr>
-          <a:lstStyle/>
-          <a:p>
-            <a:pPr algn="l"/>
-            <a:r>
-              <a:rPr sz="2000" b="1">
-                <a:solidFill>
-                  <a:srgbClr val="1F2D3A"/>
-                </a:solidFill>
-              </a:rPr>
-              <a:t>Cevap:</a:t>
-            </a:r>
-            <a:r>
-              <a:rPr sz="2000" b="0">
-                <a:solidFill>
-                  <a:srgbClr val="1F2D3A"/>
-                </a:solidFill>
-              </a:rPr>
-              <a:t> DPA'ya (güç analizi); yazılım izlerine istatistik uygular, iç kodlamayı çoğu zaman aşar.</a:t>
             </a:r>
           </a:p>
         </p:txBody>
@@ -7684,7 +7501,7 @@
                   <a:srgbClr val="006D77"/>
                 </a:solidFill>
               </a:rPr>
-              <a:t>Soru · 14. hafta</a:t>
+              <a:t>Soru · 9. hafta</a:t>
             </a:r>
           </a:p>
         </p:txBody>
@@ -7718,7 +7535,7 @@
                   <a:srgbClr val="1F2D3A"/>
                 </a:solidFill>
               </a:rPr>
-              <a:t>Bir dönüşüm hattından sonra mutlaka yapılacak iki şey?</a:t>
+              <a:t>Sahte işlem ile ölü dal farkı?</a:t>
             </a:r>
           </a:p>
         </p:txBody>
@@ -7732,7 +7549,7 @@
         <p:spPr>
           <a:xfrm>
             <a:off x="640080" y="1875536"/>
-            <a:ext cx="10911535" cy="439928"/>
+            <a:ext cx="10911535" cy="770128"/>
           </a:xfrm>
           <a:prstGeom prst="rect">
             <a:avLst/>
@@ -7760,7 +7577,7 @@
                   <a:srgbClr val="1F2D3A"/>
                 </a:solidFill>
               </a:rPr>
-              <a:t> Birim testleri (davranış korunmuş mu?) ve boyut/hız ölçümü (maliyet).</a:t>
+              <a:t> Sahte işlem çalışır ama sonucu değiştirmez; ölü dal opak yüklemle hiç çalışmaz. İkisi de gerçek mantığı gizler.</a:t>
             </a:r>
           </a:p>
         </p:txBody>
@@ -7935,7 +7752,7 @@
                   <a:srgbClr val="006D77"/>
                 </a:solidFill>
               </a:rPr>
-              <a:t>Soru · 14. hafta</a:t>
+              <a:t>Soru · 9. hafta</a:t>
             </a:r>
           </a:p>
         </p:txBody>
@@ -7969,7 +7786,7 @@
                   <a:srgbClr val="1F2D3A"/>
                 </a:solidFill>
               </a:rPr>
-              <a:t>Tohum (`--Seed`) ne sağlar?</a:t>
+              <a:t>Gizlemeyi ölçen dört boyut? Hangileri ödünleşir?</a:t>
             </a:r>
           </a:p>
         </p:txBody>
@@ -8011,7 +7828,7 @@
                   <a:srgbClr val="1F2D3A"/>
                 </a:solidFill>
               </a:rPr>
-              <a:t> Çeşitlendirme; aynı dönüşümler farklı tohumla farklı ikili üretir, bir kopyaya yazılan saldırı diğerinde çalışmaz.</a:t>
+              <a:t> Güç, dayanıklılık, gizlilik, maliyet. Güç/dayanıklılık artarken maliyet artar, gizlilik azalır.</a:t>
             </a:r>
           </a:p>
         </p:txBody>
@@ -8186,7 +8003,7 @@
                   <a:srgbClr val="006D77"/>
                 </a:solidFill>
               </a:rPr>
-              <a:t>Soru · 10. hafta</a:t>
+              <a:t>Soru · 11. hafta</a:t>
             </a:r>
           </a:p>
         </p:txBody>
@@ -8220,7 +8037,7 @@
                   <a:srgbClr val="1F2D3A"/>
                 </a:solidFill>
               </a:rPr>
-              <a:t>Zincir doğrulamanın dört sorusu?</a:t>
+              <a:t>"Yayımlanmış saf-yazılım WBC'lerin hepsi kırıldı" kararınızı nasıl etkiler?</a:t>
             </a:r>
           </a:p>
         </p:txBody>
@@ -8262,7 +8079,7 @@
                   <a:srgbClr val="1F2D3A"/>
                 </a:solidFill>
               </a:rPr>
-              <a:t> İmza geçerli mi, güvenilir köke ulaşıyor mu, süre dolmamış mı, ad (SAN) eşleşiyor mu.</a:t>
+              <a:t> WBC tek başına anahtar güvencesi sayılamaz; yenileme + cihaz bağlama + sunucu denetimi + gizleme ile; mümkünse donanıma taşı.</a:t>
             </a:r>
           </a:p>
         </p:txBody>
@@ -8437,7 +8254,7 @@
                   <a:srgbClr val="006D77"/>
                 </a:solidFill>
               </a:rPr>
-              <a:t>Soru · 12–13. hafta</a:t>
+              <a:t>Soru · 11. hafta</a:t>
             </a:r>
           </a:p>
         </p:txBody>
@@ -8471,7 +8288,7 @@
                   <a:srgbClr val="1F2D3A"/>
                 </a:solidFill>
               </a:rPr>
-              <a:t>"EAL4+ her zaman daha güvenli" doğru mu?</a:t>
+              <a:t>DCA hangi donanım saldırısına benzer?</a:t>
             </a:r>
           </a:p>
         </p:txBody>
@@ -8485,7 +8302,7 @@
         <p:spPr>
           <a:xfrm>
             <a:off x="640080" y="1875536"/>
-            <a:ext cx="10911535" cy="439928"/>
+            <a:ext cx="10911535" cy="770128"/>
           </a:xfrm>
           <a:prstGeom prst="rect">
             <a:avLst/>
@@ -8513,7 +8330,7 @@
                   <a:srgbClr val="1F2D3A"/>
                 </a:solidFill>
               </a:rPr>
-              <a:t> Hayır; EAL derinliktir, güvenlik ST'deki tehdit ve amaçlara bağlı.</a:t>
+              <a:t> DPA'ya (güç analizi); yazılım izlerine istatistik uygular, iç kodlamayı çoğu zaman aşar.</a:t>
             </a:r>
           </a:p>
         </p:txBody>
@@ -8688,7 +8505,7 @@
                   <a:srgbClr val="006D77"/>
                 </a:solidFill>
               </a:rPr>
-              <a:t>Örnek · çoktan seçmeli</a:t>
+              <a:t>Soru · 14. hafta</a:t>
             </a:r>
           </a:p>
         </p:txBody>
@@ -8722,7 +8539,7 @@
                   <a:srgbClr val="1F2D3A"/>
                 </a:solidFill>
               </a:rPr>
-              <a:t>Whitebox kriptografide dış kodlamanın (F,G) sınırı nedir?</a:t>
+              <a:t>Bir dönüşüm hattından sonra mutlaka yapılacak iki şey?</a:t>
             </a:r>
           </a:p>
         </p:txBody>
@@ -8751,28 +8568,20 @@
           <a:p>
             <a:pPr algn="l"/>
             <a:r>
+              <a:rPr sz="2000" b="1">
+                <a:solidFill>
+                  <a:srgbClr val="1F2D3A"/>
+                </a:solidFill>
+              </a:rPr>
+              <a:t>Cevap:</a:t>
+            </a:r>
+            <a:r>
               <a:rPr sz="2000" b="0">
                 <a:solidFill>
                   <a:srgbClr val="1F2D3A"/>
                 </a:solidFill>
               </a:rPr>
-              <a:t>A) Çok yavaş B) </a:t>
-            </a:r>
-            <a:r>
-              <a:rPr sz="2000" b="1">
-                <a:solidFill>
-                  <a:srgbClr val="1F2D3A"/>
-                </a:solidFill>
-              </a:rPr>
-              <a:t>Standart AES değil</a:t>
-            </a:r>
-            <a:r>
-              <a:rPr sz="2000" b="0">
-                <a:solidFill>
-                  <a:srgbClr val="1F2D3A"/>
-                </a:solidFill>
-              </a:rPr>
-              <a:t> ✓ C) Tablo küçük D) Anahtar açık</a:t>
+              <a:t> Birim testleri (davranış korunmuş mu?) ve boyut/hız ölçümü (maliyet).</a:t>
             </a:r>
           </a:p>
         </p:txBody>
@@ -8947,7 +8756,7 @@
                   <a:srgbClr val="006D77"/>
                 </a:solidFill>
               </a:rPr>
-              <a:t>Çalışma planı</a:t>
+              <a:t>Soru · 14. hafta</a:t>
             </a:r>
           </a:p>
         </p:txBody>
@@ -8961,7 +8770,7 @@
         <p:spPr>
           <a:xfrm>
             <a:off x="640080" y="1325880"/>
-            <a:ext cx="10911535" cy="1219200"/>
+            <a:ext cx="10911535" cy="439928"/>
           </a:xfrm>
           <a:prstGeom prst="rect">
             <a:avLst/>
@@ -8974,18 +8783,48 @@
           </a:bodyPr>
           <a:lstStyle/>
           <a:p>
-            <a:pPr>
-              <a:spcAft>
-                <a:spcPts val="300"/>
-              </a:spcAft>
-            </a:pPr>
+            <a:pPr algn="l"/>
             <a:r>
               <a:rPr sz="2000" b="1">
                 <a:solidFill>
-                  <a:srgbClr val="006D77"/>
-                </a:solidFill>
-              </a:rPr>
-              <a:t>• </a:t>
+                  <a:srgbClr val="1F2D3A"/>
+                </a:solidFill>
+              </a:rPr>
+              <a:t>Tohum (`--Seed`) ne sağlar?</a:t>
+            </a:r>
+          </a:p>
+        </p:txBody>
+      </p:sp>
+      <p:sp>
+        <p:nvSpPr>
+          <p:cNvPr id="8" name="TextBox 7"/>
+          <p:cNvSpPr txBox="1"/>
+          <p:nvPr/>
+        </p:nvSpPr>
+        <p:spPr>
+          <a:xfrm>
+            <a:off x="640080" y="1875536"/>
+            <a:ext cx="10911535" cy="770128"/>
+          </a:xfrm>
+          <a:prstGeom prst="rect">
+            <a:avLst/>
+          </a:prstGeom>
+          <a:noFill/>
+        </p:spPr>
+        <p:txBody>
+          <a:bodyPr wrap="square" lIns="45720" rIns="45720">
+            <a:spAutoFit/>
+          </a:bodyPr>
+          <a:lstStyle/>
+          <a:p>
+            <a:pPr algn="l"/>
+            <a:r>
+              <a:rPr sz="2000" b="1">
+                <a:solidFill>
+                  <a:srgbClr val="1F2D3A"/>
+                </a:solidFill>
+              </a:rPr>
+              <a:t>Cevap:</a:t>
             </a:r>
             <a:r>
               <a:rPr sz="2000" b="0">
@@ -8993,53 +8832,7 @@
                   <a:srgbClr val="1F2D3A"/>
                 </a:solidFill>
               </a:rPr>
-              <a:t>9, 11, 14. hafta sayfalarındaki çözümlü sınamaları yap.</a:t>
-            </a:r>
-          </a:p>
-          <a:p>
-            <a:pPr>
-              <a:spcAft>
-                <a:spcPts val="300"/>
-              </a:spcAft>
-            </a:pPr>
-            <a:r>
-              <a:rPr sz="2000" b="1">
-                <a:solidFill>
-                  <a:srgbClr val="006D77"/>
-                </a:solidFill>
-              </a:rPr>
-              <a:t>• </a:t>
-            </a:r>
-            <a:r>
-              <a:rPr sz="2000" b="0">
-                <a:solidFill>
-                  <a:srgbClr val="1F2D3A"/>
-                </a:solidFill>
-              </a:rPr>
-              <a:t>10. haftanın OpenSSL adımlarını tekrar et.</a:t>
-            </a:r>
-          </a:p>
-          <a:p>
-            <a:pPr>
-              <a:spcAft>
-                <a:spcPts val="300"/>
-              </a:spcAft>
-            </a:pPr>
-            <a:r>
-              <a:rPr sz="2000" b="1">
-                <a:solidFill>
-                  <a:srgbClr val="006D77"/>
-                </a:solidFill>
-              </a:rPr>
-              <a:t>• </a:t>
-            </a:r>
-            <a:r>
-              <a:rPr sz="2000" b="0">
-                <a:solidFill>
-                  <a:srgbClr val="1F2D3A"/>
-                </a:solidFill>
-              </a:rPr>
-              <a:t>13. haftanın uyum matrisi etkinliğini kendin doldur.</a:t>
+              <a:t> Çeşitlendirme; aynı dönüşümler farklı tohumla farklı ikili üretir, bir kopyaya yazılan saldırı diğerinde çalışmaz.</a:t>
             </a:r>
           </a:p>
         </p:txBody>
@@ -9214,68 +9007,326 @@
                   <a:srgbClr val="006D77"/>
                 </a:solidFill>
               </a:rPr>
-              <a:t>Son söz (Quiz-2 hazırlık)</a:t>
-            </a:r>
-          </a:p>
-        </p:txBody>
-      </p:sp>
-      <p:sp>
-        <p:nvSpPr>
-          <p:cNvPr id="7" name="Rectangle 6"/>
-          <p:cNvSpPr/>
+              <a:t>Soru · 10. hafta</a:t>
+            </a:r>
+          </a:p>
+        </p:txBody>
+      </p:sp>
+      <p:sp>
+        <p:nvSpPr>
+          <p:cNvPr id="7" name="TextBox 6"/>
+          <p:cNvSpPr txBox="1"/>
           <p:nvPr/>
         </p:nvSpPr>
         <p:spPr>
           <a:xfrm>
             <a:off x="640080" y="1325880"/>
-            <a:ext cx="10911535" cy="604520"/>
-          </a:xfrm>
-          <a:prstGeom prst="rect">
-            <a:avLst/>
-          </a:prstGeom>
-          <a:solidFill>
-            <a:srgbClr val="EEF7F8"/>
-          </a:solidFill>
-          <a:ln>
-            <a:solidFill>
-              <a:srgbClr val="006D77"/>
-            </a:solidFill>
-          </a:ln>
-        </p:spPr>
-        <p:style>
-          <a:lnRef idx="1">
-            <a:schemeClr val="accent1"/>
-          </a:lnRef>
-          <a:fillRef idx="3">
-            <a:schemeClr val="accent1"/>
-          </a:fillRef>
-          <a:effectRef idx="2">
-            <a:schemeClr val="accent1"/>
-          </a:effectRef>
-          <a:fontRef idx="minor">
-            <a:schemeClr val="lt1"/>
-          </a:fontRef>
-        </p:style>
-        <p:txBody>
-          <a:bodyPr rtlCol="0" anchor="ctr" wrap="square" lIns="182880"/>
+            <a:ext cx="10911535" cy="439928"/>
+          </a:xfrm>
+          <a:prstGeom prst="rect">
+            <a:avLst/>
+          </a:prstGeom>
+          <a:noFill/>
+        </p:spPr>
+        <p:txBody>
+          <a:bodyPr wrap="square" lIns="45720" rIns="45720">
+            <a:spAutoFit/>
+          </a:bodyPr>
           <a:lstStyle/>
           <a:p>
             <a:pPr algn="l"/>
             <a:r>
+              <a:rPr sz="2000" b="1">
+                <a:solidFill>
+                  <a:srgbClr val="1F2D3A"/>
+                </a:solidFill>
+              </a:rPr>
+              <a:t>Zincir doğrulamanın dört sorusu?</a:t>
+            </a:r>
+          </a:p>
+        </p:txBody>
+      </p:sp>
+      <p:sp>
+        <p:nvSpPr>
+          <p:cNvPr id="8" name="TextBox 7"/>
+          <p:cNvSpPr txBox="1"/>
+          <p:nvPr/>
+        </p:nvSpPr>
+        <p:spPr>
+          <a:xfrm>
+            <a:off x="640080" y="1875536"/>
+            <a:ext cx="10911535" cy="770128"/>
+          </a:xfrm>
+          <a:prstGeom prst="rect">
+            <a:avLst/>
+          </a:prstGeom>
+          <a:noFill/>
+        </p:spPr>
+        <p:txBody>
+          <a:bodyPr wrap="square" lIns="45720" rIns="45720">
+            <a:spAutoFit/>
+          </a:bodyPr>
+          <a:lstStyle/>
+          <a:p>
+            <a:pPr algn="l"/>
+            <a:r>
+              <a:rPr sz="2000" b="1">
+                <a:solidFill>
+                  <a:srgbClr val="1F2D3A"/>
+                </a:solidFill>
+              </a:rPr>
+              <a:t>Cevap:</a:t>
+            </a:r>
+            <a:r>
               <a:rPr sz="2000" b="0">
                 <a:solidFill>
                   <a:srgbClr val="1F2D3A"/>
                 </a:solidFill>
               </a:rPr>
-              <a:t>Koruma = </a:t>
-            </a:r>
+              <a:t> İmza geçerli mi, güvenilir köke ulaşıyor mu, süre dolmamış mı, ad (SAN) eşleşiyor mu.</a:t>
+            </a:r>
+          </a:p>
+        </p:txBody>
+      </p:sp>
+    </p:spTree>
+  </p:cSld>
+  <p:clrMapOvr>
+    <a:masterClrMapping/>
+  </p:clrMapOvr>
+</p:sld>
+</file>
+
+<file path=ppt/slides/slide28.xml><?xml version="1.0" encoding="utf-8"?>
+<p:sld xmlns:a="http://schemas.openxmlformats.org/drawingml/2006/main" xmlns:p="http://schemas.openxmlformats.org/presentationml/2006/main" xmlns:r="http://schemas.openxmlformats.org/officeDocument/2006/relationships">
+  <p:cSld>
+    <p:spTree>
+      <p:nvGrpSpPr>
+        <p:cNvPr id="1" name=""/>
+        <p:cNvGrpSpPr/>
+        <p:nvPr/>
+      </p:nvGrpSpPr>
+      <p:grpSpPr/>
+      <p:pic>
+        <p:nvPicPr>
+          <p:cNvPr id="2" name="Picture 1" descr="rteu_logo_kucuk.jpg"/>
+          <p:cNvPicPr>
+            <a:picLocks noChangeAspect="1"/>
+          </p:cNvPicPr>
+          <p:nvPr/>
+        </p:nvPicPr>
+        <p:blipFill>
+          <a:blip r:embed="rId2"/>
+          <a:stretch>
+            <a:fillRect/>
+          </a:stretch>
+        </p:blipFill>
+        <p:spPr>
+          <a:xfrm>
+            <a:off x="640080" y="164592"/>
+            <a:ext cx="242773" cy="329184"/>
+          </a:xfrm>
+          <a:prstGeom prst="rect">
+            <a:avLst/>
+          </a:prstGeom>
+        </p:spPr>
+      </p:pic>
+      <p:sp>
+        <p:nvSpPr>
+          <p:cNvPr id="3" name="TextBox 2"/>
+          <p:cNvSpPr txBox="1"/>
+          <p:nvPr/>
+        </p:nvSpPr>
+        <p:spPr>
+          <a:xfrm>
+            <a:off x="1051560" y="182880"/>
+            <a:ext cx="7315200" cy="320040"/>
+          </a:xfrm>
+          <a:prstGeom prst="rect">
+            <a:avLst/>
+          </a:prstGeom>
+          <a:noFill/>
+        </p:spPr>
+        <p:txBody>
+          <a:bodyPr wrap="square" lIns="45720" rIns="45720">
+            <a:spAutoFit/>
+          </a:bodyPr>
+          <a:lstStyle/>
+          <a:p>
+            <a:r>
+              <a:rPr sz="1100" b="0">
+                <a:solidFill>
+                  <a:srgbClr val="5B6770"/>
+                </a:solidFill>
+              </a:rPr>
+              <a:t>CEN429 Güvenli Programlama · Hafta 16</a:t>
+            </a:r>
+          </a:p>
+        </p:txBody>
+      </p:sp>
+      <p:sp>
+        <p:nvSpPr>
+          <p:cNvPr id="4" name="TextBox 3"/>
+          <p:cNvSpPr txBox="1"/>
+          <p:nvPr/>
+        </p:nvSpPr>
+        <p:spPr>
+          <a:xfrm>
+            <a:off x="640080" y="6446520"/>
+            <a:ext cx="7315200" cy="274320"/>
+          </a:xfrm>
+          <a:prstGeom prst="rect">
+            <a:avLst/>
+          </a:prstGeom>
+          <a:noFill/>
+        </p:spPr>
+        <p:txBody>
+          <a:bodyPr wrap="square" lIns="45720" rIns="45720">
+            <a:spAutoFit/>
+          </a:bodyPr>
+          <a:lstStyle/>
+          <a:p>
+            <a:r>
+              <a:rPr sz="1000" b="0">
+                <a:solidFill>
+                  <a:srgbClr val="5B6770"/>
+                </a:solidFill>
+              </a:rPr>
+              <a:t>RTEÜ Bilgisayar Mühendisliği · 2026-2027 Güz</a:t>
+            </a:r>
+          </a:p>
+        </p:txBody>
+      </p:sp>
+      <p:sp>
+        <p:nvSpPr>
+          <p:cNvPr id="5" name="TextBox 4"/>
+          <p:cNvSpPr txBox="1"/>
+          <p:nvPr/>
+        </p:nvSpPr>
+        <p:spPr>
+          <a:xfrm>
+            <a:off x="10637215" y="6446520"/>
+            <a:ext cx="914400" cy="274320"/>
+          </a:xfrm>
+          <a:prstGeom prst="rect">
+            <a:avLst/>
+          </a:prstGeom>
+          <a:noFill/>
+        </p:spPr>
+        <p:txBody>
+          <a:bodyPr wrap="square" lIns="45720" rIns="45720">
+            <a:spAutoFit/>
+          </a:bodyPr>
+          <a:lstStyle/>
+          <a:p>
+            <a:pPr algn="r"/>
+            <a:r>
+              <a:rPr sz="1000" b="0">
+                <a:solidFill>
+                  <a:srgbClr val="5B6770"/>
+                </a:solidFill>
+              </a:rPr>
+              <a:t>28</a:t>
+            </a:r>
+          </a:p>
+        </p:txBody>
+      </p:sp>
+      <p:sp>
+        <p:nvSpPr>
+          <p:cNvPr id="6" name="TextBox 5"/>
+          <p:cNvSpPr txBox="1"/>
+          <p:nvPr/>
+        </p:nvSpPr>
+        <p:spPr>
+          <a:xfrm>
+            <a:off x="640080" y="548640"/>
+            <a:ext cx="10911535" cy="731520"/>
+          </a:xfrm>
+          <a:prstGeom prst="rect">
+            <a:avLst/>
+          </a:prstGeom>
+          <a:noFill/>
+        </p:spPr>
+        <p:txBody>
+          <a:bodyPr wrap="square" lIns="45720" rIns="45720" anchor="ctr">
+            <a:spAutoFit/>
+          </a:bodyPr>
+          <a:lstStyle/>
+          <a:p>
+            <a:r>
+              <a:rPr sz="3000" b="1">
+                <a:solidFill>
+                  <a:srgbClr val="006D77"/>
+                </a:solidFill>
+              </a:rPr>
+              <a:t>Soru · 12–13. hafta</a:t>
+            </a:r>
+          </a:p>
+        </p:txBody>
+      </p:sp>
+      <p:sp>
+        <p:nvSpPr>
+          <p:cNvPr id="7" name="TextBox 6"/>
+          <p:cNvSpPr txBox="1"/>
+          <p:nvPr/>
+        </p:nvSpPr>
+        <p:spPr>
+          <a:xfrm>
+            <a:off x="640080" y="1325880"/>
+            <a:ext cx="10911535" cy="439928"/>
+          </a:xfrm>
+          <a:prstGeom prst="rect">
+            <a:avLst/>
+          </a:prstGeom>
+          <a:noFill/>
+        </p:spPr>
+        <p:txBody>
+          <a:bodyPr wrap="square" lIns="45720" rIns="45720">
+            <a:spAutoFit/>
+          </a:bodyPr>
+          <a:lstStyle/>
+          <a:p>
+            <a:pPr algn="l"/>
             <a:r>
               <a:rPr sz="2000" b="1">
                 <a:solidFill>
                   <a:srgbClr val="1F2D3A"/>
                 </a:solidFill>
               </a:rPr>
-              <a:t>gecikme</a:t>
+              <a:t>"EAL4+ her zaman daha güvenli" doğru mu?</a:t>
+            </a:r>
+          </a:p>
+        </p:txBody>
+      </p:sp>
+      <p:sp>
+        <p:nvSpPr>
+          <p:cNvPr id="8" name="TextBox 7"/>
+          <p:cNvSpPr txBox="1"/>
+          <p:nvPr/>
+        </p:nvSpPr>
+        <p:spPr>
+          <a:xfrm>
+            <a:off x="640080" y="1875536"/>
+            <a:ext cx="10911535" cy="439928"/>
+          </a:xfrm>
+          <a:prstGeom prst="rect">
+            <a:avLst/>
+          </a:prstGeom>
+          <a:noFill/>
+        </p:spPr>
+        <p:txBody>
+          <a:bodyPr wrap="square" lIns="45720" rIns="45720">
+            <a:spAutoFit/>
+          </a:bodyPr>
+          <a:lstStyle/>
+          <a:p>
+            <a:pPr algn="l"/>
+            <a:r>
+              <a:rPr sz="2000" b="1">
+                <a:solidFill>
+                  <a:srgbClr val="1F2D3A"/>
+                </a:solidFill>
+              </a:rPr>
+              <a:t>Cevap:</a:t>
             </a:r>
             <a:r>
               <a:rPr sz="2000" b="0">
@@ -9283,57 +9334,266 @@
                   <a:srgbClr val="1F2D3A"/>
                 </a:solidFill>
               </a:rPr>
-              <a:t>; güç katmandan ve </a:t>
-            </a:r>
+              <a:t> Hayır; EAL derinliktir, güvenlik ST'deki tehdit ve amaçlara bağlı.</a:t>
+            </a:r>
+          </a:p>
+        </p:txBody>
+      </p:sp>
+    </p:spTree>
+  </p:cSld>
+  <p:clrMapOvr>
+    <a:masterClrMapping/>
+  </p:clrMapOvr>
+</p:sld>
+</file>
+
+<file path=ppt/slides/slide29.xml><?xml version="1.0" encoding="utf-8"?>
+<p:sld xmlns:a="http://schemas.openxmlformats.org/drawingml/2006/main" xmlns:p="http://schemas.openxmlformats.org/presentationml/2006/main" xmlns:r="http://schemas.openxmlformats.org/officeDocument/2006/relationships">
+  <p:cSld>
+    <p:spTree>
+      <p:nvGrpSpPr>
+        <p:cNvPr id="1" name=""/>
+        <p:cNvGrpSpPr/>
+        <p:nvPr/>
+      </p:nvGrpSpPr>
+      <p:grpSpPr/>
+      <p:pic>
+        <p:nvPicPr>
+          <p:cNvPr id="2" name="Picture 1" descr="rteu_logo_kucuk.jpg"/>
+          <p:cNvPicPr>
+            <a:picLocks noChangeAspect="1"/>
+          </p:cNvPicPr>
+          <p:nvPr/>
+        </p:nvPicPr>
+        <p:blipFill>
+          <a:blip r:embed="rId2"/>
+          <a:stretch>
+            <a:fillRect/>
+          </a:stretch>
+        </p:blipFill>
+        <p:spPr>
+          <a:xfrm>
+            <a:off x="640080" y="164592"/>
+            <a:ext cx="242773" cy="329184"/>
+          </a:xfrm>
+          <a:prstGeom prst="rect">
+            <a:avLst/>
+          </a:prstGeom>
+        </p:spPr>
+      </p:pic>
+      <p:sp>
+        <p:nvSpPr>
+          <p:cNvPr id="3" name="TextBox 2"/>
+          <p:cNvSpPr txBox="1"/>
+          <p:nvPr/>
+        </p:nvSpPr>
+        <p:spPr>
+          <a:xfrm>
+            <a:off x="1051560" y="182880"/>
+            <a:ext cx="7315200" cy="320040"/>
+          </a:xfrm>
+          <a:prstGeom prst="rect">
+            <a:avLst/>
+          </a:prstGeom>
+          <a:noFill/>
+        </p:spPr>
+        <p:txBody>
+          <a:bodyPr wrap="square" lIns="45720" rIns="45720">
+            <a:spAutoFit/>
+          </a:bodyPr>
+          <a:lstStyle/>
+          <a:p>
+            <a:r>
+              <a:rPr sz="1100" b="0">
+                <a:solidFill>
+                  <a:srgbClr val="5B6770"/>
+                </a:solidFill>
+              </a:rPr>
+              <a:t>CEN429 Güvenli Programlama · Hafta 16</a:t>
+            </a:r>
+          </a:p>
+        </p:txBody>
+      </p:sp>
+      <p:sp>
+        <p:nvSpPr>
+          <p:cNvPr id="4" name="TextBox 3"/>
+          <p:cNvSpPr txBox="1"/>
+          <p:nvPr/>
+        </p:nvSpPr>
+        <p:spPr>
+          <a:xfrm>
+            <a:off x="640080" y="6446520"/>
+            <a:ext cx="7315200" cy="274320"/>
+          </a:xfrm>
+          <a:prstGeom prst="rect">
+            <a:avLst/>
+          </a:prstGeom>
+          <a:noFill/>
+        </p:spPr>
+        <p:txBody>
+          <a:bodyPr wrap="square" lIns="45720" rIns="45720">
+            <a:spAutoFit/>
+          </a:bodyPr>
+          <a:lstStyle/>
+          <a:p>
+            <a:r>
+              <a:rPr sz="1000" b="0">
+                <a:solidFill>
+                  <a:srgbClr val="5B6770"/>
+                </a:solidFill>
+              </a:rPr>
+              <a:t>RTEÜ Bilgisayar Mühendisliği · 2026-2027 Güz</a:t>
+            </a:r>
+          </a:p>
+        </p:txBody>
+      </p:sp>
+      <p:sp>
+        <p:nvSpPr>
+          <p:cNvPr id="5" name="TextBox 4"/>
+          <p:cNvSpPr txBox="1"/>
+          <p:nvPr/>
+        </p:nvSpPr>
+        <p:spPr>
+          <a:xfrm>
+            <a:off x="10637215" y="6446520"/>
+            <a:ext cx="914400" cy="274320"/>
+          </a:xfrm>
+          <a:prstGeom prst="rect">
+            <a:avLst/>
+          </a:prstGeom>
+          <a:noFill/>
+        </p:spPr>
+        <p:txBody>
+          <a:bodyPr wrap="square" lIns="45720" rIns="45720">
+            <a:spAutoFit/>
+          </a:bodyPr>
+          <a:lstStyle/>
+          <a:p>
+            <a:pPr algn="r"/>
+            <a:r>
+              <a:rPr sz="1000" b="0">
+                <a:solidFill>
+                  <a:srgbClr val="5B6770"/>
+                </a:solidFill>
+              </a:rPr>
+              <a:t>29</a:t>
+            </a:r>
+          </a:p>
+        </p:txBody>
+      </p:sp>
+      <p:sp>
+        <p:nvSpPr>
+          <p:cNvPr id="6" name="TextBox 5"/>
+          <p:cNvSpPr txBox="1"/>
+          <p:nvPr/>
+        </p:nvSpPr>
+        <p:spPr>
+          <a:xfrm>
+            <a:off x="640080" y="548640"/>
+            <a:ext cx="10911535" cy="731520"/>
+          </a:xfrm>
+          <a:prstGeom prst="rect">
+            <a:avLst/>
+          </a:prstGeom>
+          <a:noFill/>
+        </p:spPr>
+        <p:txBody>
+          <a:bodyPr wrap="square" lIns="45720" rIns="45720" anchor="ctr">
+            <a:spAutoFit/>
+          </a:bodyPr>
+          <a:lstStyle/>
+          <a:p>
+            <a:r>
+              <a:rPr sz="3000" b="1">
+                <a:solidFill>
+                  <a:srgbClr val="006D77"/>
+                </a:solidFill>
+              </a:rPr>
+              <a:t>Örnek · çoktan seçmeli</a:t>
+            </a:r>
+          </a:p>
+        </p:txBody>
+      </p:sp>
+      <p:sp>
+        <p:nvSpPr>
+          <p:cNvPr id="7" name="TextBox 6"/>
+          <p:cNvSpPr txBox="1"/>
+          <p:nvPr/>
+        </p:nvSpPr>
+        <p:spPr>
+          <a:xfrm>
+            <a:off x="640080" y="1325880"/>
+            <a:ext cx="10911535" cy="439928"/>
+          </a:xfrm>
+          <a:prstGeom prst="rect">
+            <a:avLst/>
+          </a:prstGeom>
+          <a:noFill/>
+        </p:spPr>
+        <p:txBody>
+          <a:bodyPr wrap="square" lIns="45720" rIns="45720">
+            <a:spAutoFit/>
+          </a:bodyPr>
+          <a:lstStyle/>
+          <a:p>
+            <a:pPr algn="l"/>
             <a:r>
               <a:rPr sz="2000" b="1">
                 <a:solidFill>
                   <a:srgbClr val="1F2D3A"/>
                 </a:solidFill>
               </a:rPr>
-              <a:t>ölçümden</a:t>
-            </a:r>
+              <a:t>Whitebox kriptografide dış kodlamanın (F,G) sınırı nedir?</a:t>
+            </a:r>
+          </a:p>
+        </p:txBody>
+      </p:sp>
+      <p:sp>
+        <p:nvSpPr>
+          <p:cNvPr id="8" name="TextBox 7"/>
+          <p:cNvSpPr txBox="1"/>
+          <p:nvPr/>
+        </p:nvSpPr>
+        <p:spPr>
+          <a:xfrm>
+            <a:off x="640080" y="1875536"/>
+            <a:ext cx="10911535" cy="439928"/>
+          </a:xfrm>
+          <a:prstGeom prst="rect">
+            <a:avLst/>
+          </a:prstGeom>
+          <a:noFill/>
+        </p:spPr>
+        <p:txBody>
+          <a:bodyPr wrap="square" lIns="45720" rIns="45720">
+            <a:spAutoFit/>
+          </a:bodyPr>
+          <a:lstStyle/>
+          <a:p>
+            <a:pPr algn="l"/>
             <a:r>
               <a:rPr sz="2000" b="0">
                 <a:solidFill>
                   <a:srgbClr val="1F2D3A"/>
                 </a:solidFill>
               </a:rPr>
-              <a:t>. Ezber değil, gerekçe ölçülür.</a:t>
-            </a:r>
-          </a:p>
-        </p:txBody>
-      </p:sp>
-      <p:sp>
-        <p:nvSpPr>
-          <p:cNvPr id="8" name="TextBox 7"/>
-          <p:cNvSpPr txBox="1"/>
-          <p:nvPr/>
-        </p:nvSpPr>
-        <p:spPr>
-          <a:xfrm>
-            <a:off x="640080" y="2040128"/>
-            <a:ext cx="10911535" cy="439928"/>
-          </a:xfrm>
-          <a:prstGeom prst="rect">
-            <a:avLst/>
-          </a:prstGeom>
-          <a:noFill/>
-        </p:spPr>
-        <p:txBody>
-          <a:bodyPr wrap="square" lIns="45720" rIns="45720">
-            <a:spAutoFit/>
-          </a:bodyPr>
-          <a:lstStyle/>
-          <a:p>
-            <a:pPr algn="l"/>
+              <a:t>A) Çok yavaş B) </a:t>
+            </a:r>
+            <a:r>
+              <a:rPr sz="2000" b="1">
+                <a:solidFill>
+                  <a:srgbClr val="1F2D3A"/>
+                </a:solidFill>
+              </a:rPr>
+              <a:t>Standart AES değil</a:t>
+            </a:r>
             <a:r>
               <a:rPr sz="2000" b="0">
                 <a:solidFill>
                   <a:srgbClr val="1F2D3A"/>
                 </a:solidFill>
               </a:rPr>
-              <a:t>İyi şanslar.</a:t>
+              <a:t> ✓ C) Tablo küçük D) Anahtar açık</a:t>
             </a:r>
           </a:p>
         </p:txBody>
@@ -9476,6 +9736,874 @@
                 </a:solidFill>
               </a:rPr>
               <a:t>3</a:t>
+            </a:r>
+          </a:p>
+        </p:txBody>
+      </p:sp>
+      <p:sp>
+        <p:nvSpPr>
+          <p:cNvPr id="6" name="TextBox 5"/>
+          <p:cNvSpPr txBox="1"/>
+          <p:nvPr/>
+        </p:nvSpPr>
+        <p:spPr>
+          <a:xfrm>
+            <a:off x="640080" y="548640"/>
+            <a:ext cx="10911535" cy="731520"/>
+          </a:xfrm>
+          <a:prstGeom prst="rect">
+            <a:avLst/>
+          </a:prstGeom>
+          <a:noFill/>
+        </p:spPr>
+        <p:txBody>
+          <a:bodyPr wrap="square" lIns="45720" rIns="45720" anchor="ctr">
+            <a:spAutoFit/>
+          </a:bodyPr>
+          <a:lstStyle/>
+          <a:p>
+            <a:r>
+              <a:rPr sz="3000" b="1">
+                <a:solidFill>
+                  <a:srgbClr val="006D77"/>
+                </a:solidFill>
+              </a:rPr>
+              <a:t>Quiz-2: ne, ne zaman?</a:t>
+            </a:r>
+          </a:p>
+        </p:txBody>
+      </p:sp>
+      <p:sp>
+        <p:nvSpPr>
+          <p:cNvPr id="7" name="TextBox 6"/>
+          <p:cNvSpPr txBox="1"/>
+          <p:nvPr/>
+        </p:nvSpPr>
+        <p:spPr>
+          <a:xfrm>
+            <a:off x="640080" y="1325880"/>
+            <a:ext cx="10911535" cy="1549400"/>
+          </a:xfrm>
+          <a:prstGeom prst="rect">
+            <a:avLst/>
+          </a:prstGeom>
+          <a:noFill/>
+        </p:spPr>
+        <p:txBody>
+          <a:bodyPr wrap="square" lIns="45720" rIns="45720">
+            <a:spAutoFit/>
+          </a:bodyPr>
+          <a:lstStyle/>
+          <a:p>
+            <a:pPr>
+              <a:spcAft>
+                <a:spcPts val="300"/>
+              </a:spcAft>
+            </a:pPr>
+            <a:r>
+              <a:rPr sz="2000" b="1">
+                <a:solidFill>
+                  <a:srgbClr val="006D77"/>
+                </a:solidFill>
+              </a:rPr>
+              <a:t>• </a:t>
+            </a:r>
+            <a:r>
+              <a:rPr sz="2000" b="0">
+                <a:solidFill>
+                  <a:srgbClr val="1F2D3A"/>
+                </a:solidFill>
+              </a:rPr>
+              <a:t>Kapsam: </a:t>
+            </a:r>
+            <a:r>
+              <a:rPr sz="2000" b="1">
+                <a:solidFill>
+                  <a:srgbClr val="1F2D3A"/>
+                </a:solidFill>
+              </a:rPr>
+              <a:t>9–14. haftalar</a:t>
+            </a:r>
+            <a:r>
+              <a:rPr sz="2000" b="0">
+                <a:solidFill>
+                  <a:srgbClr val="1F2D3A"/>
+                </a:solidFill>
+              </a:rPr>
+              <a:t> · finalin </a:t>
+            </a:r>
+            <a:r>
+              <a:rPr sz="2000" b="1">
+                <a:solidFill>
+                  <a:srgbClr val="1F2D3A"/>
+                </a:solidFill>
+              </a:rPr>
+              <a:t>%30</a:t>
+            </a:r>
+            <a:r>
+              <a:rPr sz="2000" b="0">
+                <a:solidFill>
+                  <a:srgbClr val="1F2D3A"/>
+                </a:solidFill>
+              </a:rPr>
+              <a:t>'u</a:t>
+            </a:r>
+          </a:p>
+          <a:p>
+            <a:pPr>
+              <a:spcAft>
+                <a:spcPts val="300"/>
+              </a:spcAft>
+            </a:pPr>
+            <a:r>
+              <a:rPr sz="2000" b="1">
+                <a:solidFill>
+                  <a:srgbClr val="006D77"/>
+                </a:solidFill>
+              </a:rPr>
+              <a:t>• </a:t>
+            </a:r>
+            <a:r>
+              <a:rPr sz="2000" b="0">
+                <a:solidFill>
+                  <a:srgbClr val="1F2D3A"/>
+                </a:solidFill>
+              </a:rPr>
+              <a:t>Tarih, saat, yer, süre, biçim: </a:t>
+            </a:r>
+            <a:r>
+              <a:rPr sz="2000" b="1">
+                <a:solidFill>
+                  <a:srgbClr val="1F2D3A"/>
+                </a:solidFill>
+              </a:rPr>
+              <a:t>ders sınıfında</a:t>
+            </a:r>
+          </a:p>
+          <a:p>
+            <a:pPr>
+              <a:spcAft>
+                <a:spcPts val="300"/>
+              </a:spcAft>
+            </a:pPr>
+            <a:r>
+              <a:rPr sz="2000" b="1">
+                <a:solidFill>
+                  <a:srgbClr val="006D77"/>
+                </a:solidFill>
+              </a:rPr>
+              <a:t>• </a:t>
+            </a:r>
+            <a:r>
+              <a:rPr sz="2000" b="0">
+                <a:solidFill>
+                  <a:srgbClr val="1F2D3A"/>
+                </a:solidFill>
+              </a:rPr>
+              <a:t>En iyi hazırlık: Kendini sınama soruları · 10. hafta OpenSSL adımları · 13. hafta uyum matrisi</a:t>
+            </a:r>
+          </a:p>
+        </p:txBody>
+      </p:sp>
+    </p:spTree>
+  </p:cSld>
+  <p:clrMapOvr>
+    <a:masterClrMapping/>
+  </p:clrMapOvr>
+</p:sld>
+</file>
+
+<file path=ppt/slides/slide30.xml><?xml version="1.0" encoding="utf-8"?>
+<p:sld xmlns:a="http://schemas.openxmlformats.org/drawingml/2006/main" xmlns:p="http://schemas.openxmlformats.org/presentationml/2006/main" xmlns:r="http://schemas.openxmlformats.org/officeDocument/2006/relationships">
+  <p:cSld>
+    <p:spTree>
+      <p:nvGrpSpPr>
+        <p:cNvPr id="1" name=""/>
+        <p:cNvGrpSpPr/>
+        <p:nvPr/>
+      </p:nvGrpSpPr>
+      <p:grpSpPr/>
+      <p:pic>
+        <p:nvPicPr>
+          <p:cNvPr id="2" name="Picture 1" descr="rteu_logo_kucuk.jpg"/>
+          <p:cNvPicPr>
+            <a:picLocks noChangeAspect="1"/>
+          </p:cNvPicPr>
+          <p:nvPr/>
+        </p:nvPicPr>
+        <p:blipFill>
+          <a:blip r:embed="rId2"/>
+          <a:stretch>
+            <a:fillRect/>
+          </a:stretch>
+        </p:blipFill>
+        <p:spPr>
+          <a:xfrm>
+            <a:off x="640080" y="164592"/>
+            <a:ext cx="242773" cy="329184"/>
+          </a:xfrm>
+          <a:prstGeom prst="rect">
+            <a:avLst/>
+          </a:prstGeom>
+        </p:spPr>
+      </p:pic>
+      <p:sp>
+        <p:nvSpPr>
+          <p:cNvPr id="3" name="TextBox 2"/>
+          <p:cNvSpPr txBox="1"/>
+          <p:nvPr/>
+        </p:nvSpPr>
+        <p:spPr>
+          <a:xfrm>
+            <a:off x="1051560" y="182880"/>
+            <a:ext cx="7315200" cy="320040"/>
+          </a:xfrm>
+          <a:prstGeom prst="rect">
+            <a:avLst/>
+          </a:prstGeom>
+          <a:noFill/>
+        </p:spPr>
+        <p:txBody>
+          <a:bodyPr wrap="square" lIns="45720" rIns="45720">
+            <a:spAutoFit/>
+          </a:bodyPr>
+          <a:lstStyle/>
+          <a:p>
+            <a:r>
+              <a:rPr sz="1100" b="0">
+                <a:solidFill>
+                  <a:srgbClr val="5B6770"/>
+                </a:solidFill>
+              </a:rPr>
+              <a:t>CEN429 Güvenli Programlama · Hafta 16</a:t>
+            </a:r>
+          </a:p>
+        </p:txBody>
+      </p:sp>
+      <p:sp>
+        <p:nvSpPr>
+          <p:cNvPr id="4" name="TextBox 3"/>
+          <p:cNvSpPr txBox="1"/>
+          <p:nvPr/>
+        </p:nvSpPr>
+        <p:spPr>
+          <a:xfrm>
+            <a:off x="640080" y="6446520"/>
+            <a:ext cx="7315200" cy="274320"/>
+          </a:xfrm>
+          <a:prstGeom prst="rect">
+            <a:avLst/>
+          </a:prstGeom>
+          <a:noFill/>
+        </p:spPr>
+        <p:txBody>
+          <a:bodyPr wrap="square" lIns="45720" rIns="45720">
+            <a:spAutoFit/>
+          </a:bodyPr>
+          <a:lstStyle/>
+          <a:p>
+            <a:r>
+              <a:rPr sz="1000" b="0">
+                <a:solidFill>
+                  <a:srgbClr val="5B6770"/>
+                </a:solidFill>
+              </a:rPr>
+              <a:t>RTEÜ Bilgisayar Mühendisliği · 2026-2027 Güz</a:t>
+            </a:r>
+          </a:p>
+        </p:txBody>
+      </p:sp>
+      <p:sp>
+        <p:nvSpPr>
+          <p:cNvPr id="5" name="TextBox 4"/>
+          <p:cNvSpPr txBox="1"/>
+          <p:nvPr/>
+        </p:nvSpPr>
+        <p:spPr>
+          <a:xfrm>
+            <a:off x="10637215" y="6446520"/>
+            <a:ext cx="914400" cy="274320"/>
+          </a:xfrm>
+          <a:prstGeom prst="rect">
+            <a:avLst/>
+          </a:prstGeom>
+          <a:noFill/>
+        </p:spPr>
+        <p:txBody>
+          <a:bodyPr wrap="square" lIns="45720" rIns="45720">
+            <a:spAutoFit/>
+          </a:bodyPr>
+          <a:lstStyle/>
+          <a:p>
+            <a:pPr algn="r"/>
+            <a:r>
+              <a:rPr sz="1000" b="0">
+                <a:solidFill>
+                  <a:srgbClr val="5B6770"/>
+                </a:solidFill>
+              </a:rPr>
+              <a:t>30</a:t>
+            </a:r>
+          </a:p>
+        </p:txBody>
+      </p:sp>
+      <p:sp>
+        <p:nvSpPr>
+          <p:cNvPr id="6" name="TextBox 5"/>
+          <p:cNvSpPr txBox="1"/>
+          <p:nvPr/>
+        </p:nvSpPr>
+        <p:spPr>
+          <a:xfrm>
+            <a:off x="640080" y="548640"/>
+            <a:ext cx="10911535" cy="731520"/>
+          </a:xfrm>
+          <a:prstGeom prst="rect">
+            <a:avLst/>
+          </a:prstGeom>
+          <a:noFill/>
+        </p:spPr>
+        <p:txBody>
+          <a:bodyPr wrap="square" lIns="45720" rIns="45720" anchor="ctr">
+            <a:spAutoFit/>
+          </a:bodyPr>
+          <a:lstStyle/>
+          <a:p>
+            <a:r>
+              <a:rPr sz="3000" b="1">
+                <a:solidFill>
+                  <a:srgbClr val="006D77"/>
+                </a:solidFill>
+              </a:rPr>
+              <a:t>Çalışma planı</a:t>
+            </a:r>
+          </a:p>
+        </p:txBody>
+      </p:sp>
+      <p:sp>
+        <p:nvSpPr>
+          <p:cNvPr id="7" name="TextBox 6"/>
+          <p:cNvSpPr txBox="1"/>
+          <p:nvPr/>
+        </p:nvSpPr>
+        <p:spPr>
+          <a:xfrm>
+            <a:off x="640080" y="1325880"/>
+            <a:ext cx="10911535" cy="1219200"/>
+          </a:xfrm>
+          <a:prstGeom prst="rect">
+            <a:avLst/>
+          </a:prstGeom>
+          <a:noFill/>
+        </p:spPr>
+        <p:txBody>
+          <a:bodyPr wrap="square" lIns="45720" rIns="45720">
+            <a:spAutoFit/>
+          </a:bodyPr>
+          <a:lstStyle/>
+          <a:p>
+            <a:pPr>
+              <a:spcAft>
+                <a:spcPts val="300"/>
+              </a:spcAft>
+            </a:pPr>
+            <a:r>
+              <a:rPr sz="2000" b="1">
+                <a:solidFill>
+                  <a:srgbClr val="006D77"/>
+                </a:solidFill>
+              </a:rPr>
+              <a:t>• </a:t>
+            </a:r>
+            <a:r>
+              <a:rPr sz="2000" b="0">
+                <a:solidFill>
+                  <a:srgbClr val="1F2D3A"/>
+                </a:solidFill>
+              </a:rPr>
+              <a:t>9, 11, 14. hafta sayfalarındaki çözümlü sınamaları yap.</a:t>
+            </a:r>
+          </a:p>
+          <a:p>
+            <a:pPr>
+              <a:spcAft>
+                <a:spcPts val="300"/>
+              </a:spcAft>
+            </a:pPr>
+            <a:r>
+              <a:rPr sz="2000" b="1">
+                <a:solidFill>
+                  <a:srgbClr val="006D77"/>
+                </a:solidFill>
+              </a:rPr>
+              <a:t>• </a:t>
+            </a:r>
+            <a:r>
+              <a:rPr sz="2000" b="0">
+                <a:solidFill>
+                  <a:srgbClr val="1F2D3A"/>
+                </a:solidFill>
+              </a:rPr>
+              <a:t>10. haftanın OpenSSL adımlarını tekrar et.</a:t>
+            </a:r>
+          </a:p>
+          <a:p>
+            <a:pPr>
+              <a:spcAft>
+                <a:spcPts val="300"/>
+              </a:spcAft>
+            </a:pPr>
+            <a:r>
+              <a:rPr sz="2000" b="1">
+                <a:solidFill>
+                  <a:srgbClr val="006D77"/>
+                </a:solidFill>
+              </a:rPr>
+              <a:t>• </a:t>
+            </a:r>
+            <a:r>
+              <a:rPr sz="2000" b="0">
+                <a:solidFill>
+                  <a:srgbClr val="1F2D3A"/>
+                </a:solidFill>
+              </a:rPr>
+              <a:t>13. haftanın uyum matrisi etkinliğini kendin doldur.</a:t>
+            </a:r>
+          </a:p>
+        </p:txBody>
+      </p:sp>
+    </p:spTree>
+  </p:cSld>
+  <p:clrMapOvr>
+    <a:masterClrMapping/>
+  </p:clrMapOvr>
+</p:sld>
+</file>
+
+<file path=ppt/slides/slide31.xml><?xml version="1.0" encoding="utf-8"?>
+<p:sld xmlns:a="http://schemas.openxmlformats.org/drawingml/2006/main" xmlns:p="http://schemas.openxmlformats.org/presentationml/2006/main" xmlns:r="http://schemas.openxmlformats.org/officeDocument/2006/relationships">
+  <p:cSld>
+    <p:spTree>
+      <p:nvGrpSpPr>
+        <p:cNvPr id="1" name=""/>
+        <p:cNvGrpSpPr/>
+        <p:nvPr/>
+      </p:nvGrpSpPr>
+      <p:grpSpPr/>
+      <p:pic>
+        <p:nvPicPr>
+          <p:cNvPr id="2" name="Picture 1" descr="rteu_logo_kucuk.jpg"/>
+          <p:cNvPicPr>
+            <a:picLocks noChangeAspect="1"/>
+          </p:cNvPicPr>
+          <p:nvPr/>
+        </p:nvPicPr>
+        <p:blipFill>
+          <a:blip r:embed="rId2"/>
+          <a:stretch>
+            <a:fillRect/>
+          </a:stretch>
+        </p:blipFill>
+        <p:spPr>
+          <a:xfrm>
+            <a:off x="640080" y="164592"/>
+            <a:ext cx="242773" cy="329184"/>
+          </a:xfrm>
+          <a:prstGeom prst="rect">
+            <a:avLst/>
+          </a:prstGeom>
+        </p:spPr>
+      </p:pic>
+      <p:sp>
+        <p:nvSpPr>
+          <p:cNvPr id="3" name="TextBox 2"/>
+          <p:cNvSpPr txBox="1"/>
+          <p:nvPr/>
+        </p:nvSpPr>
+        <p:spPr>
+          <a:xfrm>
+            <a:off x="1051560" y="182880"/>
+            <a:ext cx="7315200" cy="320040"/>
+          </a:xfrm>
+          <a:prstGeom prst="rect">
+            <a:avLst/>
+          </a:prstGeom>
+          <a:noFill/>
+        </p:spPr>
+        <p:txBody>
+          <a:bodyPr wrap="square" lIns="45720" rIns="45720">
+            <a:spAutoFit/>
+          </a:bodyPr>
+          <a:lstStyle/>
+          <a:p>
+            <a:r>
+              <a:rPr sz="1100" b="0">
+                <a:solidFill>
+                  <a:srgbClr val="5B6770"/>
+                </a:solidFill>
+              </a:rPr>
+              <a:t>CEN429 Güvenli Programlama · Hafta 16</a:t>
+            </a:r>
+          </a:p>
+        </p:txBody>
+      </p:sp>
+      <p:sp>
+        <p:nvSpPr>
+          <p:cNvPr id="4" name="TextBox 3"/>
+          <p:cNvSpPr txBox="1"/>
+          <p:nvPr/>
+        </p:nvSpPr>
+        <p:spPr>
+          <a:xfrm>
+            <a:off x="640080" y="6446520"/>
+            <a:ext cx="7315200" cy="274320"/>
+          </a:xfrm>
+          <a:prstGeom prst="rect">
+            <a:avLst/>
+          </a:prstGeom>
+          <a:noFill/>
+        </p:spPr>
+        <p:txBody>
+          <a:bodyPr wrap="square" lIns="45720" rIns="45720">
+            <a:spAutoFit/>
+          </a:bodyPr>
+          <a:lstStyle/>
+          <a:p>
+            <a:r>
+              <a:rPr sz="1000" b="0">
+                <a:solidFill>
+                  <a:srgbClr val="5B6770"/>
+                </a:solidFill>
+              </a:rPr>
+              <a:t>RTEÜ Bilgisayar Mühendisliği · 2026-2027 Güz</a:t>
+            </a:r>
+          </a:p>
+        </p:txBody>
+      </p:sp>
+      <p:sp>
+        <p:nvSpPr>
+          <p:cNvPr id="5" name="TextBox 4"/>
+          <p:cNvSpPr txBox="1"/>
+          <p:nvPr/>
+        </p:nvSpPr>
+        <p:spPr>
+          <a:xfrm>
+            <a:off x="10637215" y="6446520"/>
+            <a:ext cx="914400" cy="274320"/>
+          </a:xfrm>
+          <a:prstGeom prst="rect">
+            <a:avLst/>
+          </a:prstGeom>
+          <a:noFill/>
+        </p:spPr>
+        <p:txBody>
+          <a:bodyPr wrap="square" lIns="45720" rIns="45720">
+            <a:spAutoFit/>
+          </a:bodyPr>
+          <a:lstStyle/>
+          <a:p>
+            <a:pPr algn="r"/>
+            <a:r>
+              <a:rPr sz="1000" b="0">
+                <a:solidFill>
+                  <a:srgbClr val="5B6770"/>
+                </a:solidFill>
+              </a:rPr>
+              <a:t>31</a:t>
+            </a:r>
+          </a:p>
+        </p:txBody>
+      </p:sp>
+      <p:sp>
+        <p:nvSpPr>
+          <p:cNvPr id="6" name="TextBox 5"/>
+          <p:cNvSpPr txBox="1"/>
+          <p:nvPr/>
+        </p:nvSpPr>
+        <p:spPr>
+          <a:xfrm>
+            <a:off x="640080" y="548640"/>
+            <a:ext cx="10911535" cy="731520"/>
+          </a:xfrm>
+          <a:prstGeom prst="rect">
+            <a:avLst/>
+          </a:prstGeom>
+          <a:noFill/>
+        </p:spPr>
+        <p:txBody>
+          <a:bodyPr wrap="square" lIns="45720" rIns="45720" anchor="ctr">
+            <a:spAutoFit/>
+          </a:bodyPr>
+          <a:lstStyle/>
+          <a:p>
+            <a:r>
+              <a:rPr sz="3000" b="1">
+                <a:solidFill>
+                  <a:srgbClr val="006D77"/>
+                </a:solidFill>
+              </a:rPr>
+              <a:t>Son söz (Quiz-2 hazırlık)</a:t>
+            </a:r>
+          </a:p>
+        </p:txBody>
+      </p:sp>
+      <p:sp>
+        <p:nvSpPr>
+          <p:cNvPr id="7" name="Rectangle 6"/>
+          <p:cNvSpPr/>
+          <p:nvPr/>
+        </p:nvSpPr>
+        <p:spPr>
+          <a:xfrm>
+            <a:off x="640080" y="1325880"/>
+            <a:ext cx="10911535" cy="604520"/>
+          </a:xfrm>
+          <a:prstGeom prst="rect">
+            <a:avLst/>
+          </a:prstGeom>
+          <a:solidFill>
+            <a:srgbClr val="EEF7F8"/>
+          </a:solidFill>
+          <a:ln>
+            <a:solidFill>
+              <a:srgbClr val="006D77"/>
+            </a:solidFill>
+          </a:ln>
+        </p:spPr>
+        <p:style>
+          <a:lnRef idx="1">
+            <a:schemeClr val="accent1"/>
+          </a:lnRef>
+          <a:fillRef idx="3">
+            <a:schemeClr val="accent1"/>
+          </a:fillRef>
+          <a:effectRef idx="2">
+            <a:schemeClr val="accent1"/>
+          </a:effectRef>
+          <a:fontRef idx="minor">
+            <a:schemeClr val="lt1"/>
+          </a:fontRef>
+        </p:style>
+        <p:txBody>
+          <a:bodyPr rtlCol="0" anchor="ctr" wrap="square" lIns="182880"/>
+          <a:lstStyle/>
+          <a:p>
+            <a:pPr algn="l"/>
+            <a:r>
+              <a:rPr sz="2000" b="0">
+                <a:solidFill>
+                  <a:srgbClr val="1F2D3A"/>
+                </a:solidFill>
+              </a:rPr>
+              <a:t>Koruma = </a:t>
+            </a:r>
+            <a:r>
+              <a:rPr sz="2000" b="1">
+                <a:solidFill>
+                  <a:srgbClr val="1F2D3A"/>
+                </a:solidFill>
+              </a:rPr>
+              <a:t>gecikme</a:t>
+            </a:r>
+            <a:r>
+              <a:rPr sz="2000" b="0">
+                <a:solidFill>
+                  <a:srgbClr val="1F2D3A"/>
+                </a:solidFill>
+              </a:rPr>
+              <a:t>; güç katmandan ve </a:t>
+            </a:r>
+            <a:r>
+              <a:rPr sz="2000" b="1">
+                <a:solidFill>
+                  <a:srgbClr val="1F2D3A"/>
+                </a:solidFill>
+              </a:rPr>
+              <a:t>ölçümden</a:t>
+            </a:r>
+            <a:r>
+              <a:rPr sz="2000" b="0">
+                <a:solidFill>
+                  <a:srgbClr val="1F2D3A"/>
+                </a:solidFill>
+              </a:rPr>
+              <a:t>. Ezber değil, gerekçe ölçülür.</a:t>
+            </a:r>
+          </a:p>
+        </p:txBody>
+      </p:sp>
+      <p:sp>
+        <p:nvSpPr>
+          <p:cNvPr id="8" name="TextBox 7"/>
+          <p:cNvSpPr txBox="1"/>
+          <p:nvPr/>
+        </p:nvSpPr>
+        <p:spPr>
+          <a:xfrm>
+            <a:off x="640080" y="2040128"/>
+            <a:ext cx="10911535" cy="439928"/>
+          </a:xfrm>
+          <a:prstGeom prst="rect">
+            <a:avLst/>
+          </a:prstGeom>
+          <a:noFill/>
+        </p:spPr>
+        <p:txBody>
+          <a:bodyPr wrap="square" lIns="45720" rIns="45720">
+            <a:spAutoFit/>
+          </a:bodyPr>
+          <a:lstStyle/>
+          <a:p>
+            <a:pPr algn="l"/>
+            <a:r>
+              <a:rPr sz="2000" b="0">
+                <a:solidFill>
+                  <a:srgbClr val="1F2D3A"/>
+                </a:solidFill>
+              </a:rPr>
+              <a:t>İyi şanslar.</a:t>
+            </a:r>
+          </a:p>
+        </p:txBody>
+      </p:sp>
+    </p:spTree>
+  </p:cSld>
+  <p:clrMapOvr>
+    <a:masterClrMapping/>
+  </p:clrMapOvr>
+</p:sld>
+</file>
+
+<file path=ppt/slides/slide4.xml><?xml version="1.0" encoding="utf-8"?>
+<p:sld xmlns:a="http://schemas.openxmlformats.org/drawingml/2006/main" xmlns:p="http://schemas.openxmlformats.org/presentationml/2006/main" xmlns:r="http://schemas.openxmlformats.org/officeDocument/2006/relationships">
+  <p:cSld>
+    <p:spTree>
+      <p:nvGrpSpPr>
+        <p:cNvPr id="1" name=""/>
+        <p:cNvGrpSpPr/>
+        <p:nvPr/>
+      </p:nvGrpSpPr>
+      <p:grpSpPr/>
+      <p:pic>
+        <p:nvPicPr>
+          <p:cNvPr id="2" name="Picture 1" descr="rteu_logo_kucuk.jpg"/>
+          <p:cNvPicPr>
+            <a:picLocks noChangeAspect="1"/>
+          </p:cNvPicPr>
+          <p:nvPr/>
+        </p:nvPicPr>
+        <p:blipFill>
+          <a:blip r:embed="rId2"/>
+          <a:stretch>
+            <a:fillRect/>
+          </a:stretch>
+        </p:blipFill>
+        <p:spPr>
+          <a:xfrm>
+            <a:off x="640080" y="164592"/>
+            <a:ext cx="242773" cy="329184"/>
+          </a:xfrm>
+          <a:prstGeom prst="rect">
+            <a:avLst/>
+          </a:prstGeom>
+        </p:spPr>
+      </p:pic>
+      <p:sp>
+        <p:nvSpPr>
+          <p:cNvPr id="3" name="TextBox 2"/>
+          <p:cNvSpPr txBox="1"/>
+          <p:nvPr/>
+        </p:nvSpPr>
+        <p:spPr>
+          <a:xfrm>
+            <a:off x="1051560" y="182880"/>
+            <a:ext cx="7315200" cy="320040"/>
+          </a:xfrm>
+          <a:prstGeom prst="rect">
+            <a:avLst/>
+          </a:prstGeom>
+          <a:noFill/>
+        </p:spPr>
+        <p:txBody>
+          <a:bodyPr wrap="square" lIns="45720" rIns="45720">
+            <a:spAutoFit/>
+          </a:bodyPr>
+          <a:lstStyle/>
+          <a:p>
+            <a:r>
+              <a:rPr sz="1100" b="0">
+                <a:solidFill>
+                  <a:srgbClr val="5B6770"/>
+                </a:solidFill>
+              </a:rPr>
+              <a:t>CEN429 Güvenli Programlama · Hafta 16</a:t>
+            </a:r>
+          </a:p>
+        </p:txBody>
+      </p:sp>
+      <p:sp>
+        <p:nvSpPr>
+          <p:cNvPr id="4" name="TextBox 3"/>
+          <p:cNvSpPr txBox="1"/>
+          <p:nvPr/>
+        </p:nvSpPr>
+        <p:spPr>
+          <a:xfrm>
+            <a:off x="640080" y="6446520"/>
+            <a:ext cx="7315200" cy="274320"/>
+          </a:xfrm>
+          <a:prstGeom prst="rect">
+            <a:avLst/>
+          </a:prstGeom>
+          <a:noFill/>
+        </p:spPr>
+        <p:txBody>
+          <a:bodyPr wrap="square" lIns="45720" rIns="45720">
+            <a:spAutoFit/>
+          </a:bodyPr>
+          <a:lstStyle/>
+          <a:p>
+            <a:r>
+              <a:rPr sz="1000" b="0">
+                <a:solidFill>
+                  <a:srgbClr val="5B6770"/>
+                </a:solidFill>
+              </a:rPr>
+              <a:t>RTEÜ Bilgisayar Mühendisliği · 2026-2027 Güz</a:t>
+            </a:r>
+          </a:p>
+        </p:txBody>
+      </p:sp>
+      <p:sp>
+        <p:nvSpPr>
+          <p:cNvPr id="5" name="TextBox 4"/>
+          <p:cNvSpPr txBox="1"/>
+          <p:nvPr/>
+        </p:nvSpPr>
+        <p:spPr>
+          <a:xfrm>
+            <a:off x="10637215" y="6446520"/>
+            <a:ext cx="914400" cy="274320"/>
+          </a:xfrm>
+          <a:prstGeom prst="rect">
+            <a:avLst/>
+          </a:prstGeom>
+          <a:noFill/>
+        </p:spPr>
+        <p:txBody>
+          <a:bodyPr wrap="square" lIns="45720" rIns="45720">
+            <a:spAutoFit/>
+          </a:bodyPr>
+          <a:lstStyle/>
+          <a:p>
+            <a:pPr algn="r"/>
+            <a:r>
+              <a:rPr sz="1000" b="0">
+                <a:solidFill>
+                  <a:srgbClr val="5B6770"/>
+                </a:solidFill>
+              </a:rPr>
+              <a:t>4</a:t>
             </a:r>
           </a:p>
         </p:txBody>
@@ -9855,7 +10983,7 @@
 </p:sld>
 </file>
 
-<file path=ppt/slides/slide4.xml><?xml version="1.0" encoding="utf-8"?>
+<file path=ppt/slides/slide5.xml><?xml version="1.0" encoding="utf-8"?>
 <p:sld xmlns:a="http://schemas.openxmlformats.org/drawingml/2006/main" xmlns:p="http://schemas.openxmlformats.org/presentationml/2006/main" xmlns:r="http://schemas.openxmlformats.org/officeDocument/2006/relationships">
   <p:cSld>
     <p:spTree>
@@ -9984,7 +11112,206 @@
                   <a:srgbClr val="5B6770"/>
                 </a:solidFill>
               </a:rPr>
-              <a:t>4</a:t>
+              <a:t>5</a:t>
+            </a:r>
+          </a:p>
+        </p:txBody>
+      </p:sp>
+      <p:sp>
+        <p:nvSpPr>
+          <p:cNvPr id="6" name="TextBox 5"/>
+          <p:cNvSpPr txBox="1"/>
+          <p:nvPr/>
+        </p:nvSpPr>
+        <p:spPr>
+          <a:xfrm>
+            <a:off x="640080" y="548640"/>
+            <a:ext cx="10911535" cy="731520"/>
+          </a:xfrm>
+          <a:prstGeom prst="rect">
+            <a:avLst/>
+          </a:prstGeom>
+          <a:noFill/>
+        </p:spPr>
+        <p:txBody>
+          <a:bodyPr wrap="square" lIns="45720" rIns="45720" anchor="ctr">
+            <a:spAutoFit/>
+          </a:bodyPr>
+          <a:lstStyle/>
+          <a:p>
+            <a:r>
+              <a:rPr sz="3000" b="1">
+                <a:solidFill>
+                  <a:srgbClr val="006D77"/>
+                </a:solidFill>
+              </a:rPr>
+              <a:t>Quiz-2 kapsamı — şema</a:t>
+            </a:r>
+          </a:p>
+        </p:txBody>
+      </p:sp>
+      <p:pic>
+        <p:nvPicPr>
+          <p:cNvPr id="7" name="Picture 6" descr="h16-01-kapsam.png"/>
+          <p:cNvPicPr>
+            <a:picLocks noChangeAspect="1"/>
+          </p:cNvPicPr>
+          <p:nvPr/>
+        </p:nvPicPr>
+        <p:blipFill>
+          <a:blip r:embed="rId3"/>
+          <a:stretch>
+            <a:fillRect/>
+          </a:stretch>
+        </p:blipFill>
+        <p:spPr>
+          <a:xfrm>
+            <a:off x="2046645" y="1325880"/>
+            <a:ext cx="8098404" cy="4060751"/>
+          </a:xfrm>
+          <a:prstGeom prst="rect">
+            <a:avLst/>
+          </a:prstGeom>
+        </p:spPr>
+      </p:pic>
+    </p:spTree>
+  </p:cSld>
+  <p:clrMapOvr>
+    <a:masterClrMapping/>
+  </p:clrMapOvr>
+</p:sld>
+</file>
+
+<file path=ppt/slides/slide6.xml><?xml version="1.0" encoding="utf-8"?>
+<p:sld xmlns:a="http://schemas.openxmlformats.org/drawingml/2006/main" xmlns:p="http://schemas.openxmlformats.org/presentationml/2006/main" xmlns:r="http://schemas.openxmlformats.org/officeDocument/2006/relationships">
+  <p:cSld>
+    <p:spTree>
+      <p:nvGrpSpPr>
+        <p:cNvPr id="1" name=""/>
+        <p:cNvGrpSpPr/>
+        <p:nvPr/>
+      </p:nvGrpSpPr>
+      <p:grpSpPr/>
+      <p:pic>
+        <p:nvPicPr>
+          <p:cNvPr id="2" name="Picture 1" descr="rteu_logo_kucuk.jpg"/>
+          <p:cNvPicPr>
+            <a:picLocks noChangeAspect="1"/>
+          </p:cNvPicPr>
+          <p:nvPr/>
+        </p:nvPicPr>
+        <p:blipFill>
+          <a:blip r:embed="rId2"/>
+          <a:stretch>
+            <a:fillRect/>
+          </a:stretch>
+        </p:blipFill>
+        <p:spPr>
+          <a:xfrm>
+            <a:off x="640080" y="164592"/>
+            <a:ext cx="242773" cy="329184"/>
+          </a:xfrm>
+          <a:prstGeom prst="rect">
+            <a:avLst/>
+          </a:prstGeom>
+        </p:spPr>
+      </p:pic>
+      <p:sp>
+        <p:nvSpPr>
+          <p:cNvPr id="3" name="TextBox 2"/>
+          <p:cNvSpPr txBox="1"/>
+          <p:nvPr/>
+        </p:nvSpPr>
+        <p:spPr>
+          <a:xfrm>
+            <a:off x="1051560" y="182880"/>
+            <a:ext cx="7315200" cy="320040"/>
+          </a:xfrm>
+          <a:prstGeom prst="rect">
+            <a:avLst/>
+          </a:prstGeom>
+          <a:noFill/>
+        </p:spPr>
+        <p:txBody>
+          <a:bodyPr wrap="square" lIns="45720" rIns="45720">
+            <a:spAutoFit/>
+          </a:bodyPr>
+          <a:lstStyle/>
+          <a:p>
+            <a:r>
+              <a:rPr sz="1100" b="0">
+                <a:solidFill>
+                  <a:srgbClr val="5B6770"/>
+                </a:solidFill>
+              </a:rPr>
+              <a:t>CEN429 Güvenli Programlama · Hafta 16</a:t>
+            </a:r>
+          </a:p>
+        </p:txBody>
+      </p:sp>
+      <p:sp>
+        <p:nvSpPr>
+          <p:cNvPr id="4" name="TextBox 3"/>
+          <p:cNvSpPr txBox="1"/>
+          <p:nvPr/>
+        </p:nvSpPr>
+        <p:spPr>
+          <a:xfrm>
+            <a:off x="640080" y="6446520"/>
+            <a:ext cx="7315200" cy="274320"/>
+          </a:xfrm>
+          <a:prstGeom prst="rect">
+            <a:avLst/>
+          </a:prstGeom>
+          <a:noFill/>
+        </p:spPr>
+        <p:txBody>
+          <a:bodyPr wrap="square" lIns="45720" rIns="45720">
+            <a:spAutoFit/>
+          </a:bodyPr>
+          <a:lstStyle/>
+          <a:p>
+            <a:r>
+              <a:rPr sz="1000" b="0">
+                <a:solidFill>
+                  <a:srgbClr val="5B6770"/>
+                </a:solidFill>
+              </a:rPr>
+              <a:t>RTEÜ Bilgisayar Mühendisliği · 2026-2027 Güz</a:t>
+            </a:r>
+          </a:p>
+        </p:txBody>
+      </p:sp>
+      <p:sp>
+        <p:nvSpPr>
+          <p:cNvPr id="5" name="TextBox 4"/>
+          <p:cNvSpPr txBox="1"/>
+          <p:nvPr/>
+        </p:nvSpPr>
+        <p:spPr>
+          <a:xfrm>
+            <a:off x="10637215" y="6446520"/>
+            <a:ext cx="914400" cy="274320"/>
+          </a:xfrm>
+          <a:prstGeom prst="rect">
+            <a:avLst/>
+          </a:prstGeom>
+          <a:noFill/>
+        </p:spPr>
+        <p:txBody>
+          <a:bodyPr wrap="square" lIns="45720" rIns="45720">
+            <a:spAutoFit/>
+          </a:bodyPr>
+          <a:lstStyle/>
+          <a:p>
+            <a:pPr algn="r"/>
+            <a:r>
+              <a:rPr sz="1000" b="0">
+                <a:solidFill>
+                  <a:srgbClr val="5B6770"/>
+                </a:solidFill>
+              </a:rPr>
+              <a:t>6</a:t>
             </a:r>
           </a:p>
         </p:txBody>
@@ -10707,719 +12034,6 @@
 </p:sld>
 </file>
 
-<file path=ppt/slides/slide5.xml><?xml version="1.0" encoding="utf-8"?>
-<p:sld xmlns:a="http://schemas.openxmlformats.org/drawingml/2006/main" xmlns:p="http://schemas.openxmlformats.org/presentationml/2006/main" xmlns:r="http://schemas.openxmlformats.org/officeDocument/2006/relationships">
-  <p:cSld>
-    <p:spTree>
-      <p:nvGrpSpPr>
-        <p:cNvPr id="1" name=""/>
-        <p:cNvGrpSpPr/>
-        <p:nvPr/>
-      </p:nvGrpSpPr>
-      <p:grpSpPr/>
-      <p:pic>
-        <p:nvPicPr>
-          <p:cNvPr id="2" name="Picture 1" descr="rteu_logo_kucuk.jpg"/>
-          <p:cNvPicPr>
-            <a:picLocks noChangeAspect="1"/>
-          </p:cNvPicPr>
-          <p:nvPr/>
-        </p:nvPicPr>
-        <p:blipFill>
-          <a:blip r:embed="rId2"/>
-          <a:stretch>
-            <a:fillRect/>
-          </a:stretch>
-        </p:blipFill>
-        <p:spPr>
-          <a:xfrm>
-            <a:off x="640080" y="164592"/>
-            <a:ext cx="242773" cy="329184"/>
-          </a:xfrm>
-          <a:prstGeom prst="rect">
-            <a:avLst/>
-          </a:prstGeom>
-        </p:spPr>
-      </p:pic>
-      <p:sp>
-        <p:nvSpPr>
-          <p:cNvPr id="3" name="TextBox 2"/>
-          <p:cNvSpPr txBox="1"/>
-          <p:nvPr/>
-        </p:nvSpPr>
-        <p:spPr>
-          <a:xfrm>
-            <a:off x="1051560" y="182880"/>
-            <a:ext cx="7315200" cy="320040"/>
-          </a:xfrm>
-          <a:prstGeom prst="rect">
-            <a:avLst/>
-          </a:prstGeom>
-          <a:noFill/>
-        </p:spPr>
-        <p:txBody>
-          <a:bodyPr wrap="square" lIns="45720" rIns="45720">
-            <a:spAutoFit/>
-          </a:bodyPr>
-          <a:lstStyle/>
-          <a:p>
-            <a:r>
-              <a:rPr sz="1100" b="0">
-                <a:solidFill>
-                  <a:srgbClr val="5B6770"/>
-                </a:solidFill>
-              </a:rPr>
-              <a:t>CEN429 Güvenli Programlama · Hafta 16</a:t>
-            </a:r>
-          </a:p>
-        </p:txBody>
-      </p:sp>
-      <p:sp>
-        <p:nvSpPr>
-          <p:cNvPr id="4" name="TextBox 3"/>
-          <p:cNvSpPr txBox="1"/>
-          <p:nvPr/>
-        </p:nvSpPr>
-        <p:spPr>
-          <a:xfrm>
-            <a:off x="640080" y="6446520"/>
-            <a:ext cx="7315200" cy="274320"/>
-          </a:xfrm>
-          <a:prstGeom prst="rect">
-            <a:avLst/>
-          </a:prstGeom>
-          <a:noFill/>
-        </p:spPr>
-        <p:txBody>
-          <a:bodyPr wrap="square" lIns="45720" rIns="45720">
-            <a:spAutoFit/>
-          </a:bodyPr>
-          <a:lstStyle/>
-          <a:p>
-            <a:r>
-              <a:rPr sz="1000" b="0">
-                <a:solidFill>
-                  <a:srgbClr val="5B6770"/>
-                </a:solidFill>
-              </a:rPr>
-              <a:t>RTEÜ Bilgisayar Mühendisliği · 2026-2027 Güz</a:t>
-            </a:r>
-          </a:p>
-        </p:txBody>
-      </p:sp>
-      <p:sp>
-        <p:nvSpPr>
-          <p:cNvPr id="5" name="TextBox 4"/>
-          <p:cNvSpPr txBox="1"/>
-          <p:nvPr/>
-        </p:nvSpPr>
-        <p:spPr>
-          <a:xfrm>
-            <a:off x="10637215" y="6446520"/>
-            <a:ext cx="914400" cy="274320"/>
-          </a:xfrm>
-          <a:prstGeom prst="rect">
-            <a:avLst/>
-          </a:prstGeom>
-          <a:noFill/>
-        </p:spPr>
-        <p:txBody>
-          <a:bodyPr wrap="square" lIns="45720" rIns="45720">
-            <a:spAutoFit/>
-          </a:bodyPr>
-          <a:lstStyle/>
-          <a:p>
-            <a:pPr algn="r"/>
-            <a:r>
-              <a:rPr sz="1000" b="0">
-                <a:solidFill>
-                  <a:srgbClr val="5B6770"/>
-                </a:solidFill>
-              </a:rPr>
-              <a:t>5</a:t>
-            </a:r>
-          </a:p>
-        </p:txBody>
-      </p:sp>
-      <p:sp>
-        <p:nvSpPr>
-          <p:cNvPr id="6" name="TextBox 5"/>
-          <p:cNvSpPr txBox="1"/>
-          <p:nvPr/>
-        </p:nvSpPr>
-        <p:spPr>
-          <a:xfrm>
-            <a:off x="640080" y="548640"/>
-            <a:ext cx="10911535" cy="731520"/>
-          </a:xfrm>
-          <a:prstGeom prst="rect">
-            <a:avLst/>
-          </a:prstGeom>
-          <a:noFill/>
-        </p:spPr>
-        <p:txBody>
-          <a:bodyPr wrap="square" lIns="45720" rIns="45720" anchor="ctr">
-            <a:spAutoFit/>
-          </a:bodyPr>
-          <a:lstStyle/>
-          <a:p>
-            <a:r>
-              <a:rPr sz="2600" b="1">
-                <a:solidFill>
-                  <a:srgbClr val="006D77"/>
-                </a:solidFill>
-              </a:rPr>
-              <a:t>Örnek sorular (10. hafta)</a:t>
-            </a:r>
-          </a:p>
-        </p:txBody>
-      </p:sp>
-      <p:sp>
-        <p:nvSpPr>
-          <p:cNvPr id="7" name="TextBox 6"/>
-          <p:cNvSpPr txBox="1"/>
-          <p:nvPr/>
-        </p:nvSpPr>
-        <p:spPr>
-          <a:xfrm>
-            <a:off x="640080" y="1325880"/>
-            <a:ext cx="10911535" cy="2148840"/>
-          </a:xfrm>
-          <a:prstGeom prst="rect">
-            <a:avLst/>
-          </a:prstGeom>
-          <a:noFill/>
-        </p:spPr>
-        <p:txBody>
-          <a:bodyPr wrap="square" lIns="45720" rIns="45720">
-            <a:spAutoFit/>
-          </a:bodyPr>
-          <a:lstStyle/>
-          <a:p>
-            <a:pPr>
-              <a:spcAft>
-                <a:spcPts val="300"/>
-              </a:spcAft>
-            </a:pPr>
-            <a:r>
-              <a:rPr sz="1800" b="1">
-                <a:solidFill>
-                  <a:srgbClr val="006D77"/>
-                </a:solidFill>
-              </a:rPr>
-              <a:t>1. </a:t>
-            </a:r>
-            <a:r>
-              <a:rPr sz="1800" b="0">
-                <a:solidFill>
-                  <a:srgbClr val="1F2D3A"/>
-                </a:solidFill>
-              </a:rPr>
-              <a:t>RSA-2048 + AES-256: güvenlik düzeyi?</a:t>
-            </a:r>
-          </a:p>
-          <a:p>
-            <a:pPr>
-              <a:spcAft>
-                <a:spcPts val="300"/>
-              </a:spcAft>
-            </a:pPr>
-            <a:r>
-              <a:rPr sz="1800" b="1">
-                <a:solidFill>
-                  <a:srgbClr val="006D77"/>
-                </a:solidFill>
-              </a:rPr>
-              <a:t>2. </a:t>
-            </a:r>
-            <a:r>
-              <a:rPr sz="1800" b="0">
-                <a:solidFill>
-                  <a:srgbClr val="1F2D3A"/>
-                </a:solidFill>
-              </a:rPr>
-              <a:t>"Dolgu geçersiz" ile "MAC geçersiz" ayrı iletiler: risk?</a:t>
-            </a:r>
-          </a:p>
-          <a:p>
-            <a:pPr>
-              <a:spcAft>
-                <a:spcPts val="300"/>
-              </a:spcAft>
-            </a:pPr>
-            <a:r>
-              <a:rPr sz="1800" b="1">
-                <a:solidFill>
-                  <a:srgbClr val="006D77"/>
-                </a:solidFill>
-              </a:rPr>
-              <a:t>3. </a:t>
-            </a:r>
-            <a:r>
-              <a:rPr sz="1800" b="0">
-                <a:solidFill>
-                  <a:srgbClr val="A1123F"/>
-                </a:solidFill>
-                <a:latin typeface="Consolas"/>
-              </a:rPr>
-              <a:t>if (EVP_DigestVerify(...))</a:t>
-            </a:r>
-            <a:r>
-              <a:rPr sz="1800" b="0">
-                <a:solidFill>
-                  <a:srgbClr val="1F2D3A"/>
-                </a:solidFill>
-              </a:rPr>
-              <a:t> neden hatalı?</a:t>
-            </a:r>
-          </a:p>
-          <a:p>
-            <a:pPr>
-              <a:spcAft>
-                <a:spcPts val="300"/>
-              </a:spcAft>
-            </a:pPr>
-            <a:r>
-              <a:rPr sz="1800" b="1">
-                <a:solidFill>
-                  <a:srgbClr val="006D77"/>
-                </a:solidFill>
-              </a:rPr>
-              <a:t>4. </a:t>
-            </a:r>
-            <a:r>
-              <a:rPr sz="1800" b="0">
-                <a:solidFill>
-                  <a:srgbClr val="A1123F"/>
-                </a:solidFill>
-                <a:latin typeface="Consolas"/>
-              </a:rPr>
-              <a:t>verify</a:t>
-            </a:r>
-            <a:r>
-              <a:rPr sz="1800" b="0">
-                <a:solidFill>
-                  <a:srgbClr val="1F2D3A"/>
-                </a:solidFill>
-              </a:rPr>
-              <a:t> ara sertifika olmadan neden başarısız?</a:t>
-            </a:r>
-          </a:p>
-          <a:p>
-            <a:pPr>
-              <a:spcAft>
-                <a:spcPts val="300"/>
-              </a:spcAft>
-            </a:pPr>
-            <a:r>
-              <a:rPr sz="1800" b="1">
-                <a:solidFill>
-                  <a:srgbClr val="006D77"/>
-                </a:solidFill>
-              </a:rPr>
-              <a:t>5. </a:t>
-            </a:r>
-            <a:r>
-              <a:rPr sz="1800" b="0">
-                <a:solidFill>
-                  <a:srgbClr val="1F2D3A"/>
-                </a:solidFill>
-              </a:rPr>
-              <a:t>OCSP'ye ulaşamayınca kabul: hangi örüntü?</a:t>
-            </a:r>
-          </a:p>
-          <a:p>
-            <a:pPr>
-              <a:spcAft>
-                <a:spcPts val="300"/>
-              </a:spcAft>
-            </a:pPr>
-            <a:r>
-              <a:rPr sz="1800" b="1">
-                <a:solidFill>
-                  <a:srgbClr val="006D77"/>
-                </a:solidFill>
-              </a:rPr>
-              <a:t>6. </a:t>
-            </a:r>
-            <a:r>
-              <a:rPr sz="1800" b="0">
-                <a:solidFill>
-                  <a:srgbClr val="1F2D3A"/>
-                </a:solidFill>
-              </a:rPr>
-              <a:t>Kimliksiz DH'ye karşı ne yapılır?</a:t>
-            </a:r>
-          </a:p>
-        </p:txBody>
-      </p:sp>
-    </p:spTree>
-  </p:cSld>
-  <p:clrMapOvr>
-    <a:masterClrMapping/>
-  </p:clrMapOvr>
-</p:sld>
-</file>
-
-<file path=ppt/slides/slide6.xml><?xml version="1.0" encoding="utf-8"?>
-<p:sld xmlns:a="http://schemas.openxmlformats.org/drawingml/2006/main" xmlns:p="http://schemas.openxmlformats.org/presentationml/2006/main" xmlns:r="http://schemas.openxmlformats.org/officeDocument/2006/relationships">
-  <p:cSld>
-    <p:spTree>
-      <p:nvGrpSpPr>
-        <p:cNvPr id="1" name=""/>
-        <p:cNvGrpSpPr/>
-        <p:nvPr/>
-      </p:nvGrpSpPr>
-      <p:grpSpPr/>
-      <p:pic>
-        <p:nvPicPr>
-          <p:cNvPr id="2" name="Picture 1" descr="rteu_logo_kucuk.jpg"/>
-          <p:cNvPicPr>
-            <a:picLocks noChangeAspect="1"/>
-          </p:cNvPicPr>
-          <p:nvPr/>
-        </p:nvPicPr>
-        <p:blipFill>
-          <a:blip r:embed="rId2"/>
-          <a:stretch>
-            <a:fillRect/>
-          </a:stretch>
-        </p:blipFill>
-        <p:spPr>
-          <a:xfrm>
-            <a:off x="640080" y="164592"/>
-            <a:ext cx="242773" cy="329184"/>
-          </a:xfrm>
-          <a:prstGeom prst="rect">
-            <a:avLst/>
-          </a:prstGeom>
-        </p:spPr>
-      </p:pic>
-      <p:sp>
-        <p:nvSpPr>
-          <p:cNvPr id="3" name="TextBox 2"/>
-          <p:cNvSpPr txBox="1"/>
-          <p:nvPr/>
-        </p:nvSpPr>
-        <p:spPr>
-          <a:xfrm>
-            <a:off x="1051560" y="182880"/>
-            <a:ext cx="7315200" cy="320040"/>
-          </a:xfrm>
-          <a:prstGeom prst="rect">
-            <a:avLst/>
-          </a:prstGeom>
-          <a:noFill/>
-        </p:spPr>
-        <p:txBody>
-          <a:bodyPr wrap="square" lIns="45720" rIns="45720">
-            <a:spAutoFit/>
-          </a:bodyPr>
-          <a:lstStyle/>
-          <a:p>
-            <a:r>
-              <a:rPr sz="1100" b="0">
-                <a:solidFill>
-                  <a:srgbClr val="5B6770"/>
-                </a:solidFill>
-              </a:rPr>
-              <a:t>CEN429 Güvenli Programlama · Hafta 16</a:t>
-            </a:r>
-          </a:p>
-        </p:txBody>
-      </p:sp>
-      <p:sp>
-        <p:nvSpPr>
-          <p:cNvPr id="4" name="TextBox 3"/>
-          <p:cNvSpPr txBox="1"/>
-          <p:nvPr/>
-        </p:nvSpPr>
-        <p:spPr>
-          <a:xfrm>
-            <a:off x="640080" y="6446520"/>
-            <a:ext cx="7315200" cy="274320"/>
-          </a:xfrm>
-          <a:prstGeom prst="rect">
-            <a:avLst/>
-          </a:prstGeom>
-          <a:noFill/>
-        </p:spPr>
-        <p:txBody>
-          <a:bodyPr wrap="square" lIns="45720" rIns="45720">
-            <a:spAutoFit/>
-          </a:bodyPr>
-          <a:lstStyle/>
-          <a:p>
-            <a:r>
-              <a:rPr sz="1000" b="0">
-                <a:solidFill>
-                  <a:srgbClr val="5B6770"/>
-                </a:solidFill>
-              </a:rPr>
-              <a:t>RTEÜ Bilgisayar Mühendisliği · 2026-2027 Güz</a:t>
-            </a:r>
-          </a:p>
-        </p:txBody>
-      </p:sp>
-      <p:sp>
-        <p:nvSpPr>
-          <p:cNvPr id="5" name="TextBox 4"/>
-          <p:cNvSpPr txBox="1"/>
-          <p:nvPr/>
-        </p:nvSpPr>
-        <p:spPr>
-          <a:xfrm>
-            <a:off x="10637215" y="6446520"/>
-            <a:ext cx="914400" cy="274320"/>
-          </a:xfrm>
-          <a:prstGeom prst="rect">
-            <a:avLst/>
-          </a:prstGeom>
-          <a:noFill/>
-        </p:spPr>
-        <p:txBody>
-          <a:bodyPr wrap="square" lIns="45720" rIns="45720">
-            <a:spAutoFit/>
-          </a:bodyPr>
-          <a:lstStyle/>
-          <a:p>
-            <a:pPr algn="r"/>
-            <a:r>
-              <a:rPr sz="1000" b="0">
-                <a:solidFill>
-                  <a:srgbClr val="5B6770"/>
-                </a:solidFill>
-              </a:rPr>
-              <a:t>6</a:t>
-            </a:r>
-          </a:p>
-        </p:txBody>
-      </p:sp>
-      <p:sp>
-        <p:nvSpPr>
-          <p:cNvPr id="6" name="TextBox 5"/>
-          <p:cNvSpPr txBox="1"/>
-          <p:nvPr/>
-        </p:nvSpPr>
-        <p:spPr>
-          <a:xfrm>
-            <a:off x="640080" y="548640"/>
-            <a:ext cx="10911535" cy="731520"/>
-          </a:xfrm>
-          <a:prstGeom prst="rect">
-            <a:avLst/>
-          </a:prstGeom>
-          <a:noFill/>
-        </p:spPr>
-        <p:txBody>
-          <a:bodyPr wrap="square" lIns="45720" rIns="45720" anchor="ctr">
-            <a:spAutoFit/>
-          </a:bodyPr>
-          <a:lstStyle/>
-          <a:p>
-            <a:r>
-              <a:rPr sz="2600" b="1">
-                <a:solidFill>
-                  <a:srgbClr val="006D77"/>
-                </a:solidFill>
-              </a:rPr>
-              <a:t>Örnek sorular (12–13. haftalar)</a:t>
-            </a:r>
-          </a:p>
-        </p:txBody>
-      </p:sp>
-      <p:sp>
-        <p:nvSpPr>
-          <p:cNvPr id="7" name="TextBox 6"/>
-          <p:cNvSpPr txBox="1"/>
-          <p:nvPr/>
-        </p:nvSpPr>
-        <p:spPr>
-          <a:xfrm>
-            <a:off x="640080" y="1325880"/>
-            <a:ext cx="10911535" cy="2491740"/>
-          </a:xfrm>
-          <a:prstGeom prst="rect">
-            <a:avLst/>
-          </a:prstGeom>
-          <a:noFill/>
-        </p:spPr>
-        <p:txBody>
-          <a:bodyPr wrap="square" lIns="45720" rIns="45720">
-            <a:spAutoFit/>
-          </a:bodyPr>
-          <a:lstStyle/>
-          <a:p>
-            <a:pPr>
-              <a:spcAft>
-                <a:spcPts val="300"/>
-              </a:spcAft>
-            </a:pPr>
-            <a:r>
-              <a:rPr sz="1800" b="1">
-                <a:solidFill>
-                  <a:srgbClr val="006D77"/>
-                </a:solidFill>
-              </a:rPr>
-              <a:t>1. </a:t>
-            </a:r>
-            <a:r>
-              <a:rPr sz="1800" b="0">
-                <a:solidFill>
-                  <a:srgbClr val="1F2D3A"/>
-                </a:solidFill>
-              </a:rPr>
-              <a:t>TOE neden benzersiz tanımlanır?</a:t>
-            </a:r>
-          </a:p>
-          <a:p>
-            <a:pPr>
-              <a:spcAft>
-                <a:spcPts val="300"/>
-              </a:spcAft>
-            </a:pPr>
-            <a:r>
-              <a:rPr sz="1800" b="1">
-                <a:solidFill>
-                  <a:srgbClr val="006D77"/>
-                </a:solidFill>
-              </a:rPr>
-              <a:t>2. </a:t>
-            </a:r>
-            <a:r>
-              <a:rPr sz="1800" b="0">
-                <a:solidFill>
-                  <a:srgbClr val="1F2D3A"/>
-                </a:solidFill>
-              </a:rPr>
-              <a:t>Etki analizi ile delta değerlendirme ilişkisi?</a:t>
-            </a:r>
-          </a:p>
-          <a:p>
-            <a:pPr>
-              <a:spcAft>
-                <a:spcPts val="300"/>
-              </a:spcAft>
-            </a:pPr>
-            <a:r>
-              <a:rPr sz="1800" b="1">
-                <a:solidFill>
-                  <a:srgbClr val="006D77"/>
-                </a:solidFill>
-              </a:rPr>
-              <a:t>3. </a:t>
-            </a:r>
-            <a:r>
-              <a:rPr sz="1800" b="0">
-                <a:solidFill>
-                  <a:srgbClr val="1F2D3A"/>
-                </a:solidFill>
-              </a:rPr>
-              <a:t>"Uygulama güvenli olmalıdır" nasıl düzeltilir?</a:t>
-            </a:r>
-          </a:p>
-          <a:p>
-            <a:pPr>
-              <a:spcAft>
-                <a:spcPts val="300"/>
-              </a:spcAft>
-            </a:pPr>
-            <a:r>
-              <a:rPr sz="1800" b="1">
-                <a:solidFill>
-                  <a:srgbClr val="006D77"/>
-                </a:solidFill>
-              </a:rPr>
-              <a:t>4. </a:t>
-            </a:r>
-            <a:r>
-              <a:rPr sz="1800" b="0">
-                <a:solidFill>
-                  <a:srgbClr val="1F2D3A"/>
-                </a:solidFill>
-              </a:rPr>
-              <a:t>Kanıtsız "karşılandı" ne anlama gelir?</a:t>
-            </a:r>
-          </a:p>
-          <a:p>
-            <a:pPr>
-              <a:spcAft>
-                <a:spcPts val="300"/>
-              </a:spcAft>
-            </a:pPr>
-            <a:r>
-              <a:rPr sz="1800" b="1">
-                <a:solidFill>
-                  <a:srgbClr val="006D77"/>
-                </a:solidFill>
-              </a:rPr>
-              <a:t>5. </a:t>
-            </a:r>
-            <a:r>
-              <a:rPr sz="1800" b="0">
-                <a:solidFill>
-                  <a:srgbClr val="1F2D3A"/>
-                </a:solidFill>
-              </a:rPr>
-              <a:t>Kütüphane güvenli güncellemeyi karşılayamıyorsa?</a:t>
-            </a:r>
-          </a:p>
-          <a:p>
-            <a:pPr>
-              <a:spcAft>
-                <a:spcPts val="300"/>
-              </a:spcAft>
-            </a:pPr>
-            <a:r>
-              <a:rPr sz="1800" b="1">
-                <a:solidFill>
-                  <a:srgbClr val="006D77"/>
-                </a:solidFill>
-              </a:rPr>
-              <a:t>6. </a:t>
-            </a:r>
-            <a:r>
-              <a:rPr sz="1800" b="0">
-                <a:solidFill>
-                  <a:srgbClr val="1F2D3A"/>
-                </a:solidFill>
-              </a:rPr>
-              <a:t>EAL4+ her zaman EAL2'den güvenli mi?</a:t>
-            </a:r>
-          </a:p>
-          <a:p>
-            <a:pPr>
-              <a:spcAft>
-                <a:spcPts val="300"/>
-              </a:spcAft>
-            </a:pPr>
-            <a:r>
-              <a:rPr sz="1800" b="1">
-                <a:solidFill>
-                  <a:srgbClr val="006D77"/>
-                </a:solidFill>
-              </a:rPr>
-              <a:t>7. </a:t>
-            </a:r>
-            <a:r>
-              <a:rPr sz="1800" b="0">
-                <a:solidFill>
-                  <a:srgbClr val="1F2D3A"/>
-                </a:solidFill>
-              </a:rPr>
-              <a:t>FIPS doğrulanmış kütüphane = uygulama FIPS uyumlu mu?</a:t>
-            </a:r>
-          </a:p>
-        </p:txBody>
-      </p:sp>
-    </p:spTree>
-  </p:cSld>
-  <p:clrMapOvr>
-    <a:masterClrMapping/>
-  </p:clrMapOvr>
-</p:sld>
-</file>
-
 <file path=ppt/slides/slide7.xml><?xml version="1.0" encoding="utf-8"?>
 <p:sld xmlns:a="http://schemas.openxmlformats.org/drawingml/2006/main" xmlns:p="http://schemas.openxmlformats.org/presentationml/2006/main" xmlns:r="http://schemas.openxmlformats.org/officeDocument/2006/relationships">
   <p:cSld>
@@ -11582,96 +12196,35 @@
                   <a:srgbClr val="006D77"/>
                 </a:solidFill>
               </a:rPr>
-              <a:t>İyi şanslar</a:t>
-            </a:r>
-          </a:p>
-        </p:txBody>
-      </p:sp>
-      <p:sp>
-        <p:nvSpPr>
-          <p:cNvPr id="7" name="TextBox 6"/>
-          <p:cNvSpPr txBox="1"/>
-          <p:nvPr/>
-        </p:nvSpPr>
-        <p:spPr>
-          <a:xfrm>
-            <a:off x="640080" y="1325880"/>
-            <a:ext cx="10911535" cy="843280"/>
-          </a:xfrm>
-          <a:prstGeom prst="rect">
-            <a:avLst/>
-          </a:prstGeom>
-          <a:noFill/>
-        </p:spPr>
-        <p:txBody>
-          <a:bodyPr wrap="square" lIns="45720" rIns="45720">
-            <a:spAutoFit/>
-          </a:bodyPr>
-          <a:lstStyle/>
-          <a:p>
-            <a:pPr>
-              <a:spcAft>
-                <a:spcPts val="300"/>
-              </a:spcAft>
-            </a:pPr>
-            <a:r>
-              <a:rPr sz="2000" b="1">
-                <a:solidFill>
-                  <a:srgbClr val="006D77"/>
-                </a:solidFill>
-              </a:rPr>
-              <a:t>• </a:t>
-            </a:r>
-            <a:r>
-              <a:rPr sz="2000" b="0">
-                <a:solidFill>
-                  <a:srgbClr val="1F2D3A"/>
-                </a:solidFill>
-              </a:rPr>
-              <a:t>Cevapları 16. hafta sayfasında</a:t>
-            </a:r>
-          </a:p>
-          <a:p>
-            <a:pPr>
-              <a:spcAft>
-                <a:spcPts val="300"/>
-              </a:spcAft>
-            </a:pPr>
-            <a:r>
-              <a:rPr sz="2000" b="1">
-                <a:solidFill>
-                  <a:srgbClr val="006D77"/>
-                </a:solidFill>
-              </a:rPr>
-              <a:t>• </a:t>
-            </a:r>
-            <a:r>
-              <a:rPr sz="2000" b="0">
-                <a:solidFill>
-                  <a:srgbClr val="1F2D3A"/>
-                </a:solidFill>
-              </a:rPr>
-              <a:t>Kılavuzunuz bir </a:t>
-            </a:r>
-            <a:r>
-              <a:rPr sz="2000" b="1">
-                <a:solidFill>
-                  <a:srgbClr val="1F2D3A"/>
-                </a:solidFill>
-              </a:rPr>
-              <a:t>portfolyo</a:t>
-            </a:r>
-            <a:r>
-              <a:rPr sz="2000" b="0">
-                <a:solidFill>
-                  <a:srgbClr val="1F2D3A"/>
-                </a:solidFill>
-              </a:rPr>
-              <a:t> öğesidir (gizli bilgi içermediğinden emin olun)</a:t>
-            </a:r>
-          </a:p>
-        </p:txBody>
-      </p:sp>
+              <a:t>Cevap kalıbı — şema</a:t>
+            </a:r>
+          </a:p>
+        </p:txBody>
+      </p:sp>
+      <p:pic>
+        <p:nvPicPr>
+          <p:cNvPr id="7" name="Picture 6" descr="h16-03-cevap-kalibi.png"/>
+          <p:cNvPicPr>
+            <a:picLocks noChangeAspect="1"/>
+          </p:cNvPicPr>
+          <p:nvPr/>
+        </p:nvPicPr>
+        <p:blipFill>
+          <a:blip r:embed="rId3"/>
+          <a:stretch>
+            <a:fillRect/>
+          </a:stretch>
+        </p:blipFill>
+        <p:spPr>
+          <a:xfrm>
+            <a:off x="2046645" y="1325880"/>
+            <a:ext cx="8098404" cy="3210484"/>
+          </a:xfrm>
+          <a:prstGeom prst="rect">
+            <a:avLst/>
+          </a:prstGeom>
+        </p:spPr>
+      </p:pic>
     </p:spTree>
   </p:cSld>
   <p:clrMapOvr>
@@ -11683,14 +12236,6 @@
 <file path=ppt/slides/slide8.xml><?xml version="1.0" encoding="utf-8"?>
 <p:sld xmlns:a="http://schemas.openxmlformats.org/drawingml/2006/main" xmlns:p="http://schemas.openxmlformats.org/presentationml/2006/main" xmlns:r="http://schemas.openxmlformats.org/officeDocument/2006/relationships">
   <p:cSld>
-    <p:bg>
-      <p:bgPr>
-        <a:solidFill>
-          <a:srgbClr val="006D77"/>
-        </a:solidFill>
-        <a:effectLst/>
-      </p:bgPr>
-    </p:bg>
     <p:spTree>
       <p:nvGrpSpPr>
         <p:cNvPr id="1" name=""/>
@@ -11698,9 +12243,33 @@
         <p:nvPr/>
       </p:nvGrpSpPr>
       <p:grpSpPr/>
-      <p:sp>
-        <p:nvSpPr>
-          <p:cNvPr id="2" name="TextBox 1"/>
+      <p:pic>
+        <p:nvPicPr>
+          <p:cNvPr id="2" name="Picture 1" descr="rteu_logo_kucuk.jpg"/>
+          <p:cNvPicPr>
+            <a:picLocks noChangeAspect="1"/>
+          </p:cNvPicPr>
+          <p:nvPr/>
+        </p:nvPicPr>
+        <p:blipFill>
+          <a:blip r:embed="rId2"/>
+          <a:stretch>
+            <a:fillRect/>
+          </a:stretch>
+        </p:blipFill>
+        <p:spPr>
+          <a:xfrm>
+            <a:off x="640080" y="164592"/>
+            <a:ext cx="242773" cy="329184"/>
+          </a:xfrm>
+          <a:prstGeom prst="rect">
+            <a:avLst/>
+          </a:prstGeom>
+        </p:spPr>
+      </p:pic>
+      <p:sp>
+        <p:nvSpPr>
+          <p:cNvPr id="3" name="TextBox 2"/>
           <p:cNvSpPr txBox="1"/>
           <p:nvPr/>
         </p:nvSpPr>
@@ -11723,7 +12292,7 @@
             <a:r>
               <a:rPr sz="1100" b="0">
                 <a:solidFill>
-                  <a:srgbClr val="D8F0F2"/>
+                  <a:srgbClr val="5B6770"/>
                 </a:solidFill>
               </a:rPr>
               <a:t>CEN429 Güvenli Programlama · Hafta 16</a:t>
@@ -11733,7 +12302,7 @@
       </p:sp>
       <p:sp>
         <p:nvSpPr>
-          <p:cNvPr id="3" name="TextBox 2"/>
+          <p:cNvPr id="4" name="TextBox 3"/>
           <p:cNvSpPr txBox="1"/>
           <p:nvPr/>
         </p:nvSpPr>
@@ -11756,7 +12325,7 @@
             <a:r>
               <a:rPr sz="1000" b="0">
                 <a:solidFill>
-                  <a:srgbClr val="D8F0F2"/>
+                  <a:srgbClr val="5B6770"/>
                 </a:solidFill>
               </a:rPr>
               <a:t>RTEÜ Bilgisayar Mühendisliği · 2026-2027 Güz</a:t>
@@ -11766,7 +12335,7 @@
       </p:sp>
       <p:sp>
         <p:nvSpPr>
-          <p:cNvPr id="4" name="TextBox 3"/>
+          <p:cNvPr id="5" name="TextBox 4"/>
           <p:cNvSpPr txBox="1"/>
           <p:nvPr/>
         </p:nvSpPr>
@@ -11790,7 +12359,7 @@
             <a:r>
               <a:rPr sz="1000" b="0">
                 <a:solidFill>
-                  <a:srgbClr val="D8F0F2"/>
+                  <a:srgbClr val="5B6770"/>
                 </a:solidFill>
               </a:rPr>
               <a:t>8</a:t>
@@ -11800,14 +12369,47 @@
       </p:sp>
       <p:sp>
         <p:nvSpPr>
-          <p:cNvPr id="5" name="TextBox 4"/>
-          <p:cNvSpPr txBox="1"/>
-          <p:nvPr/>
-        </p:nvSpPr>
-        <p:spPr>
-          <a:xfrm>
-            <a:off x="640080" y="2743200"/>
-            <a:ext cx="10911535" cy="1280160"/>
+          <p:cNvPr id="6" name="TextBox 5"/>
+          <p:cNvSpPr txBox="1"/>
+          <p:nvPr/>
+        </p:nvSpPr>
+        <p:spPr>
+          <a:xfrm>
+            <a:off x="640080" y="548640"/>
+            <a:ext cx="10911535" cy="731520"/>
+          </a:xfrm>
+          <a:prstGeom prst="rect">
+            <a:avLst/>
+          </a:prstGeom>
+          <a:noFill/>
+        </p:spPr>
+        <p:txBody>
+          <a:bodyPr wrap="square" lIns="45720" rIns="45720" anchor="ctr">
+            <a:spAutoFit/>
+          </a:bodyPr>
+          <a:lstStyle/>
+          <a:p>
+            <a:r>
+              <a:rPr sz="2600" b="1">
+                <a:solidFill>
+                  <a:srgbClr val="006D77"/>
+                </a:solidFill>
+              </a:rPr>
+              <a:t>Örnek sorular (10. hafta)</a:t>
+            </a:r>
+          </a:p>
+        </p:txBody>
+      </p:sp>
+      <p:sp>
+        <p:nvSpPr>
+          <p:cNvPr id="7" name="TextBox 6"/>
+          <p:cNvSpPr txBox="1"/>
+          <p:nvPr/>
+        </p:nvSpPr>
+        <p:spPr>
+          <a:xfrm>
+            <a:off x="640080" y="1325880"/>
+            <a:ext cx="10911535" cy="2148840"/>
           </a:xfrm>
           <a:prstGeom prst="rect">
             <a:avLst/>
@@ -11820,14 +12422,159 @@
           </a:bodyPr>
           <a:lstStyle/>
           <a:p>
-            <a:pPr algn="l"/>
-            <a:r>
-              <a:rPr sz="4000" b="1">
-                <a:solidFill>
-                  <a:srgbClr val="FFFFFF"/>
-                </a:solidFill>
-              </a:rPr>
-              <a:t>Ek · Hafta hafta konu haritası (9–14)</a:t>
+            <a:pPr>
+              <a:spcAft>
+                <a:spcPts val="300"/>
+              </a:spcAft>
+            </a:pPr>
+            <a:r>
+              <a:rPr sz="1800" b="1">
+                <a:solidFill>
+                  <a:srgbClr val="006D77"/>
+                </a:solidFill>
+              </a:rPr>
+              <a:t>1. </a:t>
+            </a:r>
+            <a:r>
+              <a:rPr sz="1800" b="0">
+                <a:solidFill>
+                  <a:srgbClr val="1F2D3A"/>
+                </a:solidFill>
+              </a:rPr>
+              <a:t>RSA-2048 + AES-256: güvenlik düzeyi?</a:t>
+            </a:r>
+          </a:p>
+          <a:p>
+            <a:pPr>
+              <a:spcAft>
+                <a:spcPts val="300"/>
+              </a:spcAft>
+            </a:pPr>
+            <a:r>
+              <a:rPr sz="1800" b="1">
+                <a:solidFill>
+                  <a:srgbClr val="006D77"/>
+                </a:solidFill>
+              </a:rPr>
+              <a:t>2. </a:t>
+            </a:r>
+            <a:r>
+              <a:rPr sz="1800" b="0">
+                <a:solidFill>
+                  <a:srgbClr val="1F2D3A"/>
+                </a:solidFill>
+              </a:rPr>
+              <a:t>"Dolgu geçersiz" ile "MAC geçersiz" ayrı iletiler: risk?</a:t>
+            </a:r>
+          </a:p>
+          <a:p>
+            <a:pPr>
+              <a:spcAft>
+                <a:spcPts val="300"/>
+              </a:spcAft>
+            </a:pPr>
+            <a:r>
+              <a:rPr sz="1800" b="1">
+                <a:solidFill>
+                  <a:srgbClr val="006D77"/>
+                </a:solidFill>
+              </a:rPr>
+              <a:t>3. </a:t>
+            </a:r>
+            <a:r>
+              <a:rPr sz="1800" b="0">
+                <a:solidFill>
+                  <a:srgbClr val="A1123F"/>
+                </a:solidFill>
+                <a:latin typeface="Consolas"/>
+              </a:rPr>
+              <a:t>if (EVP_DigestVerify(...))</a:t>
+            </a:r>
+            <a:r>
+              <a:rPr sz="1800" b="0">
+                <a:solidFill>
+                  <a:srgbClr val="1F2D3A"/>
+                </a:solidFill>
+              </a:rPr>
+              <a:t> neden hatalı?</a:t>
+            </a:r>
+          </a:p>
+          <a:p>
+            <a:pPr>
+              <a:spcAft>
+                <a:spcPts val="300"/>
+              </a:spcAft>
+            </a:pPr>
+            <a:r>
+              <a:rPr sz="1800" b="1">
+                <a:solidFill>
+                  <a:srgbClr val="006D77"/>
+                </a:solidFill>
+              </a:rPr>
+              <a:t>4. </a:t>
+            </a:r>
+            <a:r>
+              <a:rPr sz="1800" b="0">
+                <a:solidFill>
+                  <a:srgbClr val="A1123F"/>
+                </a:solidFill>
+                <a:latin typeface="Consolas"/>
+              </a:rPr>
+              <a:t>verify</a:t>
+            </a:r>
+            <a:r>
+              <a:rPr sz="1800" b="0">
+                <a:solidFill>
+                  <a:srgbClr val="1F2D3A"/>
+                </a:solidFill>
+              </a:rPr>
+              <a:t> ara sertifika olmadan neden başarısız?</a:t>
+            </a:r>
+          </a:p>
+          <a:p>
+            <a:pPr>
+              <a:spcAft>
+                <a:spcPts val="300"/>
+              </a:spcAft>
+            </a:pPr>
+            <a:r>
+              <a:rPr sz="1800" b="1">
+                <a:solidFill>
+                  <a:srgbClr val="006D77"/>
+                </a:solidFill>
+              </a:rPr>
+              <a:t>5. </a:t>
+            </a:r>
+            <a:r>
+              <a:rPr sz="1800" b="0">
+                <a:solidFill>
+                  <a:srgbClr val="1F2D3A"/>
+                </a:solidFill>
+              </a:rPr>
+              <a:t>OCSP'ye ulaşamayınca kabul: hangi örüntü?</a:t>
+            </a:r>
+          </a:p>
+          <a:p>
+            <a:pPr>
+              <a:spcAft>
+                <a:spcPts val="300"/>
+              </a:spcAft>
+            </a:pPr>
+            <a:r>
+              <a:rPr sz="1800" b="1">
+                <a:solidFill>
+                  <a:srgbClr val="006D77"/>
+                </a:solidFill>
+              </a:rPr>
+              <a:t>6. </a:t>
+            </a:r>
+            <a:r>
+              <a:rPr sz="1800" b="0">
+                <a:solidFill>
+                  <a:srgbClr val="1F2D3A"/>
+                </a:solidFill>
+              </a:rPr>
+              <a:t>Kimliksiz DH'ye karşı ne yapılır?</a:t>
             </a:r>
           </a:p>
         </p:txBody>
@@ -11997,12 +12744,12 @@
           <a:lstStyle/>
           <a:p>
             <a:r>
-              <a:rPr sz="3000" b="1">
+              <a:rPr sz="2600" b="1">
                 <a:solidFill>
                   <a:srgbClr val="006D77"/>
                 </a:solidFill>
               </a:rPr>
-              <a:t>9. hafta · anahtar noktalar</a:t>
+              <a:t>Örnek sorular (12–13. haftalar)</a:t>
             </a:r>
           </a:p>
         </p:txBody>
@@ -12016,7 +12763,7 @@
         <p:spPr>
           <a:xfrm>
             <a:off x="640080" y="1325880"/>
-            <a:ext cx="10911535" cy="1595120"/>
+            <a:ext cx="10911535" cy="2491740"/>
           </a:xfrm>
           <a:prstGeom prst="rect">
             <a:avLst/>
@@ -12035,36 +12782,20 @@
               </a:spcAft>
             </a:pPr>
             <a:r>
-              <a:rPr sz="2000" b="1">
+              <a:rPr sz="1800" b="1">
                 <a:solidFill>
                   <a:srgbClr val="006D77"/>
                 </a:solidFill>
               </a:rPr>
-              <a:t>• </a:t>
-            </a:r>
-            <a:r>
-              <a:rPr sz="2000" b="0">
+              <a:t>1. </a:t>
+            </a:r>
+            <a:r>
+              <a:rPr sz="1800" b="0">
                 <a:solidFill>
                   <a:srgbClr val="1F2D3A"/>
                 </a:solidFill>
               </a:rPr>
-              <a:t>Gizleme: kırılamazlık değil </a:t>
-            </a:r>
-            <a:r>
-              <a:rPr sz="2000" b="1">
-                <a:solidFill>
-                  <a:srgbClr val="1F2D3A"/>
-                </a:solidFill>
-              </a:rPr>
-              <a:t>maliyet</a:t>
-            </a:r>
-            <a:r>
-              <a:rPr sz="2000" b="0">
-                <a:solidFill>
-                  <a:srgbClr val="1F2D3A"/>
-                </a:solidFill>
-              </a:rPr>
-              <a:t>.</a:t>
+              <a:t>TOE neden benzersiz tanımlanır?</a:t>
             </a:r>
           </a:p>
           <a:p>
@@ -12074,20 +12805,20 @@
               </a:spcAft>
             </a:pPr>
             <a:r>
-              <a:rPr sz="2000" b="1">
+              <a:rPr sz="1800" b="1">
                 <a:solidFill>
                   <a:srgbClr val="006D77"/>
                 </a:solidFill>
               </a:rPr>
-              <a:t>• </a:t>
-            </a:r>
-            <a:r>
-              <a:rPr sz="2000" b="0">
+              <a:t>2. </a:t>
+            </a:r>
+            <a:r>
+              <a:rPr sz="1800" b="0">
                 <a:solidFill>
                   <a:srgbClr val="1F2D3A"/>
                 </a:solidFill>
               </a:rPr>
-              <a:t>Kurallar: opak yüklem, düzleştirme, sahte/ölü, veri kodlama.</a:t>
+              <a:t>Etki analizi ile delta değerlendirme ilişkisi?</a:t>
             </a:r>
           </a:p>
           <a:p>
@@ -12097,20 +12828,20 @@
               </a:spcAft>
             </a:pPr>
             <a:r>
-              <a:rPr sz="2000" b="1">
+              <a:rPr sz="1800" b="1">
                 <a:solidFill>
                   <a:srgbClr val="006D77"/>
                 </a:solidFill>
               </a:rPr>
-              <a:t>• </a:t>
-            </a:r>
-            <a:r>
-              <a:rPr sz="2000" b="0">
+              <a:t>3. </a:t>
+            </a:r>
+            <a:r>
+              <a:rPr sz="1800" b="0">
                 <a:solidFill>
                   <a:srgbClr val="1F2D3A"/>
                 </a:solidFill>
               </a:rPr>
-              <a:t>Ölçme: güç, dayanıklılık, gizlilik, maliyet.</a:t>
+              <a:t>"Uygulama güvenli olmalıdır" nasıl düzeltilir?</a:t>
             </a:r>
           </a:p>
           <a:p>
@@ -12120,20 +12851,89 @@
               </a:spcAft>
             </a:pPr>
             <a:r>
-              <a:rPr sz="2000" b="1">
+              <a:rPr sz="1800" b="1">
                 <a:solidFill>
                   <a:srgbClr val="006D77"/>
                 </a:solidFill>
               </a:rPr>
-              <a:t>• </a:t>
-            </a:r>
-            <a:r>
-              <a:rPr sz="2000" b="0">
+              <a:t>4. </a:t>
+            </a:r>
+            <a:r>
+              <a:rPr sz="1800" b="0">
                 <a:solidFill>
                   <a:srgbClr val="1F2D3A"/>
                 </a:solidFill>
               </a:rPr>
-              <a:t>Çeşitlendirme.</a:t>
+              <a:t>Kanıtsız "karşılandı" ne anlama gelir?</a:t>
+            </a:r>
+          </a:p>
+          <a:p>
+            <a:pPr>
+              <a:spcAft>
+                <a:spcPts val="300"/>
+              </a:spcAft>
+            </a:pPr>
+            <a:r>
+              <a:rPr sz="1800" b="1">
+                <a:solidFill>
+                  <a:srgbClr val="006D77"/>
+                </a:solidFill>
+              </a:rPr>
+              <a:t>5. </a:t>
+            </a:r>
+            <a:r>
+              <a:rPr sz="1800" b="0">
+                <a:solidFill>
+                  <a:srgbClr val="1F2D3A"/>
+                </a:solidFill>
+              </a:rPr>
+              <a:t>Kütüphane güvenli güncellemeyi karşılayamıyorsa?</a:t>
+            </a:r>
+          </a:p>
+          <a:p>
+            <a:pPr>
+              <a:spcAft>
+                <a:spcPts val="300"/>
+              </a:spcAft>
+            </a:pPr>
+            <a:r>
+              <a:rPr sz="1800" b="1">
+                <a:solidFill>
+                  <a:srgbClr val="006D77"/>
+                </a:solidFill>
+              </a:rPr>
+              <a:t>6. </a:t>
+            </a:r>
+            <a:r>
+              <a:rPr sz="1800" b="0">
+                <a:solidFill>
+                  <a:srgbClr val="1F2D3A"/>
+                </a:solidFill>
+              </a:rPr>
+              <a:t>EAL4+ her zaman EAL2'den güvenli mi?</a:t>
+            </a:r>
+          </a:p>
+          <a:p>
+            <a:pPr>
+              <a:spcAft>
+                <a:spcPts val="300"/>
+              </a:spcAft>
+            </a:pPr>
+            <a:r>
+              <a:rPr sz="1800" b="1">
+                <a:solidFill>
+                  <a:srgbClr val="006D77"/>
+                </a:solidFill>
+              </a:rPr>
+              <a:t>7. </a:t>
+            </a:r>
+            <a:r>
+              <a:rPr sz="1800" b="0">
+                <a:solidFill>
+                  <a:srgbClr val="1F2D3A"/>
+                </a:solidFill>
+              </a:rPr>
+              <a:t>FIPS doğrulanmış kütüphane = uygulama FIPS uyumlu mu?</a:t>
             </a:r>
           </a:p>
         </p:txBody>
